--- a/slides/lecture07_structures.pptx
+++ b/slides/lecture07_structures.pptx
@@ -5,7 +5,7 @@
     <p:sldMasterId id="2147483648" r:id="rId1"/>
   </p:sldMasterIdLst>
   <p:notesMasterIdLst>
-    <p:notesMasterId r:id="rId27"/>
+    <p:notesMasterId r:id="rId28"/>
   </p:notesMasterIdLst>
   <p:sldIdLst>
     <p:sldId id="257" r:id="rId2"/>
@@ -33,6 +33,7 @@
     <p:sldId id="396" r:id="rId24"/>
     <p:sldId id="397" r:id="rId25"/>
     <p:sldId id="398" r:id="rId26"/>
+    <p:sldId id="399" r:id="rId27"/>
   </p:sldIdLst>
   <p:sldSz cx="12192000" cy="6858000"/>
   <p:notesSz cx="6858000" cy="9144000"/>
@@ -161,6 +162,7 @@
             <p14:sldId id="396"/>
             <p14:sldId id="397"/>
             <p14:sldId id="398"/>
+            <p14:sldId id="399"/>
           </p14:sldIdLst>
         </p14:section>
       </p14:sectionLst>
@@ -254,7 +256,7 @@
           <a:p>
             <a:fld id="{55C9657E-FDB3-4206-AA4E-9AE2AAB0A71C}" type="datetimeFigureOut">
               <a:rPr lang="LID4096" smtClean="0"/>
-              <a:t>02/09/2026</a:t>
+              <a:t>02/10/2026</a:t>
             </a:fld>
             <a:endParaRPr lang="LID4096"/>
           </a:p>
@@ -566,6 +568,43 @@
           <a:bodyPr/>
           <a:lstStyle/>
           <a:p>
+            <a:r>
+              <a:rPr lang="en-GB" i="0"/>
+              <a:t>Lab preparation 2 ligger uppe p</a:t>
+            </a:r>
+            <a:r>
+              <a:rPr lang="sv-SE" i="0"/>
+              <a:t>å Canvas. </a:t>
+            </a:r>
+          </a:p>
+          <a:p>
+            <a:r>
+              <a:rPr lang="sv-SE" i="0"/>
+              <a:t>Vår mjuka deadline är på söndag. </a:t>
+            </a:r>
+          </a:p>
+          <a:p>
+            <a:r>
+              <a:rPr lang="sv-SE" i="0"/>
+              <a:t>Se till att ni har bokat ett labbpass i nästa vecka. </a:t>
+            </a:r>
+          </a:p>
+          <a:p>
+            <a:endParaRPr lang="sv-SE" i="0"/>
+          </a:p>
+          <a:p>
+            <a:r>
+              <a:rPr lang="sv-SE" i="0"/>
+              <a:t>Idag skall vi lära oss om mer avancerade typer i C. </a:t>
+            </a:r>
+          </a:p>
+          <a:p>
+            <a:r>
+              <a:rPr lang="sv-SE" i="0"/>
+              <a:t>Framförallt kommer vi lära oss om structures, och hur dom ger oss ett mycket trevligare sätt att arbeta med peripherals. </a:t>
+            </a:r>
+          </a:p>
+          <a:p>
             <a:endParaRPr lang="LID4096" i="0" dirty="0"/>
           </a:p>
         </p:txBody>
@@ -823,6 +862,98 @@
     <p:extLst>
       <p:ext uri="{BB962C8B-B14F-4D97-AF65-F5344CB8AC3E}">
         <p14:creationId xmlns:p14="http://schemas.microsoft.com/office/powerpoint/2010/main" val="2828644635"/>
+      </p:ext>
+    </p:extLst>
+  </p:cSld>
+  <p:clrMapOvr>
+    <a:masterClrMapping/>
+  </p:clrMapOvr>
+</p:notes>
+</file>
+
+<file path=ppt/notesSlides/notesSlide12.xml><?xml version="1.0" encoding="utf-8"?>
+<p:notes xmlns:a="http://schemas.openxmlformats.org/drawingml/2006/main" xmlns:r="http://schemas.openxmlformats.org/officeDocument/2006/relationships" xmlns:p="http://schemas.openxmlformats.org/presentationml/2006/main">
+  <p:cSld>
+    <p:spTree>
+      <p:nvGrpSpPr>
+        <p:cNvPr id="1" name=""/>
+        <p:cNvGrpSpPr/>
+        <p:nvPr/>
+      </p:nvGrpSpPr>
+      <p:grpSpPr>
+        <a:xfrm>
+          <a:off x="0" y="0"/>
+          <a:ext cx="0" cy="0"/>
+          <a:chOff x="0" y="0"/>
+          <a:chExt cx="0" cy="0"/>
+        </a:xfrm>
+      </p:grpSpPr>
+      <p:sp>
+        <p:nvSpPr>
+          <p:cNvPr id="2" name="Slide Image Placeholder 1"/>
+          <p:cNvSpPr>
+            <a:spLocks noGrp="1" noRot="1" noChangeAspect="1"/>
+          </p:cNvSpPr>
+          <p:nvPr>
+            <p:ph type="sldImg"/>
+          </p:nvPr>
+        </p:nvSpPr>
+        <p:spPr/>
+      </p:sp>
+      <p:sp>
+        <p:nvSpPr>
+          <p:cNvPr id="3" name="Notes Placeholder 2"/>
+          <p:cNvSpPr>
+            <a:spLocks noGrp="1"/>
+          </p:cNvSpPr>
+          <p:nvPr>
+            <p:ph type="body" idx="1"/>
+          </p:nvPr>
+        </p:nvSpPr>
+        <p:spPr/>
+        <p:txBody>
+          <a:bodyPr/>
+          <a:lstStyle/>
+          <a:p>
+            <a:r>
+              <a:rPr lang="en-GB"/>
+              <a:t>N</a:t>
+            </a:r>
+            <a:r>
+              <a:rPr lang="sv-SE"/>
+              <a:t>ågot om funktioner som tar en struct istället för metoder.</a:t>
+            </a:r>
+            <a:endParaRPr lang="LID4096"/>
+          </a:p>
+        </p:txBody>
+      </p:sp>
+      <p:sp>
+        <p:nvSpPr>
+          <p:cNvPr id="4" name="Slide Number Placeholder 3"/>
+          <p:cNvSpPr>
+            <a:spLocks noGrp="1"/>
+          </p:cNvSpPr>
+          <p:nvPr>
+            <p:ph type="sldNum" sz="quarter" idx="5"/>
+          </p:nvPr>
+        </p:nvSpPr>
+        <p:spPr/>
+        <p:txBody>
+          <a:bodyPr/>
+          <a:lstStyle/>
+          <a:p>
+            <a:fld id="{01B4E41B-EE32-43AA-BF26-21D12108C66F}" type="slidenum">
+              <a:rPr lang="LID4096" smtClean="0"/>
+              <a:t>26</a:t>
+            </a:fld>
+            <a:endParaRPr lang="LID4096"/>
+          </a:p>
+        </p:txBody>
+      </p:sp>
+    </p:spTree>
+    <p:extLst>
+      <p:ext uri="{BB962C8B-B14F-4D97-AF65-F5344CB8AC3E}">
+        <p14:creationId xmlns:p14="http://schemas.microsoft.com/office/powerpoint/2010/main" val="2247490919"/>
       </p:ext>
     </p:extLst>
   </p:cSld>
@@ -1813,7 +1944,7 @@
           <a:p>
             <a:fld id="{C16EB631-5B1A-4879-85E7-A8D4C94FBFC5}" type="datetimeFigureOut">
               <a:rPr lang="LID4096" smtClean="0"/>
-              <a:t>02/09/2026</a:t>
+              <a:t>02/10/2026</a:t>
             </a:fld>
             <a:endParaRPr lang="LID4096"/>
           </a:p>
@@ -2102,7 +2233,7 @@
           <a:p>
             <a:fld id="{C16EB631-5B1A-4879-85E7-A8D4C94FBFC5}" type="datetimeFigureOut">
               <a:rPr lang="LID4096" smtClean="0"/>
-              <a:t>02/09/2026</a:t>
+              <a:t>02/10/2026</a:t>
             </a:fld>
             <a:endParaRPr lang="LID4096"/>
           </a:p>
@@ -2302,7 +2433,7 @@
           <a:p>
             <a:fld id="{C16EB631-5B1A-4879-85E7-A8D4C94FBFC5}" type="datetimeFigureOut">
               <a:rPr lang="LID4096" smtClean="0"/>
-              <a:t>02/09/2026</a:t>
+              <a:t>02/10/2026</a:t>
             </a:fld>
             <a:endParaRPr lang="LID4096"/>
           </a:p>
@@ -2512,7 +2643,7 @@
           <a:p>
             <a:fld id="{C16EB631-5B1A-4879-85E7-A8D4C94FBFC5}" type="datetimeFigureOut">
               <a:rPr lang="LID4096" smtClean="0"/>
-              <a:t>02/09/2026</a:t>
+              <a:t>02/10/2026</a:t>
             </a:fld>
             <a:endParaRPr lang="LID4096"/>
           </a:p>
@@ -2740,7 +2871,7 @@
           <a:p>
             <a:fld id="{10ECE148-BD56-4755-B580-741EAF415DA4}" type="datetime1">
               <a:rPr lang="LID4096" smtClean="0"/>
-              <a:t>02/09/2026</a:t>
+              <a:t>02/10/2026</a:t>
             </a:fld>
             <a:endParaRPr lang="LID4096"/>
           </a:p>
@@ -2969,7 +3100,7 @@
           <a:p>
             <a:fld id="{10ECE148-BD56-4755-B580-741EAF415DA4}" type="datetime1">
               <a:rPr lang="LID4096" smtClean="0"/>
-              <a:t>02/09/2026</a:t>
+              <a:t>02/10/2026</a:t>
             </a:fld>
             <a:endParaRPr lang="LID4096"/>
           </a:p>
@@ -3229,7 +3360,7 @@
           <a:p>
             <a:fld id="{C16EB631-5B1A-4879-85E7-A8D4C94FBFC5}" type="datetimeFigureOut">
               <a:rPr lang="LID4096" smtClean="0"/>
-              <a:t>02/09/2026</a:t>
+              <a:t>02/10/2026</a:t>
             </a:fld>
             <a:endParaRPr lang="LID4096"/>
           </a:p>
@@ -3542,7 +3673,7 @@
           <a:p>
             <a:fld id="{C16EB631-5B1A-4879-85E7-A8D4C94FBFC5}" type="datetimeFigureOut">
               <a:rPr lang="LID4096" smtClean="0"/>
-              <a:t>02/09/2026</a:t>
+              <a:t>02/10/2026</a:t>
             </a:fld>
             <a:endParaRPr lang="LID4096"/>
           </a:p>
@@ -3818,7 +3949,7 @@
           <a:p>
             <a:fld id="{C16EB631-5B1A-4879-85E7-A8D4C94FBFC5}" type="datetimeFigureOut">
               <a:rPr lang="LID4096" smtClean="0"/>
-              <a:t>02/09/2026</a:t>
+              <a:t>02/10/2026</a:t>
             </a:fld>
             <a:endParaRPr lang="LID4096"/>
           </a:p>
@@ -4140,7 +4271,7 @@
           <a:p>
             <a:fld id="{C16EB631-5B1A-4879-85E7-A8D4C94FBFC5}" type="datetimeFigureOut">
               <a:rPr lang="LID4096" smtClean="0"/>
-              <a:t>02/09/2026</a:t>
+              <a:t>02/10/2026</a:t>
             </a:fld>
             <a:endParaRPr lang="LID4096"/>
           </a:p>
@@ -4609,7 +4740,7 @@
           <a:p>
             <a:fld id="{C16EB631-5B1A-4879-85E7-A8D4C94FBFC5}" type="datetimeFigureOut">
               <a:rPr lang="LID4096" smtClean="0"/>
-              <a:t>02/09/2026</a:t>
+              <a:t>02/10/2026</a:t>
             </a:fld>
             <a:endParaRPr lang="LID4096"/>
           </a:p>
@@ -4805,7 +4936,7 @@
           <a:p>
             <a:fld id="{C16EB631-5B1A-4879-85E7-A8D4C94FBFC5}" type="datetimeFigureOut">
               <a:rPr lang="LID4096" smtClean="0"/>
-              <a:t>02/09/2026</a:t>
+              <a:t>02/10/2026</a:t>
             </a:fld>
             <a:endParaRPr lang="LID4096"/>
           </a:p>
@@ -4918,7 +5049,7 @@
           <a:p>
             <a:fld id="{C16EB631-5B1A-4879-85E7-A8D4C94FBFC5}" type="datetimeFigureOut">
               <a:rPr lang="LID4096" smtClean="0"/>
-              <a:t>02/09/2026</a:t>
+              <a:t>02/10/2026</a:t>
             </a:fld>
             <a:endParaRPr lang="LID4096"/>
           </a:p>
@@ -5231,7 +5362,7 @@
           <a:p>
             <a:fld id="{C16EB631-5B1A-4879-85E7-A8D4C94FBFC5}" type="datetimeFigureOut">
               <a:rPr lang="LID4096" smtClean="0"/>
-              <a:t>02/09/2026</a:t>
+              <a:t>02/10/2026</a:t>
             </a:fld>
             <a:endParaRPr lang="LID4096"/>
           </a:p>
@@ -5474,7 +5605,7 @@
           <a:p>
             <a:fld id="{C16EB631-5B1A-4879-85E7-A8D4C94FBFC5}" type="datetimeFigureOut">
               <a:rPr lang="LID4096" smtClean="0"/>
-              <a:t>02/09/2026</a:t>
+              <a:t>02/10/2026</a:t>
             </a:fld>
             <a:endParaRPr lang="LID4096"/>
           </a:p>
@@ -6672,7 +6803,7 @@
           <a:p>
             <a:fld id="{9D7AC8C6-7D5A-454E-9AA8-5FD8ED471EB1}" type="datetime1">
               <a:rPr lang="LID4096" smtClean="0"/>
-              <a:t>02/09/2026</a:t>
+              <a:t>02/10/2026</a:t>
             </a:fld>
             <a:endParaRPr lang="LID4096"/>
           </a:p>
@@ -8825,7 +8956,7 @@
           <a:p>
             <a:fld id="{9D7AC8C6-7D5A-454E-9AA8-5FD8ED471EB1}" type="datetime1">
               <a:rPr lang="LID4096" smtClean="0"/>
-              <a:t>02/09/2026</a:t>
+              <a:t>02/10/2026</a:t>
             </a:fld>
             <a:endParaRPr lang="LID4096"/>
           </a:p>
@@ -9560,7 +9691,7 @@
           <a:p>
             <a:fld id="{9D7AC8C6-7D5A-454E-9AA8-5FD8ED471EB1}" type="datetime1">
               <a:rPr lang="LID4096" smtClean="0"/>
-              <a:t>02/09/2026</a:t>
+              <a:t>02/10/2026</a:t>
             </a:fld>
             <a:endParaRPr lang="LID4096"/>
           </a:p>
@@ -11031,7 +11162,7 @@
           <a:p>
             <a:fld id="{10ECE148-BD56-4755-B580-741EAF415DA4}" type="datetime1">
               <a:rPr lang="LID4096" smtClean="0"/>
-              <a:t>02/09/2026</a:t>
+              <a:t>02/10/2026</a:t>
             </a:fld>
             <a:endParaRPr lang="LID4096"/>
           </a:p>
@@ -11508,7 +11639,7 @@
           <a:p>
             <a:fld id="{9D7AC8C6-7D5A-454E-9AA8-5FD8ED471EB1}" type="datetime1">
               <a:rPr lang="LID4096" smtClean="0"/>
-              <a:t>02/09/2026</a:t>
+              <a:t>02/10/2026</a:t>
             </a:fld>
             <a:endParaRPr lang="LID4096"/>
           </a:p>
@@ -13207,7 +13338,7 @@
           <a:p>
             <a:fld id="{9D7AC8C6-7D5A-454E-9AA8-5FD8ED471EB1}" type="datetime1">
               <a:rPr lang="LID4096" smtClean="0"/>
-              <a:t>02/09/2026</a:t>
+              <a:t>02/10/2026</a:t>
             </a:fld>
             <a:endParaRPr lang="LID4096"/>
           </a:p>
@@ -14459,7 +14590,7 @@
           <a:p>
             <a:fld id="{9D7AC8C6-7D5A-454E-9AA8-5FD8ED471EB1}" type="datetime1">
               <a:rPr lang="LID4096" smtClean="0"/>
-              <a:t>02/09/2026</a:t>
+              <a:t>02/10/2026</a:t>
             </a:fld>
             <a:endParaRPr lang="LID4096"/>
           </a:p>
@@ -15935,6 +16066,86 @@
 </p:sld>
 </file>
 
+<file path=ppt/slides/slide26.xml><?xml version="1.0" encoding="utf-8"?>
+<p:sld xmlns:a="http://schemas.openxmlformats.org/drawingml/2006/main" xmlns:r="http://schemas.openxmlformats.org/officeDocument/2006/relationships" xmlns:p="http://schemas.openxmlformats.org/presentationml/2006/main">
+  <p:cSld>
+    <p:spTree>
+      <p:nvGrpSpPr>
+        <p:cNvPr id="1" name=""/>
+        <p:cNvGrpSpPr/>
+        <p:nvPr/>
+      </p:nvGrpSpPr>
+      <p:grpSpPr>
+        <a:xfrm>
+          <a:off x="0" y="0"/>
+          <a:ext cx="0" cy="0"/>
+          <a:chOff x="0" y="0"/>
+          <a:chExt cx="0" cy="0"/>
+        </a:xfrm>
+      </p:grpSpPr>
+      <p:sp>
+        <p:nvSpPr>
+          <p:cNvPr id="2" name="Title 1">
+            <a:extLst>
+              <a:ext uri="{FF2B5EF4-FFF2-40B4-BE49-F238E27FC236}">
+                <a16:creationId xmlns:a16="http://schemas.microsoft.com/office/drawing/2014/main" id="{871B7A5B-4946-14B1-E04E-E481EE9A660F}"/>
+              </a:ext>
+            </a:extLst>
+          </p:cNvPr>
+          <p:cNvSpPr>
+            <a:spLocks noGrp="1"/>
+          </p:cNvSpPr>
+          <p:nvPr>
+            <p:ph type="title"/>
+          </p:nvPr>
+        </p:nvSpPr>
+        <p:spPr/>
+        <p:txBody>
+          <a:bodyPr/>
+          <a:lstStyle/>
+          <a:p>
+            <a:endParaRPr lang="LID4096"/>
+          </a:p>
+        </p:txBody>
+      </p:sp>
+      <p:sp>
+        <p:nvSpPr>
+          <p:cNvPr id="3" name="Content Placeholder 2">
+            <a:extLst>
+              <a:ext uri="{FF2B5EF4-FFF2-40B4-BE49-F238E27FC236}">
+                <a16:creationId xmlns:a16="http://schemas.microsoft.com/office/drawing/2014/main" id="{DFE3B47B-531E-AD17-2C85-F3D97633A11B}"/>
+              </a:ext>
+            </a:extLst>
+          </p:cNvPr>
+          <p:cNvSpPr>
+            <a:spLocks noGrp="1"/>
+          </p:cNvSpPr>
+          <p:nvPr>
+            <p:ph idx="1"/>
+          </p:nvPr>
+        </p:nvSpPr>
+        <p:spPr/>
+        <p:txBody>
+          <a:bodyPr/>
+          <a:lstStyle/>
+          <a:p>
+            <a:endParaRPr lang="LID4096"/>
+          </a:p>
+        </p:txBody>
+      </p:sp>
+    </p:spTree>
+    <p:extLst>
+      <p:ext uri="{BB962C8B-B14F-4D97-AF65-F5344CB8AC3E}">
+        <p14:creationId xmlns:p14="http://schemas.microsoft.com/office/powerpoint/2010/main" val="2954133437"/>
+      </p:ext>
+    </p:extLst>
+  </p:cSld>
+  <p:clrMapOvr>
+    <a:masterClrMapping/>
+  </p:clrMapOvr>
+</p:sld>
+</file>
+
 <file path=ppt/slides/slide3.xml><?xml version="1.0" encoding="utf-8"?>
 <p:sld xmlns:a="http://schemas.openxmlformats.org/drawingml/2006/main" xmlns:r="http://schemas.openxmlformats.org/officeDocument/2006/relationships" xmlns:p="http://schemas.openxmlformats.org/presentationml/2006/main">
   <p:cSld>
@@ -16350,7 +16561,7 @@
           <a:p>
             <a:fld id="{9D7AC8C6-7D5A-454E-9AA8-5FD8ED471EB1}" type="datetime1">
               <a:rPr lang="LID4096" smtClean="0"/>
-              <a:t>02/09/2026</a:t>
+              <a:t>02/10/2026</a:t>
             </a:fld>
             <a:endParaRPr lang="LID4096"/>
           </a:p>
@@ -16620,7 +16831,7 @@
             </a:pPr>
             <a:r>
               <a:rPr lang="sv-SE" sz="1800"/>
-              <a:t>Kan också användas för att anpassa för speciella maskiner: </a:t>
+              <a:t>Kan också användas för att anpassa koden: </a:t>
             </a:r>
           </a:p>
           <a:p>
@@ -16639,7 +16850,7 @@
               <a:rPr lang="sv-SE" sz="1800">
                 <a:latin typeface="Consolas" panose="020B0609020204030204" pitchFamily="49" charset="0"/>
               </a:rPr>
-              <a:t>#ifdef BIG_64_BIT_MACHINE</a:t>
+              <a:t>#ifdef REALLY_GOOD_PRECISION</a:t>
             </a:r>
           </a:p>
           <a:p>
@@ -16723,7 +16934,7 @@
                             </p:stCondLst>
                             <p:childTnLst>
                               <p:par>
-                                <p:cTn id="5" presetID="10" presetClass="entr" presetSubtype="0" fill="hold" grpId="0" nodeType="clickEffect">
+                                <p:cTn id="5" presetID="10" presetClass="entr" presetSubtype="0" fill="hold" nodeType="clickEffect">
                                   <p:stCondLst>
                                     <p:cond delay="0"/>
                                   </p:stCondLst>
@@ -16731,6 +16942,325 @@
                                     <p:set>
                                       <p:cBhvr>
                                         <p:cTn id="6" dur="1" fill="hold">
+                                          <p:stCondLst>
+                                            <p:cond delay="0"/>
+                                          </p:stCondLst>
+                                        </p:cTn>
+                                        <p:tgtEl>
+                                          <p:spTgt spid="8">
+                                            <p:txEl>
+                                              <p:pRg st="3" end="3"/>
+                                            </p:txEl>
+                                          </p:spTgt>
+                                        </p:tgtEl>
+                                        <p:attrNameLst>
+                                          <p:attrName>style.visibility</p:attrName>
+                                        </p:attrNameLst>
+                                      </p:cBhvr>
+                                      <p:to>
+                                        <p:strVal val="visible"/>
+                                      </p:to>
+                                    </p:set>
+                                    <p:animEffect transition="in" filter="fade">
+                                      <p:cBhvr>
+                                        <p:cTn id="7" dur="500"/>
+                                        <p:tgtEl>
+                                          <p:spTgt spid="8">
+                                            <p:txEl>
+                                              <p:pRg st="3" end="3"/>
+                                            </p:txEl>
+                                          </p:spTgt>
+                                        </p:tgtEl>
+                                      </p:cBhvr>
+                                    </p:animEffect>
+                                  </p:childTnLst>
+                                </p:cTn>
+                              </p:par>
+                              <p:par>
+                                <p:cTn id="8" presetID="10" presetClass="entr" presetSubtype="0" fill="hold" nodeType="withEffect">
+                                  <p:stCondLst>
+                                    <p:cond delay="0"/>
+                                  </p:stCondLst>
+                                  <p:childTnLst>
+                                    <p:set>
+                                      <p:cBhvr>
+                                        <p:cTn id="9" dur="1" fill="hold">
+                                          <p:stCondLst>
+                                            <p:cond delay="0"/>
+                                          </p:stCondLst>
+                                        </p:cTn>
+                                        <p:tgtEl>
+                                          <p:spTgt spid="8">
+                                            <p:txEl>
+                                              <p:pRg st="4" end="4"/>
+                                            </p:txEl>
+                                          </p:spTgt>
+                                        </p:tgtEl>
+                                        <p:attrNameLst>
+                                          <p:attrName>style.visibility</p:attrName>
+                                        </p:attrNameLst>
+                                      </p:cBhvr>
+                                      <p:to>
+                                        <p:strVal val="visible"/>
+                                      </p:to>
+                                    </p:set>
+                                    <p:animEffect transition="in" filter="fade">
+                                      <p:cBhvr>
+                                        <p:cTn id="10" dur="500"/>
+                                        <p:tgtEl>
+                                          <p:spTgt spid="8">
+                                            <p:txEl>
+                                              <p:pRg st="4" end="4"/>
+                                            </p:txEl>
+                                          </p:spTgt>
+                                        </p:tgtEl>
+                                      </p:cBhvr>
+                                    </p:animEffect>
+                                  </p:childTnLst>
+                                </p:cTn>
+                              </p:par>
+                              <p:par>
+                                <p:cTn id="11" presetID="10" presetClass="entr" presetSubtype="0" fill="hold" nodeType="withEffect">
+                                  <p:stCondLst>
+                                    <p:cond delay="0"/>
+                                  </p:stCondLst>
+                                  <p:childTnLst>
+                                    <p:set>
+                                      <p:cBhvr>
+                                        <p:cTn id="12" dur="1" fill="hold">
+                                          <p:stCondLst>
+                                            <p:cond delay="0"/>
+                                          </p:stCondLst>
+                                        </p:cTn>
+                                        <p:tgtEl>
+                                          <p:spTgt spid="8">
+                                            <p:txEl>
+                                              <p:pRg st="5" end="5"/>
+                                            </p:txEl>
+                                          </p:spTgt>
+                                        </p:tgtEl>
+                                        <p:attrNameLst>
+                                          <p:attrName>style.visibility</p:attrName>
+                                        </p:attrNameLst>
+                                      </p:cBhvr>
+                                      <p:to>
+                                        <p:strVal val="visible"/>
+                                      </p:to>
+                                    </p:set>
+                                    <p:animEffect transition="in" filter="fade">
+                                      <p:cBhvr>
+                                        <p:cTn id="13" dur="500"/>
+                                        <p:tgtEl>
+                                          <p:spTgt spid="8">
+                                            <p:txEl>
+                                              <p:pRg st="5" end="5"/>
+                                            </p:txEl>
+                                          </p:spTgt>
+                                        </p:tgtEl>
+                                      </p:cBhvr>
+                                    </p:animEffect>
+                                  </p:childTnLst>
+                                </p:cTn>
+                              </p:par>
+                              <p:par>
+                                <p:cTn id="14" presetID="10" presetClass="entr" presetSubtype="0" fill="hold" nodeType="withEffect">
+                                  <p:stCondLst>
+                                    <p:cond delay="0"/>
+                                  </p:stCondLst>
+                                  <p:childTnLst>
+                                    <p:set>
+                                      <p:cBhvr>
+                                        <p:cTn id="15" dur="1" fill="hold">
+                                          <p:stCondLst>
+                                            <p:cond delay="0"/>
+                                          </p:stCondLst>
+                                        </p:cTn>
+                                        <p:tgtEl>
+                                          <p:spTgt spid="8">
+                                            <p:txEl>
+                                              <p:pRg st="6" end="6"/>
+                                            </p:txEl>
+                                          </p:spTgt>
+                                        </p:tgtEl>
+                                        <p:attrNameLst>
+                                          <p:attrName>style.visibility</p:attrName>
+                                        </p:attrNameLst>
+                                      </p:cBhvr>
+                                      <p:to>
+                                        <p:strVal val="visible"/>
+                                      </p:to>
+                                    </p:set>
+                                    <p:animEffect transition="in" filter="fade">
+                                      <p:cBhvr>
+                                        <p:cTn id="16" dur="500"/>
+                                        <p:tgtEl>
+                                          <p:spTgt spid="8">
+                                            <p:txEl>
+                                              <p:pRg st="6" end="6"/>
+                                            </p:txEl>
+                                          </p:spTgt>
+                                        </p:tgtEl>
+                                      </p:cBhvr>
+                                    </p:animEffect>
+                                  </p:childTnLst>
+                                </p:cTn>
+                              </p:par>
+                              <p:par>
+                                <p:cTn id="17" presetID="10" presetClass="entr" presetSubtype="0" fill="hold" nodeType="withEffect">
+                                  <p:stCondLst>
+                                    <p:cond delay="0"/>
+                                  </p:stCondLst>
+                                  <p:childTnLst>
+                                    <p:set>
+                                      <p:cBhvr>
+                                        <p:cTn id="18" dur="1" fill="hold">
+                                          <p:stCondLst>
+                                            <p:cond delay="0"/>
+                                          </p:stCondLst>
+                                        </p:cTn>
+                                        <p:tgtEl>
+                                          <p:spTgt spid="8">
+                                            <p:txEl>
+                                              <p:pRg st="7" end="7"/>
+                                            </p:txEl>
+                                          </p:spTgt>
+                                        </p:tgtEl>
+                                        <p:attrNameLst>
+                                          <p:attrName>style.visibility</p:attrName>
+                                        </p:attrNameLst>
+                                      </p:cBhvr>
+                                      <p:to>
+                                        <p:strVal val="visible"/>
+                                      </p:to>
+                                    </p:set>
+                                    <p:animEffect transition="in" filter="fade">
+                                      <p:cBhvr>
+                                        <p:cTn id="19" dur="500"/>
+                                        <p:tgtEl>
+                                          <p:spTgt spid="8">
+                                            <p:txEl>
+                                              <p:pRg st="7" end="7"/>
+                                            </p:txEl>
+                                          </p:spTgt>
+                                        </p:tgtEl>
+                                      </p:cBhvr>
+                                    </p:animEffect>
+                                  </p:childTnLst>
+                                </p:cTn>
+                              </p:par>
+                              <p:par>
+                                <p:cTn id="20" presetID="10" presetClass="entr" presetSubtype="0" fill="hold" nodeType="withEffect">
+                                  <p:stCondLst>
+                                    <p:cond delay="0"/>
+                                  </p:stCondLst>
+                                  <p:childTnLst>
+                                    <p:set>
+                                      <p:cBhvr>
+                                        <p:cTn id="21" dur="1" fill="hold">
+                                          <p:stCondLst>
+                                            <p:cond delay="0"/>
+                                          </p:stCondLst>
+                                        </p:cTn>
+                                        <p:tgtEl>
+                                          <p:spTgt spid="8">
+                                            <p:txEl>
+                                              <p:pRg st="8" end="8"/>
+                                            </p:txEl>
+                                          </p:spTgt>
+                                        </p:tgtEl>
+                                        <p:attrNameLst>
+                                          <p:attrName>style.visibility</p:attrName>
+                                        </p:attrNameLst>
+                                      </p:cBhvr>
+                                      <p:to>
+                                        <p:strVal val="visible"/>
+                                      </p:to>
+                                    </p:set>
+                                    <p:animEffect transition="in" filter="fade">
+                                      <p:cBhvr>
+                                        <p:cTn id="22" dur="500"/>
+                                        <p:tgtEl>
+                                          <p:spTgt spid="8">
+                                            <p:txEl>
+                                              <p:pRg st="8" end="8"/>
+                                            </p:txEl>
+                                          </p:spTgt>
+                                        </p:tgtEl>
+                                      </p:cBhvr>
+                                    </p:animEffect>
+                                  </p:childTnLst>
+                                </p:cTn>
+                              </p:par>
+                              <p:par>
+                                <p:cTn id="23" presetID="10" presetClass="entr" presetSubtype="0" fill="hold" nodeType="withEffect">
+                                  <p:stCondLst>
+                                    <p:cond delay="0"/>
+                                  </p:stCondLst>
+                                  <p:childTnLst>
+                                    <p:set>
+                                      <p:cBhvr>
+                                        <p:cTn id="24" dur="1" fill="hold">
+                                          <p:stCondLst>
+                                            <p:cond delay="0"/>
+                                          </p:stCondLst>
+                                        </p:cTn>
+                                        <p:tgtEl>
+                                          <p:spTgt spid="8">
+                                            <p:txEl>
+                                              <p:pRg st="9" end="9"/>
+                                            </p:txEl>
+                                          </p:spTgt>
+                                        </p:tgtEl>
+                                        <p:attrNameLst>
+                                          <p:attrName>style.visibility</p:attrName>
+                                        </p:attrNameLst>
+                                      </p:cBhvr>
+                                      <p:to>
+                                        <p:strVal val="visible"/>
+                                      </p:to>
+                                    </p:set>
+                                    <p:animEffect transition="in" filter="fade">
+                                      <p:cBhvr>
+                                        <p:cTn id="25" dur="500"/>
+                                        <p:tgtEl>
+                                          <p:spTgt spid="8">
+                                            <p:txEl>
+                                              <p:pRg st="9" end="9"/>
+                                            </p:txEl>
+                                          </p:spTgt>
+                                        </p:tgtEl>
+                                      </p:cBhvr>
+                                    </p:animEffect>
+                                  </p:childTnLst>
+                                </p:cTn>
+                              </p:par>
+                            </p:childTnLst>
+                          </p:cTn>
+                        </p:par>
+                      </p:childTnLst>
+                    </p:cTn>
+                  </p:par>
+                  <p:par>
+                    <p:cTn id="26" fill="hold">
+                      <p:stCondLst>
+                        <p:cond delay="indefinite"/>
+                      </p:stCondLst>
+                      <p:childTnLst>
+                        <p:par>
+                          <p:cTn id="27" fill="hold">
+                            <p:stCondLst>
+                              <p:cond delay="0"/>
+                            </p:stCondLst>
+                            <p:childTnLst>
+                              <p:par>
+                                <p:cTn id="28" presetID="10" presetClass="entr" presetSubtype="0" fill="hold" grpId="0" nodeType="clickEffect">
+                                  <p:stCondLst>
+                                    <p:cond delay="0"/>
+                                  </p:stCondLst>
+                                  <p:childTnLst>
+                                    <p:set>
+                                      <p:cBhvr>
+                                        <p:cTn id="29" dur="1" fill="hold">
                                           <p:stCondLst>
                                             <p:cond delay="0"/>
                                           </p:stCondLst>
@@ -16748,7 +17278,7 @@
                                     </p:set>
                                     <p:animEffect transition="in" filter="fade">
                                       <p:cBhvr>
-                                        <p:cTn id="7" dur="500"/>
+                                        <p:cTn id="30" dur="500"/>
                                         <p:tgtEl>
                                           <p:spTgt spid="9"/>
                                         </p:tgtEl>
@@ -17087,7 +17617,7 @@
           <a:p>
             <a:fld id="{9D7AC8C6-7D5A-454E-9AA8-5FD8ED471EB1}" type="datetime1">
               <a:rPr lang="LID4096" smtClean="0"/>
-              <a:t>02/09/2026</a:t>
+              <a:t>02/10/2026</a:t>
             </a:fld>
             <a:endParaRPr lang="LID4096"/>
           </a:p>
@@ -17777,7 +18307,7 @@
           <a:p>
             <a:fld id="{10ECE148-BD56-4755-B580-741EAF415DA4}" type="datetime1">
               <a:rPr lang="LID4096" smtClean="0"/>
-              <a:t>02/09/2026</a:t>
+              <a:t>02/10/2026</a:t>
             </a:fld>
             <a:endParaRPr lang="LID4096"/>
           </a:p>
@@ -19853,7 +20383,18 @@
               <a:rPr lang="en-GB" sz="1200">
                 <a:latin typeface="Consolas" panose="020B0609020204030204" pitchFamily="49" charset="0"/>
               </a:rPr>
-              <a:t>  Player player_five = {.health = 57}; // score 0, health 57</a:t>
+              <a:t>  Player player_five = {};             // score 0, health 0</a:t>
+            </a:r>
+          </a:p>
+          <a:p>
+            <a:pPr marL="0" indent="0">
+              <a:buNone/>
+            </a:pPr>
+            <a:r>
+              <a:rPr lang="en-GB" sz="1200">
+                <a:latin typeface="Consolas" panose="020B0609020204030204" pitchFamily="49" charset="0"/>
+              </a:rPr>
+              <a:t>  Player player_six = {.health = 57}; // score 0, health 57</a:t>
             </a:r>
           </a:p>
           <a:p>
@@ -19892,7 +20433,7 @@
           <a:p>
             <a:fld id="{10ECE148-BD56-4755-B580-741EAF415DA4}" type="datetime1">
               <a:rPr lang="LID4096" smtClean="0"/>
-              <a:t>02/09/2026</a:t>
+              <a:t>02/10/2026</a:t>
             </a:fld>
             <a:endParaRPr lang="LID4096"/>
           </a:p>
@@ -20218,6 +20759,67 @@
                       </p:childTnLst>
                     </p:cTn>
                   </p:par>
+                  <p:par>
+                    <p:cTn id="23" fill="hold">
+                      <p:stCondLst>
+                        <p:cond delay="indefinite"/>
+                      </p:stCondLst>
+                      <p:childTnLst>
+                        <p:par>
+                          <p:cTn id="24" fill="hold">
+                            <p:stCondLst>
+                              <p:cond delay="0"/>
+                            </p:stCondLst>
+                            <p:childTnLst>
+                              <p:par>
+                                <p:cTn id="25" presetID="10" presetClass="entr" presetSubtype="0" fill="hold" nodeType="clickEffect">
+                                  <p:stCondLst>
+                                    <p:cond delay="0"/>
+                                  </p:stCondLst>
+                                  <p:childTnLst>
+                                    <p:set>
+                                      <p:cBhvr>
+                                        <p:cTn id="26" dur="1" fill="hold">
+                                          <p:stCondLst>
+                                            <p:cond delay="0"/>
+                                          </p:stCondLst>
+                                        </p:cTn>
+                                        <p:tgtEl>
+                                          <p:spTgt spid="7">
+                                            <p:txEl>
+                                              <p:pRg st="12" end="12"/>
+                                            </p:txEl>
+                                          </p:spTgt>
+                                        </p:tgtEl>
+                                        <p:attrNameLst>
+                                          <p:attrName>style.visibility</p:attrName>
+                                        </p:attrNameLst>
+                                      </p:cBhvr>
+                                      <p:to>
+                                        <p:strVal val="visible"/>
+                                      </p:to>
+                                    </p:set>
+                                    <p:animEffect transition="in" filter="fade">
+                                      <p:cBhvr>
+                                        <p:cTn id="27" dur="500"/>
+                                        <p:tgtEl>
+                                          <p:spTgt spid="7">
+                                            <p:txEl>
+                                              <p:pRg st="12" end="12"/>
+                                            </p:txEl>
+                                          </p:spTgt>
+                                        </p:tgtEl>
+                                      </p:cBhvr>
+                                    </p:animEffect>
+                                  </p:childTnLst>
+                                </p:cTn>
+                              </p:par>
+                            </p:childTnLst>
+                          </p:cTn>
+                        </p:par>
+                      </p:childTnLst>
+                    </p:cTn>
+                  </p:par>
                 </p:childTnLst>
               </p:cTn>
               <p:prevCondLst>
@@ -23605,7 +24207,7 @@
           <a:p>
             <a:fld id="{9D7AC8C6-7D5A-454E-9AA8-5FD8ED471EB1}" type="datetime1">
               <a:rPr lang="LID4096" smtClean="0"/>
-              <a:t>02/09/2026</a:t>
+              <a:t>02/10/2026</a:t>
             </a:fld>
             <a:endParaRPr lang="LID4096"/>
           </a:p>
@@ -25720,7 +26322,7 @@
           <a:p>
             <a:fld id="{9D7AC8C6-7D5A-454E-9AA8-5FD8ED471EB1}" type="datetime1">
               <a:rPr lang="LID4096" smtClean="0"/>
-              <a:t>02/09/2026</a:t>
+              <a:t>02/10/2026</a:t>
             </a:fld>
             <a:endParaRPr lang="LID4096"/>
           </a:p>

--- a/slides/lecture07_structures.pptx
+++ b/slides/lecture07_structures.pptx
@@ -14,7 +14,7 @@
     <p:sldId id="372" r:id="rId5"/>
     <p:sldId id="373" r:id="rId6"/>
     <p:sldId id="374" r:id="rId7"/>
-    <p:sldId id="270" r:id="rId8"/>
+    <p:sldId id="294" r:id="rId8"/>
     <p:sldId id="375" r:id="rId9"/>
     <p:sldId id="376" r:id="rId10"/>
     <p:sldId id="377" r:id="rId11"/>
@@ -143,7 +143,7 @@
             <p14:sldId id="372"/>
             <p14:sldId id="373"/>
             <p14:sldId id="374"/>
-            <p14:sldId id="270"/>
+            <p14:sldId id="294"/>
             <p14:sldId id="375"/>
             <p14:sldId id="376"/>
             <p14:sldId id="377"/>
@@ -595,6 +595,15 @@
           <a:p>
             <a:r>
               <a:rPr lang="sv-SE" i="0"/>
+              <a:t>Ingen lektion på fredag, delvis för att ni har mycket självstudier att göra för att klara av lab 2.</a:t>
+            </a:r>
+          </a:p>
+          <a:p>
+            <a:endParaRPr lang="sv-SE" i="0"/>
+          </a:p>
+          <a:p>
+            <a:r>
+              <a:rPr lang="sv-SE" i="0"/>
               <a:t>Idag skall vi lära oss om mer avancerade typer i C. </a:t>
             </a:r>
           </a:p>
@@ -646,6 +655,397 @@
 </file>
 
 <file path=ppt/notesSlides/notesSlide10.xml><?xml version="1.0" encoding="utf-8"?>
+<p:notes xmlns:a="http://schemas.openxmlformats.org/drawingml/2006/main" xmlns:r="http://schemas.openxmlformats.org/officeDocument/2006/relationships" xmlns:p="http://schemas.openxmlformats.org/presentationml/2006/main">
+  <p:cSld>
+    <p:spTree>
+      <p:nvGrpSpPr>
+        <p:cNvPr id="1" name=""/>
+        <p:cNvGrpSpPr/>
+        <p:nvPr/>
+      </p:nvGrpSpPr>
+      <p:grpSpPr>
+        <a:xfrm>
+          <a:off x="0" y="0"/>
+          <a:ext cx="0" cy="0"/>
+          <a:chOff x="0" y="0"/>
+          <a:chExt cx="0" cy="0"/>
+        </a:xfrm>
+      </p:grpSpPr>
+      <p:sp>
+        <p:nvSpPr>
+          <p:cNvPr id="2" name="Slide Image Placeholder 1"/>
+          <p:cNvSpPr>
+            <a:spLocks noGrp="1" noRot="1" noChangeAspect="1"/>
+          </p:cNvSpPr>
+          <p:nvPr>
+            <p:ph type="sldImg"/>
+          </p:nvPr>
+        </p:nvSpPr>
+        <p:spPr/>
+      </p:sp>
+      <p:sp>
+        <p:nvSpPr>
+          <p:cNvPr id="3" name="Notes Placeholder 2"/>
+          <p:cNvSpPr>
+            <a:spLocks noGrp="1"/>
+          </p:cNvSpPr>
+          <p:nvPr>
+            <p:ph type="body" idx="1"/>
+          </p:nvPr>
+        </p:nvSpPr>
+        <p:spPr/>
+        <p:txBody>
+          <a:bodyPr/>
+          <a:lstStyle/>
+          <a:p>
+            <a:r>
+              <a:rPr lang="en-GB"/>
+              <a:t>Innan vi g</a:t>
+            </a:r>
+            <a:r>
+              <a:rPr lang="sv-SE"/>
+              <a:t>år in på lite mer avancerade saker om structs så skall vi ta ett litet exempel.</a:t>
+            </a:r>
+          </a:p>
+          <a:p>
+            <a:endParaRPr lang="sv-SE"/>
+          </a:p>
+          <a:p>
+            <a:r>
+              <a:rPr lang="sv-SE"/>
+              <a:t>Och innan vi gör det så vill jag visa er hur en väldigt standard tentafråga brukar se ut. (fel maskin)</a:t>
+            </a:r>
+          </a:p>
+          <a:p>
+            <a:endParaRPr lang="sv-SE"/>
+          </a:p>
+          <a:p>
+            <a:r>
+              <a:rPr lang="sv-SE"/>
+              <a:t>Kommer översätta åtminstone en tenta på semestern.</a:t>
+            </a:r>
+          </a:p>
+          <a:p>
+            <a:endParaRPr lang="sv-SE"/>
+          </a:p>
+          <a:p>
+            <a:r>
+              <a:rPr lang="sv-SE"/>
+              <a:t>Kommer komma programmeringsövningar på det här inom några dagar.</a:t>
+            </a:r>
+          </a:p>
+          <a:p>
+            <a:endParaRPr lang="sv-SE"/>
+          </a:p>
+          <a:p>
+            <a:endParaRPr lang="LID4096"/>
+          </a:p>
+        </p:txBody>
+      </p:sp>
+      <p:sp>
+        <p:nvSpPr>
+          <p:cNvPr id="4" name="Slide Number Placeholder 3"/>
+          <p:cNvSpPr>
+            <a:spLocks noGrp="1"/>
+          </p:cNvSpPr>
+          <p:nvPr>
+            <p:ph type="sldNum" sz="quarter" idx="5"/>
+          </p:nvPr>
+        </p:nvSpPr>
+        <p:spPr/>
+        <p:txBody>
+          <a:bodyPr/>
+          <a:lstStyle/>
+          <a:p>
+            <a:fld id="{01B4E41B-EE32-43AA-BF26-21D12108C66F}" type="slidenum">
+              <a:rPr lang="LID4096" smtClean="0"/>
+              <a:t>13</a:t>
+            </a:fld>
+            <a:endParaRPr lang="LID4096"/>
+          </a:p>
+        </p:txBody>
+      </p:sp>
+    </p:spTree>
+    <p:extLst>
+      <p:ext uri="{BB962C8B-B14F-4D97-AF65-F5344CB8AC3E}">
+        <p14:creationId xmlns:p14="http://schemas.microsoft.com/office/powerpoint/2010/main" val="1203420560"/>
+      </p:ext>
+    </p:extLst>
+  </p:cSld>
+  <p:clrMapOvr>
+    <a:masterClrMapping/>
+  </p:clrMapOvr>
+</p:notes>
+</file>
+
+<file path=ppt/notesSlides/notesSlide11.xml><?xml version="1.0" encoding="utf-8"?>
+<p:notes xmlns:a="http://schemas.openxmlformats.org/drawingml/2006/main" xmlns:r="http://schemas.openxmlformats.org/officeDocument/2006/relationships" xmlns:p="http://schemas.openxmlformats.org/presentationml/2006/main">
+  <p:cSld>
+    <p:spTree>
+      <p:nvGrpSpPr>
+        <p:cNvPr id="1" name=""/>
+        <p:cNvGrpSpPr/>
+        <p:nvPr/>
+      </p:nvGrpSpPr>
+      <p:grpSpPr>
+        <a:xfrm>
+          <a:off x="0" y="0"/>
+          <a:ext cx="0" cy="0"/>
+          <a:chOff x="0" y="0"/>
+          <a:chExt cx="0" cy="0"/>
+        </a:xfrm>
+      </p:grpSpPr>
+      <p:sp>
+        <p:nvSpPr>
+          <p:cNvPr id="2" name="Slide Image Placeholder 1"/>
+          <p:cNvSpPr>
+            <a:spLocks noGrp="1" noRot="1" noChangeAspect="1"/>
+          </p:cNvSpPr>
+          <p:nvPr>
+            <p:ph type="sldImg"/>
+          </p:nvPr>
+        </p:nvSpPr>
+        <p:spPr/>
+      </p:sp>
+      <p:sp>
+        <p:nvSpPr>
+          <p:cNvPr id="3" name="Notes Placeholder 2"/>
+          <p:cNvSpPr>
+            <a:spLocks noGrp="1"/>
+          </p:cNvSpPr>
+          <p:nvPr>
+            <p:ph type="body" idx="1"/>
+          </p:nvPr>
+        </p:nvSpPr>
+        <p:spPr/>
+        <p:txBody>
+          <a:bodyPr/>
+          <a:lstStyle/>
+          <a:p>
+            <a:r>
+              <a:rPr lang="en-GB"/>
+              <a:t>H</a:t>
+            </a:r>
+            <a:r>
+              <a:rPr lang="sv-SE"/>
+              <a:t>är har jag hittat på en struct som på något vis beskriver en fil. </a:t>
+            </a:r>
+          </a:p>
+          <a:p>
+            <a:r>
+              <a:rPr lang="sv-SE"/>
+              <a:t>Den här koden funkar, men är det någon som ser ett problem med den? </a:t>
+            </a:r>
+          </a:p>
+          <a:p>
+            <a:endParaRPr lang="sv-SE"/>
+          </a:p>
+          <a:p>
+            <a:r>
+              <a:rPr lang="sv-SE"/>
+              <a:t>Storlek. Den här strukten blir fyra bytes, och egentligen behöver vi bara 1.</a:t>
+            </a:r>
+          </a:p>
+          <a:p>
+            <a:r>
+              <a:rPr lang="en-GB"/>
+              <a:t>&lt;click&gt;</a:t>
+            </a:r>
+          </a:p>
+          <a:p>
+            <a:endParaRPr lang="en-GB"/>
+          </a:p>
+          <a:p>
+            <a:r>
+              <a:rPr lang="en-GB"/>
+              <a:t>Vi kan göra så här istället: </a:t>
+            </a:r>
+          </a:p>
+          <a:p>
+            <a:r>
+              <a:rPr lang="en-GB"/>
+              <a:t>Gå igenom. </a:t>
+            </a:r>
+          </a:p>
+          <a:p>
+            <a:r>
+              <a:rPr lang="en-GB"/>
+              <a:t>Men det är ju betydligt svårlästare...</a:t>
+            </a:r>
+          </a:p>
+          <a:p>
+            <a:endParaRPr lang="en-GB"/>
+          </a:p>
+          <a:p>
+            <a:r>
+              <a:rPr lang="en-GB"/>
+              <a:t>&lt;click&gt;</a:t>
+            </a:r>
+          </a:p>
+          <a:p>
+            <a:r>
+              <a:rPr lang="en-GB"/>
+              <a:t>C l</a:t>
+            </a:r>
+            <a:r>
+              <a:rPr lang="sv-SE"/>
+              <a:t>åter oss göra så här istället. </a:t>
+            </a:r>
+          </a:p>
+          <a:p>
+            <a:r>
+              <a:rPr lang="sv-SE"/>
+              <a:t>Nu tar FileInfo bara upp en byte, och kompilatorn fixar allt bitfifflande åt oss!</a:t>
+            </a:r>
+          </a:p>
+          <a:p>
+            <a:endParaRPr lang="en-GB"/>
+          </a:p>
+          <a:p>
+            <a:endParaRPr lang="en-GB"/>
+          </a:p>
+          <a:p>
+            <a:endParaRPr lang="LID4096"/>
+          </a:p>
+        </p:txBody>
+      </p:sp>
+      <p:sp>
+        <p:nvSpPr>
+          <p:cNvPr id="4" name="Slide Number Placeholder 3"/>
+          <p:cNvSpPr>
+            <a:spLocks noGrp="1"/>
+          </p:cNvSpPr>
+          <p:nvPr>
+            <p:ph type="sldNum" sz="quarter" idx="5"/>
+          </p:nvPr>
+        </p:nvSpPr>
+        <p:spPr/>
+        <p:txBody>
+          <a:bodyPr/>
+          <a:lstStyle/>
+          <a:p>
+            <a:fld id="{01B4E41B-EE32-43AA-BF26-21D12108C66F}" type="slidenum">
+              <a:rPr lang="LID4096" smtClean="0"/>
+              <a:t>17</a:t>
+            </a:fld>
+            <a:endParaRPr lang="LID4096"/>
+          </a:p>
+        </p:txBody>
+      </p:sp>
+    </p:spTree>
+    <p:extLst>
+      <p:ext uri="{BB962C8B-B14F-4D97-AF65-F5344CB8AC3E}">
+        <p14:creationId xmlns:p14="http://schemas.microsoft.com/office/powerpoint/2010/main" val="1357452866"/>
+      </p:ext>
+    </p:extLst>
+  </p:cSld>
+  <p:clrMapOvr>
+    <a:masterClrMapping/>
+  </p:clrMapOvr>
+</p:notes>
+</file>
+
+<file path=ppt/notesSlides/notesSlide12.xml><?xml version="1.0" encoding="utf-8"?>
+<p:notes xmlns:a="http://schemas.openxmlformats.org/drawingml/2006/main" xmlns:r="http://schemas.openxmlformats.org/officeDocument/2006/relationships" xmlns:p="http://schemas.openxmlformats.org/presentationml/2006/main">
+  <p:cSld>
+    <p:spTree>
+      <p:nvGrpSpPr>
+        <p:cNvPr id="1" name=""/>
+        <p:cNvGrpSpPr/>
+        <p:nvPr/>
+      </p:nvGrpSpPr>
+      <p:grpSpPr>
+        <a:xfrm>
+          <a:off x="0" y="0"/>
+          <a:ext cx="0" cy="0"/>
+          <a:chOff x="0" y="0"/>
+          <a:chExt cx="0" cy="0"/>
+        </a:xfrm>
+      </p:grpSpPr>
+      <p:sp>
+        <p:nvSpPr>
+          <p:cNvPr id="2" name="Slide Image Placeholder 1"/>
+          <p:cNvSpPr>
+            <a:spLocks noGrp="1" noRot="1" noChangeAspect="1"/>
+          </p:cNvSpPr>
+          <p:nvPr>
+            <p:ph type="sldImg"/>
+          </p:nvPr>
+        </p:nvSpPr>
+        <p:spPr/>
+      </p:sp>
+      <p:sp>
+        <p:nvSpPr>
+          <p:cNvPr id="3" name="Notes Placeholder 2"/>
+          <p:cNvSpPr>
+            <a:spLocks noGrp="1"/>
+          </p:cNvSpPr>
+          <p:nvPr>
+            <p:ph type="body" idx="1"/>
+          </p:nvPr>
+        </p:nvSpPr>
+        <p:spPr/>
+        <p:txBody>
+          <a:bodyPr/>
+          <a:lstStyle/>
+          <a:p>
+            <a:r>
+              <a:rPr lang="en-GB"/>
+              <a:t>This would work.</a:t>
+            </a:r>
+          </a:p>
+          <a:p>
+            <a:r>
+              <a:rPr lang="en-GB"/>
+              <a:t>Explain how this maps.</a:t>
+            </a:r>
+          </a:p>
+          <a:p>
+            <a:r>
+              <a:rPr lang="en-GB"/>
+              <a:t>But all the registers are 16 bits!</a:t>
+            </a:r>
+            <a:endParaRPr lang="LID4096"/>
+          </a:p>
+        </p:txBody>
+      </p:sp>
+      <p:sp>
+        <p:nvSpPr>
+          <p:cNvPr id="4" name="Slide Number Placeholder 3"/>
+          <p:cNvSpPr>
+            <a:spLocks noGrp="1"/>
+          </p:cNvSpPr>
+          <p:nvPr>
+            <p:ph type="sldNum" sz="quarter" idx="5"/>
+          </p:nvPr>
+        </p:nvSpPr>
+        <p:spPr/>
+        <p:txBody>
+          <a:bodyPr/>
+          <a:lstStyle/>
+          <a:p>
+            <a:fld id="{01B4E41B-EE32-43AA-BF26-21D12108C66F}" type="slidenum">
+              <a:rPr lang="LID4096" smtClean="0"/>
+              <a:t>19</a:t>
+            </a:fld>
+            <a:endParaRPr lang="LID4096"/>
+          </a:p>
+        </p:txBody>
+      </p:sp>
+    </p:spTree>
+    <p:extLst>
+      <p:ext uri="{BB962C8B-B14F-4D97-AF65-F5344CB8AC3E}">
+        <p14:creationId xmlns:p14="http://schemas.microsoft.com/office/powerpoint/2010/main" val="4221342219"/>
+      </p:ext>
+    </p:extLst>
+  </p:cSld>
+  <p:clrMapOvr>
+    <a:masterClrMapping/>
+  </p:clrMapOvr>
+</p:notes>
+</file>
+
+<file path=ppt/notesSlides/notesSlide13.xml><?xml version="1.0" encoding="utf-8"?>
 <p:notes xmlns:a="http://schemas.openxmlformats.org/drawingml/2006/main" xmlns:r="http://schemas.openxmlformats.org/officeDocument/2006/relationships" xmlns:p="http://schemas.openxmlformats.org/presentationml/2006/main">
   <p:cSld>
     <p:spTree>
@@ -759,7 +1159,7 @@
 </p:notes>
 </file>
 
-<file path=ppt/notesSlides/notesSlide11.xml><?xml version="1.0" encoding="utf-8"?>
+<file path=ppt/notesSlides/notesSlide14.xml><?xml version="1.0" encoding="utf-8"?>
 <p:notes xmlns:a="http://schemas.openxmlformats.org/drawingml/2006/main" xmlns:r="http://schemas.openxmlformats.org/officeDocument/2006/relationships" xmlns:p="http://schemas.openxmlformats.org/presentationml/2006/main">
   <p:cSld>
     <p:spTree>
@@ -871,7 +1271,7 @@
 </p:notes>
 </file>
 
-<file path=ppt/notesSlides/notesSlide12.xml><?xml version="1.0" encoding="utf-8"?>
+<file path=ppt/notesSlides/notesSlide15.xml><?xml version="1.0" encoding="utf-8"?>
 <p:notes xmlns:a="http://schemas.openxmlformats.org/drawingml/2006/main" xmlns:r="http://schemas.openxmlformats.org/officeDocument/2006/relationships" xmlns:p="http://schemas.openxmlformats.org/presentationml/2006/main">
   <p:cSld>
     <p:spTree>
@@ -1178,6 +1578,124 @@
   <p:cSld>
     <p:spTree>
       <p:nvGrpSpPr>
+        <p:cNvPr id="1" name="">
+          <a:extLst>
+            <a:ext uri="{FF2B5EF4-FFF2-40B4-BE49-F238E27FC236}">
+              <a16:creationId xmlns:a16="http://schemas.microsoft.com/office/drawing/2014/main" id="{1C357471-8E1D-DA13-EECC-E87F1DA6F265}"/>
+            </a:ext>
+          </a:extLst>
+        </p:cNvPr>
+        <p:cNvGrpSpPr/>
+        <p:nvPr/>
+      </p:nvGrpSpPr>
+      <p:grpSpPr>
+        <a:xfrm>
+          <a:off x="0" y="0"/>
+          <a:ext cx="0" cy="0"/>
+          <a:chOff x="0" y="0"/>
+          <a:chExt cx="0" cy="0"/>
+        </a:xfrm>
+      </p:grpSpPr>
+      <p:sp>
+        <p:nvSpPr>
+          <p:cNvPr id="2" name="Slide Image Placeholder 1">
+            <a:extLst>
+              <a:ext uri="{FF2B5EF4-FFF2-40B4-BE49-F238E27FC236}">
+                <a16:creationId xmlns:a16="http://schemas.microsoft.com/office/drawing/2014/main" id="{14D596F9-7197-782C-A7FF-C8C79E98018E}"/>
+              </a:ext>
+            </a:extLst>
+          </p:cNvPr>
+          <p:cNvSpPr>
+            <a:spLocks noGrp="1" noRot="1" noChangeAspect="1"/>
+          </p:cNvSpPr>
+          <p:nvPr>
+            <p:ph type="sldImg"/>
+          </p:nvPr>
+        </p:nvSpPr>
+        <p:spPr/>
+      </p:sp>
+      <p:sp>
+        <p:nvSpPr>
+          <p:cNvPr id="3" name="Notes Placeholder 2">
+            <a:extLst>
+              <a:ext uri="{FF2B5EF4-FFF2-40B4-BE49-F238E27FC236}">
+                <a16:creationId xmlns:a16="http://schemas.microsoft.com/office/drawing/2014/main" id="{9A2555C8-0C82-999E-1323-09E06BC06466}"/>
+              </a:ext>
+            </a:extLst>
+          </p:cNvPr>
+          <p:cNvSpPr>
+            <a:spLocks noGrp="1"/>
+          </p:cNvSpPr>
+          <p:nvPr>
+            <p:ph type="body" idx="1"/>
+          </p:nvPr>
+        </p:nvSpPr>
+        <p:spPr/>
+        <p:txBody>
+          <a:bodyPr/>
+          <a:lstStyle/>
+          <a:p>
+            <a:r>
+              <a:rPr lang="sv-SE"/>
+              <a:t>Då skall vi prata om hur medlemmarna hamnar i minnet. </a:t>
+            </a:r>
+          </a:p>
+          <a:p>
+            <a:r>
+              <a:rPr lang="sv-SE"/>
+              <a:t>Innan vi gör det måste jag påminna om alignment, som jag tjatat om några gånger. </a:t>
+            </a:r>
+            <a:endParaRPr lang="LID4096"/>
+          </a:p>
+        </p:txBody>
+      </p:sp>
+      <p:sp>
+        <p:nvSpPr>
+          <p:cNvPr id="4" name="Slide Number Placeholder 3">
+            <a:extLst>
+              <a:ext uri="{FF2B5EF4-FFF2-40B4-BE49-F238E27FC236}">
+                <a16:creationId xmlns:a16="http://schemas.microsoft.com/office/drawing/2014/main" id="{9CF7A051-2B76-40DF-8A4A-8D29DFBBDB3F}"/>
+              </a:ext>
+            </a:extLst>
+          </p:cNvPr>
+          <p:cNvSpPr>
+            <a:spLocks noGrp="1"/>
+          </p:cNvSpPr>
+          <p:nvPr>
+            <p:ph type="sldNum" sz="quarter" idx="5"/>
+          </p:nvPr>
+        </p:nvSpPr>
+        <p:spPr/>
+        <p:txBody>
+          <a:bodyPr/>
+          <a:lstStyle/>
+          <a:p>
+            <a:fld id="{01B4E41B-EE32-43AA-BF26-21D12108C66F}" type="slidenum">
+              <a:rPr lang="LID4096" smtClean="0"/>
+              <a:t>7</a:t>
+            </a:fld>
+            <a:endParaRPr lang="LID4096"/>
+          </a:p>
+        </p:txBody>
+      </p:sp>
+    </p:spTree>
+    <p:extLst>
+      <p:ext uri="{BB962C8B-B14F-4D97-AF65-F5344CB8AC3E}">
+        <p14:creationId xmlns:p14="http://schemas.microsoft.com/office/powerpoint/2010/main" val="2150929985"/>
+      </p:ext>
+    </p:extLst>
+  </p:cSld>
+  <p:clrMapOvr>
+    <a:masterClrMapping/>
+  </p:clrMapOvr>
+</p:notes>
+</file>
+
+<file path=ppt/notesSlides/notesSlide5.xml><?xml version="1.0" encoding="utf-8"?>
+<p:notes xmlns:a="http://schemas.openxmlformats.org/drawingml/2006/main" xmlns:r="http://schemas.openxmlformats.org/officeDocument/2006/relationships" xmlns:p="http://schemas.openxmlformats.org/presentationml/2006/main">
+  <p:cSld>
+    <p:spTree>
+      <p:nvGrpSpPr>
         <p:cNvPr id="1" name=""/>
         <p:cNvGrpSpPr/>
         <p:nvPr/>
@@ -1217,6 +1735,48 @@
           <a:bodyPr/>
           <a:lstStyle/>
           <a:p>
+            <a:r>
+              <a:rPr lang="sv-SE"/>
+              <a:t>Visa hur player one hamner i minnet. </a:t>
+            </a:r>
+          </a:p>
+          <a:p>
+            <a:r>
+              <a:rPr lang="en-GB"/>
+              <a:t>&lt;click&gt;</a:t>
+            </a:r>
+          </a:p>
+          <a:p>
+            <a:r>
+              <a:rPr lang="en-GB"/>
+              <a:t>P</a:t>
+            </a:r>
+            <a:r>
+              <a:rPr lang="sv-SE"/>
+              <a:t>å vilken address börjar player_two?</a:t>
+            </a:r>
+          </a:p>
+          <a:p>
+            <a:r>
+              <a:rPr lang="en-GB"/>
+              <a:t>&lt;click&gt;</a:t>
+            </a:r>
+          </a:p>
+          <a:p>
+            <a:r>
+              <a:rPr lang="en-GB"/>
+              <a:t>Japp, regeln </a:t>
+            </a:r>
+            <a:r>
+              <a:rPr lang="sv-SE"/>
+              <a:t>är att en struct måste vara lika alignad som dess största medlemsvariabel. </a:t>
+            </a:r>
+          </a:p>
+          <a:p>
+            <a:r>
+              <a:rPr lang="sv-SE"/>
+              <a:t>Om den bara innehåller shorts, t.ex., måste den vara på en address som är jämnt delbar med 2. Om den också innehåller en enda int så måste den vara alignad till 4 bytes. </a:t>
+            </a:r>
             <a:endParaRPr lang="LID4096"/>
           </a:p>
         </p:txBody>
@@ -1257,7 +1817,7 @@
 </p:notes>
 </file>
 
-<file path=ppt/notesSlides/notesSlide5.xml><?xml version="1.0" encoding="utf-8"?>
+<file path=ppt/notesSlides/notesSlide6.xml><?xml version="1.0" encoding="utf-8"?>
 <p:notes xmlns:a="http://schemas.openxmlformats.org/drawingml/2006/main" xmlns:r="http://schemas.openxmlformats.org/officeDocument/2006/relationships" xmlns:p="http://schemas.openxmlformats.org/presentationml/2006/main">
   <p:cSld>
     <p:spTree>
@@ -1319,6 +1879,54 @@
           <a:bodyPr/>
           <a:lstStyle/>
           <a:p>
+            <a:r>
+              <a:rPr lang="sv-SE"/>
+              <a:t>Vi ändrar score så den bara är en byte stor.</a:t>
+            </a:r>
+          </a:p>
+          <a:p>
+            <a:r>
+              <a:rPr lang="sv-SE"/>
+              <a:t>Hur stor plats tar hela structen upp? </a:t>
+            </a:r>
+          </a:p>
+          <a:p>
+            <a:r>
+              <a:rPr lang="sv-SE"/>
+              <a:t> </a:t>
+            </a:r>
+            <a:r>
+              <a:rPr lang="en-GB"/>
+              <a:t>&lt;click&gt;</a:t>
+            </a:r>
+          </a:p>
+          <a:p>
+            <a:r>
+              <a:rPr lang="en-GB"/>
+              <a:t>Elementen m</a:t>
+            </a:r>
+            <a:r>
+              <a:rPr lang="sv-SE"/>
+              <a:t>åste komma i rätt ordning. Eftersom health kommer efter score, och health måste ligga på en address som är jämnt delbar med fyra så får vi tre ”tomma” bytes i minnet. </a:t>
+            </a:r>
+          </a:p>
+          <a:p>
+            <a:endParaRPr lang="sv-SE"/>
+          </a:p>
+          <a:p>
+            <a:r>
+              <a:rPr lang="sv-SE"/>
+              <a:t>Kompilatorn är inte ”smart” här och byter ordning eller gör något annat fiffigt, för om vi gjorde något annat än att följa dom enkla reglerna så vet ju inte annan kod hur vår strukt ser ut. </a:t>
+            </a:r>
+          </a:p>
+          <a:p>
+            <a:endParaRPr lang="sv-SE"/>
+          </a:p>
+          <a:p>
+            <a:r>
+              <a:rPr lang="sv-SE"/>
+              <a:t>(nämn packing)</a:t>
+            </a:r>
             <a:endParaRPr lang="LID4096"/>
           </a:p>
         </p:txBody>
@@ -1365,7 +1973,7 @@
 </p:notes>
 </file>
 
-<file path=ppt/notesSlides/notesSlide6.xml><?xml version="1.0" encoding="utf-8"?>
+<file path=ppt/notesSlides/notesSlide7.xml><?xml version="1.0" encoding="utf-8"?>
 <p:notes xmlns:a="http://schemas.openxmlformats.org/drawingml/2006/main" xmlns:r="http://schemas.openxmlformats.org/officeDocument/2006/relationships" xmlns:p="http://schemas.openxmlformats.org/presentationml/2006/main">
   <p:cSld>
     <p:spTree>
@@ -1427,6 +2035,29 @@
           <a:bodyPr/>
           <a:lstStyle/>
           <a:p>
+            <a:r>
+              <a:rPr lang="sv-SE"/>
+              <a:t>(inga animationer)</a:t>
+            </a:r>
+          </a:p>
+          <a:p>
+            <a:r>
+              <a:rPr lang="sv-SE"/>
+              <a:t>Visa att Player innehåller ett Weapon, och att den hamnar i minnet precis som om Player hade Weapons medlemmar. </a:t>
+            </a:r>
+          </a:p>
+          <a:p>
+            <a:endParaRPr lang="sv-SE"/>
+          </a:p>
+          <a:p>
+            <a:r>
+              <a:rPr lang="sv-SE"/>
+              <a:t>Peka också på </a:t>
+            </a:r>
+            <a:r>
+              <a:rPr lang="sv-SE" b="1"/>
+              <a:t>initialiseringen</a:t>
+            </a:r>
             <a:endParaRPr lang="LID4096"/>
           </a:p>
         </p:txBody>
@@ -1473,7 +2104,7 @@
 </p:notes>
 </file>
 
-<file path=ppt/notesSlides/notesSlide7.xml><?xml version="1.0" encoding="utf-8"?>
+<file path=ppt/notesSlides/notesSlide8.xml><?xml version="1.0" encoding="utf-8"?>
 <p:notes xmlns:a="http://schemas.openxmlformats.org/drawingml/2006/main" xmlns:r="http://schemas.openxmlformats.org/officeDocument/2006/relationships" xmlns:p="http://schemas.openxmlformats.org/presentationml/2006/main">
   <p:cSld>
     <p:spTree>
@@ -1528,20 +2159,36 @@
           <a:p>
             <a:r>
               <a:rPr lang="sv-SE"/>
-              <a:t>Det här är </a:t>
-            </a:r>
+              <a:t>Först allokerar vi minne för en bok på stacken.</a:t>
+            </a:r>
+          </a:p>
+          <a:p>
+            <a:r>
+              <a:rPr lang="sv-SE"/>
+              <a:t>Sedan lägger vi en kopia av den på stacken</a:t>
+            </a:r>
+          </a:p>
+          <a:p>
+            <a:r>
+              <a:rPr lang="sv-SE"/>
+              <a:t>Sedan lägger vi en ny kopia på stacken för att returna</a:t>
+            </a:r>
+          </a:p>
+          <a:p>
+            <a:r>
+              <a:rPr lang="sv-SE"/>
+              <a:t>och till slut kopierar vi den från stacken till ett nytt ställe på stacken som vi kallar processed book. </a:t>
+            </a:r>
+          </a:p>
+          <a:p>
+            <a:endParaRPr lang="sv-SE"/>
+          </a:p>
+          <a:p>
             <a:r>
               <a:rPr lang="sv-SE" i="1"/>
-              <a:t>oftast</a:t>
-            </a:r>
-            <a:r>
-              <a:rPr lang="sv-SE" i="0"/>
-              <a:t> inte vad man vill göra. </a:t>
-            </a:r>
-            <a:endParaRPr lang="sv-SE"/>
-          </a:p>
-          <a:p>
-            <a:endParaRPr lang="LID4096"/>
+              <a:t>Egentligen behövde vi nog bara ha en bok i minnet?</a:t>
+            </a:r>
+            <a:endParaRPr lang="LID4096" i="1"/>
           </a:p>
         </p:txBody>
       </p:sp>
@@ -1581,7 +2228,7 @@
 </p:notes>
 </file>
 
-<file path=ppt/notesSlides/notesSlide8.xml><?xml version="1.0" encoding="utf-8"?>
+<file path=ppt/notesSlides/notesSlide9.xml><?xml version="1.0" encoding="utf-8"?>
 <p:notes xmlns:a="http://schemas.openxmlformats.org/drawingml/2006/main" xmlns:r="http://schemas.openxmlformats.org/officeDocument/2006/relationships" xmlns:p="http://schemas.openxmlformats.org/presentationml/2006/main">
   <p:cSld>
     <p:spTree>
@@ -1645,10 +2292,36 @@
           <a:p>
             <a:r>
               <a:rPr lang="sv-SE"/>
-              <a:t>Gå igenom koden. Någon som ser ett eventuellt problem med den? </a:t>
-            </a:r>
-          </a:p>
-          <a:p>
+              <a:t>Istället kan vi göra så här. </a:t>
+            </a:r>
+          </a:p>
+          <a:p>
+            <a:r>
+              <a:rPr lang="sv-SE"/>
+              <a:t>Vi skapar boken på stacken en gång, sedan skickar vi en pekare till den, och processbook kan ändra direkt i minnet. </a:t>
+            </a:r>
+          </a:p>
+          <a:p>
+            <a:r>
+              <a:rPr lang="en-GB"/>
+              <a:t>&lt;click&gt;</a:t>
+            </a:r>
+          </a:p>
+          <a:p>
+            <a:r>
+              <a:rPr lang="en-GB"/>
+              <a:t>Pilnotation, g</a:t>
+            </a:r>
+            <a:r>
+              <a:rPr lang="sv-SE"/>
+              <a:t>å igenom första. </a:t>
+            </a:r>
+          </a:p>
+          <a:p>
+            <a:r>
+              <a:rPr lang="sv-SE"/>
+              <a:t>Visa att andra är snyggare och enklare och exakt samma sak. </a:t>
+            </a:r>
             <a:endParaRPr lang="LID4096"/>
           </a:p>
         </p:txBody>
@@ -1686,106 +2359,6 @@
     <p:extLst>
       <p:ext uri="{BB962C8B-B14F-4D97-AF65-F5344CB8AC3E}">
         <p14:creationId xmlns:p14="http://schemas.microsoft.com/office/powerpoint/2010/main" val="2371444829"/>
-      </p:ext>
-    </p:extLst>
-  </p:cSld>
-  <p:clrMapOvr>
-    <a:masterClrMapping/>
-  </p:clrMapOvr>
-</p:notes>
-</file>
-
-<file path=ppt/notesSlides/notesSlide9.xml><?xml version="1.0" encoding="utf-8"?>
-<p:notes xmlns:a="http://schemas.openxmlformats.org/drawingml/2006/main" xmlns:r="http://schemas.openxmlformats.org/officeDocument/2006/relationships" xmlns:p="http://schemas.openxmlformats.org/presentationml/2006/main">
-  <p:cSld>
-    <p:spTree>
-      <p:nvGrpSpPr>
-        <p:cNvPr id="1" name=""/>
-        <p:cNvGrpSpPr/>
-        <p:nvPr/>
-      </p:nvGrpSpPr>
-      <p:grpSpPr>
-        <a:xfrm>
-          <a:off x="0" y="0"/>
-          <a:ext cx="0" cy="0"/>
-          <a:chOff x="0" y="0"/>
-          <a:chExt cx="0" cy="0"/>
-        </a:xfrm>
-      </p:grpSpPr>
-      <p:sp>
-        <p:nvSpPr>
-          <p:cNvPr id="2" name="Slide Image Placeholder 1"/>
-          <p:cNvSpPr>
-            <a:spLocks noGrp="1" noRot="1" noChangeAspect="1"/>
-          </p:cNvSpPr>
-          <p:nvPr>
-            <p:ph type="sldImg"/>
-          </p:nvPr>
-        </p:nvSpPr>
-        <p:spPr/>
-      </p:sp>
-      <p:sp>
-        <p:nvSpPr>
-          <p:cNvPr id="3" name="Notes Placeholder 2"/>
-          <p:cNvSpPr>
-            <a:spLocks noGrp="1"/>
-          </p:cNvSpPr>
-          <p:nvPr>
-            <p:ph type="body" idx="1"/>
-          </p:nvPr>
-        </p:nvSpPr>
-        <p:spPr/>
-        <p:txBody>
-          <a:bodyPr/>
-          <a:lstStyle/>
-          <a:p>
-            <a:r>
-              <a:rPr lang="en-GB"/>
-              <a:t>This would work.</a:t>
-            </a:r>
-          </a:p>
-          <a:p>
-            <a:r>
-              <a:rPr lang="en-GB"/>
-              <a:t>Explain how this maps.</a:t>
-            </a:r>
-          </a:p>
-          <a:p>
-            <a:r>
-              <a:rPr lang="en-GB"/>
-              <a:t>But all the registers are 16 bits!</a:t>
-            </a:r>
-            <a:endParaRPr lang="LID4096"/>
-          </a:p>
-        </p:txBody>
-      </p:sp>
-      <p:sp>
-        <p:nvSpPr>
-          <p:cNvPr id="4" name="Slide Number Placeholder 3"/>
-          <p:cNvSpPr>
-            <a:spLocks noGrp="1"/>
-          </p:cNvSpPr>
-          <p:nvPr>
-            <p:ph type="sldNum" sz="quarter" idx="5"/>
-          </p:nvPr>
-        </p:nvSpPr>
-        <p:spPr/>
-        <p:txBody>
-          <a:bodyPr/>
-          <a:lstStyle/>
-          <a:p>
-            <a:fld id="{01B4E41B-EE32-43AA-BF26-21D12108C66F}" type="slidenum">
-              <a:rPr lang="LID4096" smtClean="0"/>
-              <a:t>19</a:t>
-            </a:fld>
-            <a:endParaRPr lang="LID4096"/>
-          </a:p>
-        </p:txBody>
-      </p:sp>
-    </p:spTree>
-    <p:extLst>
-      <p:ext uri="{BB962C8B-B14F-4D97-AF65-F5344CB8AC3E}">
-        <p14:creationId xmlns:p14="http://schemas.microsoft.com/office/powerpoint/2010/main" val="4221342219"/>
       </p:ext>
     </p:extLst>
   </p:cSld>
@@ -8495,92 +9068,6 @@
   <p:clrMapOvr>
     <a:masterClrMapping/>
   </p:clrMapOvr>
-  <p:timing>
-    <p:tnLst>
-      <p:par>
-        <p:cTn id="1" dur="indefinite" restart="never" nodeType="tmRoot">
-          <p:childTnLst>
-            <p:seq concurrent="1" nextAc="seek">
-              <p:cTn id="2" dur="indefinite" nodeType="mainSeq">
-                <p:childTnLst>
-                  <p:par>
-                    <p:cTn id="3" fill="hold">
-                      <p:stCondLst>
-                        <p:cond delay="indefinite"/>
-                      </p:stCondLst>
-                      <p:childTnLst>
-                        <p:par>
-                          <p:cTn id="4" fill="hold">
-                            <p:stCondLst>
-                              <p:cond delay="0"/>
-                            </p:stCondLst>
-                            <p:childTnLst>
-                              <p:par>
-                                <p:cTn id="5" presetID="10" presetClass="entr" presetSubtype="0" fill="hold" grpId="0" nodeType="clickEffect">
-                                  <p:stCondLst>
-                                    <p:cond delay="0"/>
-                                  </p:stCondLst>
-                                  <p:childTnLst>
-                                    <p:set>
-                                      <p:cBhvr>
-                                        <p:cTn id="6" dur="1" fill="hold">
-                                          <p:stCondLst>
-                                            <p:cond delay="0"/>
-                                          </p:stCondLst>
-                                        </p:cTn>
-                                        <p:tgtEl>
-                                          <p:spTgt spid="29"/>
-                                        </p:tgtEl>
-                                        <p:attrNameLst>
-                                          <p:attrName>style.visibility</p:attrName>
-                                        </p:attrNameLst>
-                                      </p:cBhvr>
-                                      <p:to>
-                                        <p:strVal val="visible"/>
-                                      </p:to>
-                                    </p:set>
-                                    <p:animEffect transition="in" filter="fade">
-                                      <p:cBhvr>
-                                        <p:cTn id="7" dur="500"/>
-                                        <p:tgtEl>
-                                          <p:spTgt spid="29"/>
-                                        </p:tgtEl>
-                                      </p:cBhvr>
-                                    </p:animEffect>
-                                  </p:childTnLst>
-                                </p:cTn>
-                              </p:par>
-                            </p:childTnLst>
-                          </p:cTn>
-                        </p:par>
-                      </p:childTnLst>
-                    </p:cTn>
-                  </p:par>
-                </p:childTnLst>
-              </p:cTn>
-              <p:prevCondLst>
-                <p:cond evt="onPrev" delay="0">
-                  <p:tgtEl>
-                    <p:sldTgt/>
-                  </p:tgtEl>
-                </p:cond>
-              </p:prevCondLst>
-              <p:nextCondLst>
-                <p:cond evt="onNext" delay="0">
-                  <p:tgtEl>
-                    <p:sldTgt/>
-                  </p:tgtEl>
-                </p:cond>
-              </p:nextCondLst>
-            </p:seq>
-          </p:childTnLst>
-        </p:cTn>
-      </p:par>
-    </p:tnLst>
-    <p:bldLst>
-      <p:bldP spid="29" grpId="0" animBg="1"/>
-    </p:bldLst>
-  </p:timing>
 </p:sld>
 </file>
 
@@ -8832,7 +9319,7 @@
                 </a:solidFill>
                 <a:latin typeface="Consolas" panose="020B0609020204030204" pitchFamily="49" charset="0"/>
               </a:rPr>
-              <a:t>void</a:t>
+              <a:t>Book</a:t>
             </a:r>
             <a:r>
               <a:rPr lang="en-GB" sz="1600">
@@ -8900,16 +9387,16 @@
               </a:rPr>
               <a:t>                370, 1234 };</a:t>
             </a:r>
-            <a:br>
+          </a:p>
+          <a:p>
+            <a:pPr marL="0" indent="0">
+              <a:buNone/>
+            </a:pPr>
+            <a:r>
               <a:rPr lang="en-GB" sz="1600">
                 <a:latin typeface="Consolas" panose="020B0609020204030204" pitchFamily="49" charset="0"/>
               </a:rPr>
-            </a:br>
-            <a:r>
-              <a:rPr lang="en-GB" sz="1600">
-                <a:latin typeface="Consolas" panose="020B0609020204030204" pitchFamily="49" charset="0"/>
-              </a:rPr>
-              <a:t>  ProcessBook(book);</a:t>
+              <a:t>  Book processed_book = ProcessBook(book);</a:t>
             </a:r>
             <a:br>
               <a:rPr lang="en-GB" sz="1600">
@@ -10443,7 +10930,7 @@
                             </p:stCondLst>
                             <p:childTnLst>
                               <p:par>
-                                <p:cTn id="10" presetID="10" presetClass="entr" presetSubtype="0" fill="hold" nodeType="clickEffect">
+                                <p:cTn id="10" presetID="10" presetClass="entr" presetSubtype="0" fill="hold" grpId="0" nodeType="clickEffect">
                                   <p:stCondLst>
                                     <p:cond delay="0"/>
                                   </p:stCondLst>
@@ -10451,6 +10938,45 @@
                                     <p:set>
                                       <p:cBhvr>
                                         <p:cTn id="11" dur="1" fill="hold">
+                                          <p:stCondLst>
+                                            <p:cond delay="0"/>
+                                          </p:stCondLst>
+                                        </p:cTn>
+                                        <p:tgtEl>
+                                          <p:spTgt spid="6">
+                                            <p:bg/>
+                                          </p:spTgt>
+                                        </p:tgtEl>
+                                        <p:attrNameLst>
+                                          <p:attrName>style.visibility</p:attrName>
+                                        </p:attrNameLst>
+                                      </p:cBhvr>
+                                      <p:to>
+                                        <p:strVal val="visible"/>
+                                      </p:to>
+                                    </p:set>
+                                    <p:animEffect transition="in" filter="fade">
+                                      <p:cBhvr>
+                                        <p:cTn id="12" dur="500"/>
+                                        <p:tgtEl>
+                                          <p:spTgt spid="6">
+                                            <p:bg/>
+                                          </p:spTgt>
+                                        </p:tgtEl>
+                                      </p:cBhvr>
+                                    </p:animEffect>
+                                  </p:childTnLst>
+                                </p:cTn>
+                              </p:par>
+                              <p:par>
+                                <p:cTn id="13" presetID="10" presetClass="entr" presetSubtype="0" fill="hold" grpId="0" nodeType="withEffect">
+                                  <p:stCondLst>
+                                    <p:cond delay="0"/>
+                                  </p:stCondLst>
+                                  <p:childTnLst>
+                                    <p:set>
+                                      <p:cBhvr>
+                                        <p:cTn id="14" dur="1" fill="hold">
                                           <p:stCondLst>
                                             <p:cond delay="0"/>
                                           </p:stCondLst>
@@ -10472,7 +10998,7 @@
                                     </p:set>
                                     <p:animEffect transition="in" filter="fade">
                                       <p:cBhvr>
-                                        <p:cTn id="12" dur="500"/>
+                                        <p:cTn id="15" dur="500"/>
                                         <p:tgtEl>
                                           <p:spTgt spid="6">
                                             <p:txEl>
@@ -10486,14 +11012,14 @@
                                 </p:cTn>
                               </p:par>
                               <p:par>
-                                <p:cTn id="13" presetID="10" presetClass="entr" presetSubtype="0" fill="hold" nodeType="withEffect">
+                                <p:cTn id="16" presetID="10" presetClass="entr" presetSubtype="0" fill="hold" grpId="0" nodeType="withEffect">
                                   <p:stCondLst>
                                     <p:cond delay="0"/>
                                   </p:stCondLst>
                                   <p:childTnLst>
                                     <p:set>
                                       <p:cBhvr>
-                                        <p:cTn id="14" dur="1" fill="hold">
+                                        <p:cTn id="17" dur="1" fill="hold">
                                           <p:stCondLst>
                                             <p:cond delay="0"/>
                                           </p:stCondLst>
@@ -10515,7 +11041,7 @@
                                     </p:set>
                                     <p:animEffect transition="in" filter="fade">
                                       <p:cBhvr>
-                                        <p:cTn id="15" dur="500"/>
+                                        <p:cTn id="18" dur="500"/>
                                         <p:tgtEl>
                                           <p:spTgt spid="6">
                                             <p:txEl>
@@ -10529,14 +11055,14 @@
                                 </p:cTn>
                               </p:par>
                               <p:par>
-                                <p:cTn id="16" presetID="10" presetClass="entr" presetSubtype="0" fill="hold" nodeType="withEffect">
+                                <p:cTn id="19" presetID="10" presetClass="entr" presetSubtype="0" fill="hold" grpId="0" nodeType="withEffect">
                                   <p:stCondLst>
                                     <p:cond delay="0"/>
                                   </p:stCondLst>
                                   <p:childTnLst>
                                     <p:set>
                                       <p:cBhvr>
-                                        <p:cTn id="17" dur="1" fill="hold">
+                                        <p:cTn id="20" dur="1" fill="hold">
                                           <p:stCondLst>
                                             <p:cond delay="0"/>
                                           </p:stCondLst>
@@ -10558,7 +11084,7 @@
                                     </p:set>
                                     <p:animEffect transition="in" filter="fade">
                                       <p:cBhvr>
-                                        <p:cTn id="18" dur="500"/>
+                                        <p:cTn id="21" dur="500"/>
                                         <p:tgtEl>
                                           <p:spTgt spid="6">
                                             <p:txEl>
@@ -10572,14 +11098,14 @@
                                 </p:cTn>
                               </p:par>
                               <p:par>
-                                <p:cTn id="19" presetID="10" presetClass="entr" presetSubtype="0" fill="hold" nodeType="withEffect">
+                                <p:cTn id="22" presetID="10" presetClass="entr" presetSubtype="0" fill="hold" grpId="0" nodeType="withEffect">
                                   <p:stCondLst>
                                     <p:cond delay="0"/>
                                   </p:stCondLst>
                                   <p:childTnLst>
                                     <p:set>
                                       <p:cBhvr>
-                                        <p:cTn id="20" dur="1" fill="hold">
+                                        <p:cTn id="23" dur="1" fill="hold">
                                           <p:stCondLst>
                                             <p:cond delay="0"/>
                                           </p:stCondLst>
@@ -10601,7 +11127,7 @@
                                     </p:set>
                                     <p:animEffect transition="in" filter="fade">
                                       <p:cBhvr>
-                                        <p:cTn id="21" dur="500"/>
+                                        <p:cTn id="24" dur="500"/>
                                         <p:tgtEl>
                                           <p:spTgt spid="6">
                                             <p:txEl>
@@ -10615,14 +11141,14 @@
                                 </p:cTn>
                               </p:par>
                               <p:par>
-                                <p:cTn id="22" presetID="10" presetClass="entr" presetSubtype="0" fill="hold" nodeType="withEffect">
+                                <p:cTn id="25" presetID="10" presetClass="entr" presetSubtype="0" fill="hold" grpId="0" nodeType="withEffect">
                                   <p:stCondLst>
                                     <p:cond delay="0"/>
                                   </p:stCondLst>
                                   <p:childTnLst>
                                     <p:set>
                                       <p:cBhvr>
-                                        <p:cTn id="23" dur="1" fill="hold">
+                                        <p:cTn id="26" dur="1" fill="hold">
                                           <p:stCondLst>
                                             <p:cond delay="0"/>
                                           </p:stCondLst>
@@ -10644,7 +11170,7 @@
                                     </p:set>
                                     <p:animEffect transition="in" filter="fade">
                                       <p:cBhvr>
-                                        <p:cTn id="24" dur="500"/>
+                                        <p:cTn id="27" dur="500"/>
                                         <p:tgtEl>
                                           <p:spTgt spid="6">
                                             <p:txEl>
@@ -10658,14 +11184,14 @@
                                 </p:cTn>
                               </p:par>
                               <p:par>
-                                <p:cTn id="25" presetID="10" presetClass="entr" presetSubtype="0" fill="hold" nodeType="withEffect">
+                                <p:cTn id="28" presetID="10" presetClass="entr" presetSubtype="0" fill="hold" grpId="0" nodeType="withEffect">
                                   <p:stCondLst>
                                     <p:cond delay="0"/>
                                   </p:stCondLst>
                                   <p:childTnLst>
                                     <p:set>
                                       <p:cBhvr>
-                                        <p:cTn id="26" dur="1" fill="hold">
+                                        <p:cTn id="29" dur="1" fill="hold">
                                           <p:stCondLst>
                                             <p:cond delay="0"/>
                                           </p:stCondLst>
@@ -10687,7 +11213,7 @@
                                     </p:set>
                                     <p:animEffect transition="in" filter="fade">
                                       <p:cBhvr>
-                                        <p:cTn id="27" dur="500"/>
+                                        <p:cTn id="30" dur="500"/>
                                         <p:tgtEl>
                                           <p:spTgt spid="6">
                                             <p:txEl>
@@ -10701,14 +11227,14 @@
                                 </p:cTn>
                               </p:par>
                               <p:par>
-                                <p:cTn id="28" presetID="10" presetClass="entr" presetSubtype="0" fill="hold" nodeType="withEffect">
+                                <p:cTn id="31" presetID="10" presetClass="entr" presetSubtype="0" fill="hold" grpId="0" nodeType="withEffect">
                                   <p:stCondLst>
                                     <p:cond delay="0"/>
                                   </p:stCondLst>
                                   <p:childTnLst>
                                     <p:set>
                                       <p:cBhvr>
-                                        <p:cTn id="29" dur="1" fill="hold">
+                                        <p:cTn id="32" dur="1" fill="hold">
                                           <p:stCondLst>
                                             <p:cond delay="0"/>
                                           </p:stCondLst>
@@ -10730,7 +11256,7 @@
                                     </p:set>
                                     <p:animEffect transition="in" filter="fade">
                                       <p:cBhvr>
-                                        <p:cTn id="30" dur="500"/>
+                                        <p:cTn id="33" dur="500"/>
                                         <p:tgtEl>
                                           <p:spTgt spid="6">
                                             <p:txEl>
@@ -10743,33 +11269,15 @@
                                   </p:childTnLst>
                                 </p:cTn>
                               </p:par>
-                            </p:childTnLst>
-                          </p:cTn>
-                        </p:par>
-                      </p:childTnLst>
-                    </p:cTn>
-                  </p:par>
-                  <p:par>
-                    <p:cTn id="31" fill="hold">
-                      <p:stCondLst>
-                        <p:cond delay="indefinite"/>
-                      </p:stCondLst>
-                      <p:childTnLst>
-                        <p:par>
-                          <p:cTn id="32" fill="hold">
-                            <p:stCondLst>
-                              <p:cond delay="0"/>
-                            </p:stCondLst>
-                            <p:childTnLst>
                               <p:par>
-                                <p:cTn id="33" presetID="10" presetClass="entr" presetSubtype="0" fill="hold" nodeType="clickEffect">
+                                <p:cTn id="34" presetID="10" presetClass="entr" presetSubtype="0" fill="hold" grpId="0" nodeType="withEffect">
                                   <p:stCondLst>
                                     <p:cond delay="0"/>
                                   </p:stCondLst>
                                   <p:childTnLst>
                                     <p:set>
                                       <p:cBhvr>
-                                        <p:cTn id="34" dur="1" fill="hold">
+                                        <p:cTn id="35" dur="1" fill="hold">
                                           <p:stCondLst>
                                             <p:cond delay="0"/>
                                           </p:stCondLst>
@@ -10791,7 +11299,7 @@
                                     </p:set>
                                     <p:animEffect transition="in" filter="fade">
                                       <p:cBhvr>
-                                        <p:cTn id="35" dur="500"/>
+                                        <p:cTn id="36" dur="500"/>
                                         <p:tgtEl>
                                           <p:spTgt spid="6">
                                             <p:txEl>
@@ -10805,14 +11313,14 @@
                                 </p:cTn>
                               </p:par>
                               <p:par>
-                                <p:cTn id="36" presetID="10" presetClass="entr" presetSubtype="0" fill="hold" nodeType="withEffect">
+                                <p:cTn id="37" presetID="10" presetClass="entr" presetSubtype="0" fill="hold" grpId="0" nodeType="withEffect">
                                   <p:stCondLst>
                                     <p:cond delay="0"/>
                                   </p:stCondLst>
                                   <p:childTnLst>
                                     <p:set>
                                       <p:cBhvr>
-                                        <p:cTn id="37" dur="1" fill="hold">
+                                        <p:cTn id="38" dur="1" fill="hold">
                                           <p:stCondLst>
                                             <p:cond delay="0"/>
                                           </p:stCondLst>
@@ -10834,7 +11342,7 @@
                                     </p:set>
                                     <p:animEffect transition="in" filter="fade">
                                       <p:cBhvr>
-                                        <p:cTn id="38" dur="500"/>
+                                        <p:cTn id="39" dur="500"/>
                                         <p:tgtEl>
                                           <p:spTgt spid="6">
                                             <p:txEl>
@@ -10848,14 +11356,14 @@
                                 </p:cTn>
                               </p:par>
                               <p:par>
-                                <p:cTn id="39" presetID="10" presetClass="entr" presetSubtype="0" fill="hold" nodeType="withEffect">
+                                <p:cTn id="40" presetID="10" presetClass="entr" presetSubtype="0" fill="hold" grpId="0" nodeType="withEffect">
                                   <p:stCondLst>
                                     <p:cond delay="0"/>
                                   </p:stCondLst>
                                   <p:childTnLst>
                                     <p:set>
                                       <p:cBhvr>
-                                        <p:cTn id="40" dur="1" fill="hold">
+                                        <p:cTn id="41" dur="1" fill="hold">
                                           <p:stCondLst>
                                             <p:cond delay="0"/>
                                           </p:stCondLst>
@@ -10877,7 +11385,7 @@
                                     </p:set>
                                     <p:animEffect transition="in" filter="fade">
                                       <p:cBhvr>
-                                        <p:cTn id="41" dur="500"/>
+                                        <p:cTn id="42" dur="500"/>
                                         <p:tgtEl>
                                           <p:spTgt spid="6">
                                             <p:txEl>
@@ -10891,14 +11399,14 @@
                                 </p:cTn>
                               </p:par>
                               <p:par>
-                                <p:cTn id="42" presetID="10" presetClass="entr" presetSubtype="0" fill="hold" nodeType="withEffect">
+                                <p:cTn id="43" presetID="10" presetClass="entr" presetSubtype="0" fill="hold" grpId="0" nodeType="withEffect">
                                   <p:stCondLst>
                                     <p:cond delay="0"/>
                                   </p:stCondLst>
                                   <p:childTnLst>
                                     <p:set>
                                       <p:cBhvr>
-                                        <p:cTn id="43" dur="1" fill="hold">
+                                        <p:cTn id="44" dur="1" fill="hold">
                                           <p:stCondLst>
                                             <p:cond delay="0"/>
                                           </p:stCondLst>
@@ -10920,7 +11428,7 @@
                                     </p:set>
                                     <p:animEffect transition="in" filter="fade">
                                       <p:cBhvr>
-                                        <p:cTn id="44" dur="500"/>
+                                        <p:cTn id="45" dur="500"/>
                                         <p:tgtEl>
                                           <p:spTgt spid="6">
                                             <p:txEl>
@@ -10934,14 +11442,14 @@
                                 </p:cTn>
                               </p:par>
                               <p:par>
-                                <p:cTn id="45" presetID="10" presetClass="entr" presetSubtype="0" fill="hold" nodeType="withEffect">
+                                <p:cTn id="46" presetID="10" presetClass="entr" presetSubtype="0" fill="hold" grpId="0" nodeType="withEffect">
                                   <p:stCondLst>
                                     <p:cond delay="0"/>
                                   </p:stCondLst>
                                   <p:childTnLst>
                                     <p:set>
                                       <p:cBhvr>
-                                        <p:cTn id="46" dur="1" fill="hold">
+                                        <p:cTn id="47" dur="1" fill="hold">
                                           <p:stCondLst>
                                             <p:cond delay="0"/>
                                           </p:stCondLst>
@@ -10963,7 +11471,7 @@
                                     </p:set>
                                     <p:animEffect transition="in" filter="fade">
                                       <p:cBhvr>
-                                        <p:cTn id="47" dur="500"/>
+                                        <p:cTn id="48" dur="500"/>
                                         <p:tgtEl>
                                           <p:spTgt spid="6">
                                             <p:txEl>
@@ -10977,14 +11485,14 @@
                                 </p:cTn>
                               </p:par>
                               <p:par>
-                                <p:cTn id="48" presetID="10" presetClass="entr" presetSubtype="0" fill="hold" nodeType="withEffect">
+                                <p:cTn id="49" presetID="10" presetClass="entr" presetSubtype="0" fill="hold" grpId="0" nodeType="withEffect">
                                   <p:stCondLst>
                                     <p:cond delay="0"/>
                                   </p:stCondLst>
                                   <p:childTnLst>
                                     <p:set>
                                       <p:cBhvr>
-                                        <p:cTn id="49" dur="1" fill="hold">
+                                        <p:cTn id="50" dur="1" fill="hold">
                                           <p:stCondLst>
                                             <p:cond delay="0"/>
                                           </p:stCondLst>
@@ -11006,7 +11514,7 @@
                                     </p:set>
                                     <p:animEffect transition="in" filter="fade">
                                       <p:cBhvr>
-                                        <p:cTn id="50" dur="500"/>
+                                        <p:cTn id="51" dur="500"/>
                                         <p:tgtEl>
                                           <p:spTgt spid="6">
                                             <p:txEl>
@@ -11020,14 +11528,14 @@
                                 </p:cTn>
                               </p:par>
                               <p:par>
-                                <p:cTn id="51" presetID="10" presetClass="entr" presetSubtype="0" fill="hold" nodeType="withEffect">
+                                <p:cTn id="52" presetID="10" presetClass="entr" presetSubtype="0" fill="hold" grpId="0" nodeType="withEffect">
                                   <p:stCondLst>
                                     <p:cond delay="0"/>
                                   </p:stCondLst>
                                   <p:childTnLst>
                                     <p:set>
                                       <p:cBhvr>
-                                        <p:cTn id="52" dur="1" fill="hold">
+                                        <p:cTn id="53" dur="1" fill="hold">
                                           <p:stCondLst>
                                             <p:cond delay="0"/>
                                           </p:stCondLst>
@@ -11049,7 +11557,7 @@
                                     </p:set>
                                     <p:animEffect transition="in" filter="fade">
                                       <p:cBhvr>
-                                        <p:cTn id="53" dur="500"/>
+                                        <p:cTn id="54" dur="500"/>
                                         <p:tgtEl>
                                           <p:spTgt spid="6">
                                             <p:txEl>
@@ -11089,6 +11597,9 @@
         </p:cTn>
       </p:par>
     </p:tnLst>
+    <p:bldLst>
+      <p:bldP spid="6" grpId="0" uiExpand="1" build="allAtOnce" animBg="1"/>
+    </p:bldLst>
   </p:timing>
 </p:sld>
 </file>
@@ -11241,7 +11752,7 @@
           <p:nvPr/>
         </p:nvPicPr>
         <p:blipFill>
-          <a:blip r:embed="rId2"/>
+          <a:blip r:embed="rId3"/>
           <a:stretch>
             <a:fillRect/>
           </a:stretch>
@@ -14925,26 +15436,2909 @@
       </p:sp>
       <p:sp>
         <p:nvSpPr>
-          <p:cNvPr id="3" name="Content Placeholder 2">
-            <a:extLst>
-              <a:ext uri="{FF2B5EF4-FFF2-40B4-BE49-F238E27FC236}">
-                <a16:creationId xmlns:a16="http://schemas.microsoft.com/office/drawing/2014/main" id="{CEA4D197-C643-6DF4-1FF6-784506B52D48}"/>
-              </a:ext>
-            </a:extLst>
-          </p:cNvPr>
-          <p:cNvSpPr>
-            <a:spLocks noGrp="1"/>
-          </p:cNvSpPr>
-          <p:nvPr>
-            <p:ph idx="1"/>
-          </p:nvPr>
-        </p:nvSpPr>
-        <p:spPr/>
+          <p:cNvPr id="5" name="TextBox 4">
+            <a:extLst>
+              <a:ext uri="{FF2B5EF4-FFF2-40B4-BE49-F238E27FC236}">
+                <a16:creationId xmlns:a16="http://schemas.microsoft.com/office/drawing/2014/main" id="{0AF9429D-5EC1-D5EE-58D0-5E4D84D4E5D6}"/>
+              </a:ext>
+            </a:extLst>
+          </p:cNvPr>
+          <p:cNvSpPr txBox="1"/>
+          <p:nvPr/>
+        </p:nvSpPr>
+        <p:spPr>
+          <a:xfrm>
+            <a:off x="256838" y="1865666"/>
+            <a:ext cx="6096896" cy="3539430"/>
+          </a:xfrm>
+          <a:prstGeom prst="rect">
+            <a:avLst/>
+          </a:prstGeom>
+          <a:solidFill>
+            <a:schemeClr val="tx1">
+              <a:lumMod val="85000"/>
+              <a:lumOff val="15000"/>
+            </a:schemeClr>
+          </a:solidFill>
+        </p:spPr>
         <p:txBody>
-          <a:bodyPr/>
+          <a:bodyPr wrap="square">
+            <a:spAutoFit/>
+          </a:bodyPr>
           <a:lstStyle/>
           <a:p>
-            <a:endParaRPr lang="LID4096"/>
+            <a:pPr>
+              <a:buNone/>
+            </a:pPr>
+            <a:r>
+              <a:rPr lang="en-GB" sz="1400" b="0">
+                <a:solidFill>
+                  <a:srgbClr val="569CD6"/>
+                </a:solidFill>
+                <a:effectLst/>
+                <a:latin typeface="Consolas" panose="020B0609020204030204" pitchFamily="49" charset="0"/>
+              </a:rPr>
+              <a:t>typedef</a:t>
+            </a:r>
+            <a:r>
+              <a:rPr lang="en-GB" sz="1400" b="0">
+                <a:solidFill>
+                  <a:srgbClr val="CCCCCC"/>
+                </a:solidFill>
+                <a:effectLst/>
+                <a:latin typeface="Consolas" panose="020B0609020204030204" pitchFamily="49" charset="0"/>
+              </a:rPr>
+              <a:t> </a:t>
+            </a:r>
+            <a:r>
+              <a:rPr lang="en-GB" sz="1400" b="0">
+                <a:solidFill>
+                  <a:srgbClr val="569CD6"/>
+                </a:solidFill>
+                <a:effectLst/>
+                <a:latin typeface="Consolas" panose="020B0609020204030204" pitchFamily="49" charset="0"/>
+              </a:rPr>
+              <a:t>struct</a:t>
+            </a:r>
+            <a:r>
+              <a:rPr lang="en-GB" sz="1400" b="0">
+                <a:solidFill>
+                  <a:srgbClr val="CCCCCC"/>
+                </a:solidFill>
+                <a:effectLst/>
+                <a:latin typeface="Consolas" panose="020B0609020204030204" pitchFamily="49" charset="0"/>
+              </a:rPr>
+              <a:t> {</a:t>
+            </a:r>
+          </a:p>
+          <a:p>
+            <a:pPr>
+              <a:buNone/>
+            </a:pPr>
+            <a:r>
+              <a:rPr lang="en-GB" sz="1400" b="0">
+                <a:solidFill>
+                  <a:srgbClr val="CCCCCC"/>
+                </a:solidFill>
+                <a:effectLst/>
+                <a:latin typeface="Consolas" panose="020B0609020204030204" pitchFamily="49" charset="0"/>
+              </a:rPr>
+              <a:t>    </a:t>
+            </a:r>
+            <a:r>
+              <a:rPr lang="en-GB" sz="1400" b="0">
+                <a:solidFill>
+                  <a:srgbClr val="4EC9B0"/>
+                </a:solidFill>
+                <a:effectLst/>
+                <a:latin typeface="Consolas" panose="020B0609020204030204" pitchFamily="49" charset="0"/>
+              </a:rPr>
+              <a:t>uint8_t</a:t>
+            </a:r>
+            <a:r>
+              <a:rPr lang="en-GB" sz="1400" b="0">
+                <a:solidFill>
+                  <a:srgbClr val="CCCCCC"/>
+                </a:solidFill>
+                <a:effectLst/>
+                <a:latin typeface="Consolas" panose="020B0609020204030204" pitchFamily="49" charset="0"/>
+              </a:rPr>
+              <a:t> </a:t>
+            </a:r>
+            <a:r>
+              <a:rPr lang="en-GB" sz="1400" b="0">
+                <a:solidFill>
+                  <a:srgbClr val="9CDCFE"/>
+                </a:solidFill>
+                <a:effectLst/>
+                <a:latin typeface="Consolas" panose="020B0609020204030204" pitchFamily="49" charset="0"/>
+              </a:rPr>
+              <a:t>readable</a:t>
+            </a:r>
+            <a:r>
+              <a:rPr lang="en-GB" sz="1400" b="0">
+                <a:solidFill>
+                  <a:srgbClr val="CCCCCC"/>
+                </a:solidFill>
+                <a:effectLst/>
+                <a:latin typeface="Consolas" panose="020B0609020204030204" pitchFamily="49" charset="0"/>
+              </a:rPr>
+              <a:t>;</a:t>
+            </a:r>
+            <a:r>
+              <a:rPr lang="en-GB" sz="1400" b="0">
+                <a:solidFill>
+                  <a:srgbClr val="6A9955"/>
+                </a:solidFill>
+                <a:effectLst/>
+                <a:latin typeface="Consolas" panose="020B0609020204030204" pitchFamily="49" charset="0"/>
+              </a:rPr>
+              <a:t>    // 1 = true, 0 = false</a:t>
+            </a:r>
+            <a:endParaRPr lang="en-GB" sz="1400" b="0">
+              <a:solidFill>
+                <a:srgbClr val="CCCCCC"/>
+              </a:solidFill>
+              <a:effectLst/>
+              <a:latin typeface="Consolas" panose="020B0609020204030204" pitchFamily="49" charset="0"/>
+            </a:endParaRPr>
+          </a:p>
+          <a:p>
+            <a:pPr>
+              <a:buNone/>
+            </a:pPr>
+            <a:r>
+              <a:rPr lang="en-GB" sz="1400" b="0">
+                <a:solidFill>
+                  <a:srgbClr val="CCCCCC"/>
+                </a:solidFill>
+                <a:effectLst/>
+                <a:latin typeface="Consolas" panose="020B0609020204030204" pitchFamily="49" charset="0"/>
+              </a:rPr>
+              <a:t>    </a:t>
+            </a:r>
+            <a:r>
+              <a:rPr lang="en-GB" sz="1400" b="0">
+                <a:solidFill>
+                  <a:srgbClr val="4EC9B0"/>
+                </a:solidFill>
+                <a:effectLst/>
+                <a:latin typeface="Consolas" panose="020B0609020204030204" pitchFamily="49" charset="0"/>
+              </a:rPr>
+              <a:t>uint8_t</a:t>
+            </a:r>
+            <a:r>
+              <a:rPr lang="en-GB" sz="1400" b="0">
+                <a:solidFill>
+                  <a:srgbClr val="CCCCCC"/>
+                </a:solidFill>
+                <a:effectLst/>
+                <a:latin typeface="Consolas" panose="020B0609020204030204" pitchFamily="49" charset="0"/>
+              </a:rPr>
+              <a:t> </a:t>
+            </a:r>
+            <a:r>
+              <a:rPr lang="en-GB" sz="1400" b="0">
+                <a:solidFill>
+                  <a:srgbClr val="9CDCFE"/>
+                </a:solidFill>
+                <a:effectLst/>
+                <a:latin typeface="Consolas" panose="020B0609020204030204" pitchFamily="49" charset="0"/>
+              </a:rPr>
+              <a:t>writable</a:t>
+            </a:r>
+            <a:r>
+              <a:rPr lang="en-GB" sz="1400" b="0">
+                <a:solidFill>
+                  <a:srgbClr val="CCCCCC"/>
+                </a:solidFill>
+                <a:effectLst/>
+                <a:latin typeface="Consolas" panose="020B0609020204030204" pitchFamily="49" charset="0"/>
+              </a:rPr>
+              <a:t>;</a:t>
+            </a:r>
+            <a:r>
+              <a:rPr lang="en-GB" sz="1400" b="0">
+                <a:solidFill>
+                  <a:srgbClr val="6A9955"/>
+                </a:solidFill>
+                <a:effectLst/>
+                <a:latin typeface="Consolas" panose="020B0609020204030204" pitchFamily="49" charset="0"/>
+              </a:rPr>
+              <a:t>    // 1 = true, 0 = false</a:t>
+            </a:r>
+            <a:endParaRPr lang="en-GB" sz="1400" b="0">
+              <a:solidFill>
+                <a:srgbClr val="CCCCCC"/>
+              </a:solidFill>
+              <a:effectLst/>
+              <a:latin typeface="Consolas" panose="020B0609020204030204" pitchFamily="49" charset="0"/>
+            </a:endParaRPr>
+          </a:p>
+          <a:p>
+            <a:pPr>
+              <a:buNone/>
+            </a:pPr>
+            <a:r>
+              <a:rPr lang="en-GB" sz="1400" b="0">
+                <a:solidFill>
+                  <a:srgbClr val="CCCCCC"/>
+                </a:solidFill>
+                <a:effectLst/>
+                <a:latin typeface="Consolas" panose="020B0609020204030204" pitchFamily="49" charset="0"/>
+              </a:rPr>
+              <a:t>    </a:t>
+            </a:r>
+            <a:r>
+              <a:rPr lang="en-GB" sz="1400" b="0">
+                <a:solidFill>
+                  <a:srgbClr val="4EC9B0"/>
+                </a:solidFill>
+                <a:effectLst/>
+                <a:latin typeface="Consolas" panose="020B0609020204030204" pitchFamily="49" charset="0"/>
+              </a:rPr>
+              <a:t>uint8_t</a:t>
+            </a:r>
+            <a:r>
+              <a:rPr lang="en-GB" sz="1400" b="0">
+                <a:solidFill>
+                  <a:srgbClr val="CCCCCC"/>
+                </a:solidFill>
+                <a:effectLst/>
+                <a:latin typeface="Consolas" panose="020B0609020204030204" pitchFamily="49" charset="0"/>
+              </a:rPr>
+              <a:t> </a:t>
+            </a:r>
+            <a:r>
+              <a:rPr lang="en-GB" sz="1400" b="0">
+                <a:solidFill>
+                  <a:srgbClr val="9CDCFE"/>
+                </a:solidFill>
+                <a:effectLst/>
+                <a:latin typeface="Consolas" panose="020B0609020204030204" pitchFamily="49" charset="0"/>
+              </a:rPr>
+              <a:t>executable</a:t>
+            </a:r>
+            <a:r>
+              <a:rPr lang="en-GB" sz="1400" b="0">
+                <a:solidFill>
+                  <a:srgbClr val="CCCCCC"/>
+                </a:solidFill>
+                <a:effectLst/>
+                <a:latin typeface="Consolas" panose="020B0609020204030204" pitchFamily="49" charset="0"/>
+              </a:rPr>
+              <a:t>;</a:t>
+            </a:r>
+            <a:r>
+              <a:rPr lang="en-GB" sz="1400" b="0">
+                <a:solidFill>
+                  <a:srgbClr val="6A9955"/>
+                </a:solidFill>
+                <a:effectLst/>
+                <a:latin typeface="Consolas" panose="020B0609020204030204" pitchFamily="49" charset="0"/>
+              </a:rPr>
+              <a:t>  // 1 = true, 0 = false</a:t>
+            </a:r>
+            <a:endParaRPr lang="en-GB" sz="1400" b="0">
+              <a:solidFill>
+                <a:srgbClr val="CCCCCC"/>
+              </a:solidFill>
+              <a:effectLst/>
+              <a:latin typeface="Consolas" panose="020B0609020204030204" pitchFamily="49" charset="0"/>
+            </a:endParaRPr>
+          </a:p>
+          <a:p>
+            <a:pPr>
+              <a:buNone/>
+            </a:pPr>
+            <a:r>
+              <a:rPr lang="en-GB" sz="1400" b="0">
+                <a:solidFill>
+                  <a:srgbClr val="CCCCCC"/>
+                </a:solidFill>
+                <a:effectLst/>
+                <a:latin typeface="Consolas" panose="020B0609020204030204" pitchFamily="49" charset="0"/>
+              </a:rPr>
+              <a:t>    </a:t>
+            </a:r>
+            <a:r>
+              <a:rPr lang="en-GB" sz="1400" b="0">
+                <a:solidFill>
+                  <a:srgbClr val="4EC9B0"/>
+                </a:solidFill>
+                <a:effectLst/>
+                <a:latin typeface="Consolas" panose="020B0609020204030204" pitchFamily="49" charset="0"/>
+              </a:rPr>
+              <a:t>uint8_t</a:t>
+            </a:r>
+            <a:r>
+              <a:rPr lang="en-GB" sz="1400" b="0">
+                <a:solidFill>
+                  <a:srgbClr val="CCCCCC"/>
+                </a:solidFill>
+                <a:effectLst/>
+                <a:latin typeface="Consolas" panose="020B0609020204030204" pitchFamily="49" charset="0"/>
+              </a:rPr>
+              <a:t> </a:t>
+            </a:r>
+            <a:r>
+              <a:rPr lang="en-GB" sz="1400" b="0">
+                <a:solidFill>
+                  <a:srgbClr val="9CDCFE"/>
+                </a:solidFill>
+                <a:effectLst/>
+                <a:latin typeface="Consolas" panose="020B0609020204030204" pitchFamily="49" charset="0"/>
+              </a:rPr>
+              <a:t>priority</a:t>
+            </a:r>
+            <a:r>
+              <a:rPr lang="en-GB" sz="1400" b="0">
+                <a:solidFill>
+                  <a:srgbClr val="CCCCCC"/>
+                </a:solidFill>
+                <a:effectLst/>
+                <a:latin typeface="Consolas" panose="020B0609020204030204" pitchFamily="49" charset="0"/>
+              </a:rPr>
+              <a:t>;</a:t>
+            </a:r>
+            <a:r>
+              <a:rPr lang="en-GB" sz="1400" b="0">
+                <a:solidFill>
+                  <a:srgbClr val="6A9955"/>
+                </a:solidFill>
+                <a:effectLst/>
+                <a:latin typeface="Consolas" panose="020B0609020204030204" pitchFamily="49" charset="0"/>
+              </a:rPr>
+              <a:t>    // 0-31 (0 = lowest, 31 = highest)</a:t>
+            </a:r>
+            <a:endParaRPr lang="en-GB" sz="1400" b="0">
+              <a:solidFill>
+                <a:srgbClr val="CCCCCC"/>
+              </a:solidFill>
+              <a:effectLst/>
+              <a:latin typeface="Consolas" panose="020B0609020204030204" pitchFamily="49" charset="0"/>
+            </a:endParaRPr>
+          </a:p>
+          <a:p>
+            <a:pPr>
+              <a:buNone/>
+            </a:pPr>
+            <a:r>
+              <a:rPr lang="en-GB" sz="1400" b="0">
+                <a:solidFill>
+                  <a:srgbClr val="CCCCCC"/>
+                </a:solidFill>
+                <a:effectLst/>
+                <a:latin typeface="Consolas" panose="020B0609020204030204" pitchFamily="49" charset="0"/>
+              </a:rPr>
+              <a:t>} </a:t>
+            </a:r>
+            <a:r>
+              <a:rPr lang="en-GB" sz="1400" b="0">
+                <a:solidFill>
+                  <a:srgbClr val="4EC9B0"/>
+                </a:solidFill>
+                <a:effectLst/>
+                <a:latin typeface="Consolas" panose="020B0609020204030204" pitchFamily="49" charset="0"/>
+              </a:rPr>
+              <a:t>FileInfo</a:t>
+            </a:r>
+            <a:r>
+              <a:rPr lang="en-GB" sz="1400" b="0">
+                <a:solidFill>
+                  <a:srgbClr val="CCCCCC"/>
+                </a:solidFill>
+                <a:effectLst/>
+                <a:latin typeface="Consolas" panose="020B0609020204030204" pitchFamily="49" charset="0"/>
+              </a:rPr>
+              <a:t>;</a:t>
+            </a:r>
+          </a:p>
+          <a:p>
+            <a:pPr>
+              <a:buNone/>
+            </a:pPr>
+            <a:br>
+              <a:rPr lang="en-GB" sz="1400" b="0">
+                <a:solidFill>
+                  <a:srgbClr val="CCCCCC"/>
+                </a:solidFill>
+                <a:effectLst/>
+                <a:latin typeface="Consolas" panose="020B0609020204030204" pitchFamily="49" charset="0"/>
+              </a:rPr>
+            </a:br>
+            <a:endParaRPr lang="en-GB" sz="1400" b="0">
+              <a:solidFill>
+                <a:srgbClr val="CCCCCC"/>
+              </a:solidFill>
+              <a:effectLst/>
+              <a:latin typeface="Consolas" panose="020B0609020204030204" pitchFamily="49" charset="0"/>
+            </a:endParaRPr>
+          </a:p>
+          <a:p>
+            <a:pPr>
+              <a:buNone/>
+            </a:pPr>
+            <a:r>
+              <a:rPr lang="en-GB" sz="1400" b="0">
+                <a:solidFill>
+                  <a:srgbClr val="569CD6"/>
+                </a:solidFill>
+                <a:effectLst/>
+                <a:latin typeface="Consolas" panose="020B0609020204030204" pitchFamily="49" charset="0"/>
+              </a:rPr>
+              <a:t>int</a:t>
+            </a:r>
+            <a:r>
+              <a:rPr lang="en-GB" sz="1400" b="0">
+                <a:solidFill>
+                  <a:srgbClr val="CCCCCC"/>
+                </a:solidFill>
+                <a:effectLst/>
+                <a:latin typeface="Consolas" panose="020B0609020204030204" pitchFamily="49" charset="0"/>
+              </a:rPr>
+              <a:t> </a:t>
+            </a:r>
+            <a:r>
+              <a:rPr lang="en-GB" sz="1400" b="0">
+                <a:solidFill>
+                  <a:srgbClr val="DCDCAA"/>
+                </a:solidFill>
+                <a:effectLst/>
+                <a:latin typeface="Consolas" panose="020B0609020204030204" pitchFamily="49" charset="0"/>
+              </a:rPr>
+              <a:t>main</a:t>
+            </a:r>
+            <a:r>
+              <a:rPr lang="en-GB" sz="1400" b="0">
+                <a:solidFill>
+                  <a:srgbClr val="CCCCCC"/>
+                </a:solidFill>
+                <a:effectLst/>
+                <a:latin typeface="Consolas" panose="020B0609020204030204" pitchFamily="49" charset="0"/>
+              </a:rPr>
+              <a:t>(</a:t>
+            </a:r>
+            <a:r>
+              <a:rPr lang="en-GB" sz="1400" b="0">
+                <a:solidFill>
+                  <a:srgbClr val="569CD6"/>
+                </a:solidFill>
+                <a:effectLst/>
+                <a:latin typeface="Consolas" panose="020B0609020204030204" pitchFamily="49" charset="0"/>
+              </a:rPr>
+              <a:t>void</a:t>
+            </a:r>
+            <a:r>
+              <a:rPr lang="en-GB" sz="1400" b="0">
+                <a:solidFill>
+                  <a:srgbClr val="CCCCCC"/>
+                </a:solidFill>
+                <a:effectLst/>
+                <a:latin typeface="Consolas" panose="020B0609020204030204" pitchFamily="49" charset="0"/>
+              </a:rPr>
+              <a:t>)</a:t>
+            </a:r>
+          </a:p>
+          <a:p>
+            <a:pPr>
+              <a:buNone/>
+            </a:pPr>
+            <a:r>
+              <a:rPr lang="en-GB" sz="1400" b="0">
+                <a:solidFill>
+                  <a:srgbClr val="CCCCCC"/>
+                </a:solidFill>
+                <a:effectLst/>
+                <a:latin typeface="Consolas" panose="020B0609020204030204" pitchFamily="49" charset="0"/>
+              </a:rPr>
+              <a:t>{</a:t>
+            </a:r>
+          </a:p>
+          <a:p>
+            <a:pPr>
+              <a:buNone/>
+            </a:pPr>
+            <a:r>
+              <a:rPr lang="en-GB" sz="1400" b="0">
+                <a:solidFill>
+                  <a:srgbClr val="CCCCCC"/>
+                </a:solidFill>
+                <a:effectLst/>
+                <a:latin typeface="Consolas" panose="020B0609020204030204" pitchFamily="49" charset="0"/>
+              </a:rPr>
+              <a:t>    </a:t>
+            </a:r>
+            <a:r>
+              <a:rPr lang="en-GB" sz="1400" b="0">
+                <a:solidFill>
+                  <a:srgbClr val="4EC9B0"/>
+                </a:solidFill>
+                <a:effectLst/>
+                <a:latin typeface="Consolas" panose="020B0609020204030204" pitchFamily="49" charset="0"/>
+              </a:rPr>
+              <a:t>FileInfo</a:t>
+            </a:r>
+            <a:r>
+              <a:rPr lang="en-GB" sz="1400" b="0">
+                <a:solidFill>
+                  <a:srgbClr val="CCCCCC"/>
+                </a:solidFill>
+                <a:effectLst/>
+                <a:latin typeface="Consolas" panose="020B0609020204030204" pitchFamily="49" charset="0"/>
+              </a:rPr>
+              <a:t> </a:t>
+            </a:r>
+            <a:r>
+              <a:rPr lang="en-GB" sz="1400" b="0">
+                <a:solidFill>
+                  <a:srgbClr val="9CDCFE"/>
+                </a:solidFill>
+                <a:effectLst/>
+                <a:latin typeface="Consolas" panose="020B0609020204030204" pitchFamily="49" charset="0"/>
+              </a:rPr>
+              <a:t>fileInfo</a:t>
+            </a:r>
+            <a:r>
+              <a:rPr lang="en-GB" sz="1400" b="0">
+                <a:solidFill>
+                  <a:srgbClr val="CCCCCC"/>
+                </a:solidFill>
+                <a:effectLst/>
+                <a:latin typeface="Consolas" panose="020B0609020204030204" pitchFamily="49" charset="0"/>
+              </a:rPr>
+              <a:t>;</a:t>
+            </a:r>
+          </a:p>
+          <a:p>
+            <a:pPr>
+              <a:buNone/>
+            </a:pPr>
+            <a:r>
+              <a:rPr lang="en-GB" sz="1400" b="0">
+                <a:solidFill>
+                  <a:srgbClr val="CCCCCC"/>
+                </a:solidFill>
+                <a:effectLst/>
+                <a:latin typeface="Consolas" panose="020B0609020204030204" pitchFamily="49" charset="0"/>
+              </a:rPr>
+              <a:t>    </a:t>
+            </a:r>
+            <a:r>
+              <a:rPr lang="en-GB" sz="1400" b="0">
+                <a:solidFill>
+                  <a:srgbClr val="9CDCFE"/>
+                </a:solidFill>
+                <a:effectLst/>
+                <a:latin typeface="Consolas" panose="020B0609020204030204" pitchFamily="49" charset="0"/>
+              </a:rPr>
+              <a:t>fileInfo</a:t>
+            </a:r>
+            <a:r>
+              <a:rPr lang="en-GB" sz="1400" b="0">
+                <a:solidFill>
+                  <a:srgbClr val="CCCCCC"/>
+                </a:solidFill>
+                <a:effectLst/>
+                <a:latin typeface="Consolas" panose="020B0609020204030204" pitchFamily="49" charset="0"/>
+              </a:rPr>
+              <a:t>.</a:t>
+            </a:r>
+            <a:r>
+              <a:rPr lang="en-GB" sz="1400" b="0">
+                <a:solidFill>
+                  <a:srgbClr val="9CDCFE"/>
+                </a:solidFill>
+                <a:effectLst/>
+                <a:latin typeface="Consolas" panose="020B0609020204030204" pitchFamily="49" charset="0"/>
+              </a:rPr>
+              <a:t>readable</a:t>
+            </a:r>
+            <a:r>
+              <a:rPr lang="en-GB" sz="1400" b="0">
+                <a:solidFill>
+                  <a:srgbClr val="CCCCCC"/>
+                </a:solidFill>
+                <a:effectLst/>
+                <a:latin typeface="Consolas" panose="020B0609020204030204" pitchFamily="49" charset="0"/>
+              </a:rPr>
+              <a:t> </a:t>
+            </a:r>
+            <a:r>
+              <a:rPr lang="en-GB" sz="1400" b="0">
+                <a:solidFill>
+                  <a:srgbClr val="D4D4D4"/>
+                </a:solidFill>
+                <a:effectLst/>
+                <a:latin typeface="Consolas" panose="020B0609020204030204" pitchFamily="49" charset="0"/>
+              </a:rPr>
+              <a:t>=</a:t>
+            </a:r>
+            <a:r>
+              <a:rPr lang="en-GB" sz="1400" b="0">
+                <a:solidFill>
+                  <a:srgbClr val="CCCCCC"/>
+                </a:solidFill>
+                <a:effectLst/>
+                <a:latin typeface="Consolas" panose="020B0609020204030204" pitchFamily="49" charset="0"/>
+              </a:rPr>
+              <a:t> </a:t>
+            </a:r>
+            <a:r>
+              <a:rPr lang="en-GB" sz="1400" b="0">
+                <a:solidFill>
+                  <a:srgbClr val="B5CEA8"/>
+                </a:solidFill>
+                <a:effectLst/>
+                <a:latin typeface="Consolas" panose="020B0609020204030204" pitchFamily="49" charset="0"/>
+              </a:rPr>
+              <a:t>1</a:t>
+            </a:r>
+            <a:r>
+              <a:rPr lang="en-GB" sz="1400" b="0">
+                <a:solidFill>
+                  <a:srgbClr val="CCCCCC"/>
+                </a:solidFill>
+                <a:effectLst/>
+                <a:latin typeface="Consolas" panose="020B0609020204030204" pitchFamily="49" charset="0"/>
+              </a:rPr>
+              <a:t>; </a:t>
+            </a:r>
+          </a:p>
+          <a:p>
+            <a:pPr>
+              <a:buNone/>
+            </a:pPr>
+            <a:r>
+              <a:rPr lang="en-GB" sz="1400" b="0">
+                <a:solidFill>
+                  <a:srgbClr val="CCCCCC"/>
+                </a:solidFill>
+                <a:effectLst/>
+                <a:latin typeface="Consolas" panose="020B0609020204030204" pitchFamily="49" charset="0"/>
+              </a:rPr>
+              <a:t>    </a:t>
+            </a:r>
+            <a:r>
+              <a:rPr lang="en-GB" sz="1400" b="0">
+                <a:solidFill>
+                  <a:srgbClr val="9CDCFE"/>
+                </a:solidFill>
+                <a:effectLst/>
+                <a:latin typeface="Consolas" panose="020B0609020204030204" pitchFamily="49" charset="0"/>
+              </a:rPr>
+              <a:t>fileInfo</a:t>
+            </a:r>
+            <a:r>
+              <a:rPr lang="en-GB" sz="1400" b="0">
+                <a:solidFill>
+                  <a:srgbClr val="CCCCCC"/>
+                </a:solidFill>
+                <a:effectLst/>
+                <a:latin typeface="Consolas" panose="020B0609020204030204" pitchFamily="49" charset="0"/>
+              </a:rPr>
+              <a:t>.</a:t>
+            </a:r>
+            <a:r>
+              <a:rPr lang="en-GB" sz="1400" b="0">
+                <a:solidFill>
+                  <a:srgbClr val="9CDCFE"/>
+                </a:solidFill>
+                <a:effectLst/>
+                <a:latin typeface="Consolas" panose="020B0609020204030204" pitchFamily="49" charset="0"/>
+              </a:rPr>
+              <a:t>writable</a:t>
+            </a:r>
+            <a:r>
+              <a:rPr lang="en-GB" sz="1400" b="0">
+                <a:solidFill>
+                  <a:srgbClr val="CCCCCC"/>
+                </a:solidFill>
+                <a:effectLst/>
+                <a:latin typeface="Consolas" panose="020B0609020204030204" pitchFamily="49" charset="0"/>
+              </a:rPr>
+              <a:t> </a:t>
+            </a:r>
+            <a:r>
+              <a:rPr lang="en-GB" sz="1400" b="0">
+                <a:solidFill>
+                  <a:srgbClr val="D4D4D4"/>
+                </a:solidFill>
+                <a:effectLst/>
+                <a:latin typeface="Consolas" panose="020B0609020204030204" pitchFamily="49" charset="0"/>
+              </a:rPr>
+              <a:t>=</a:t>
+            </a:r>
+            <a:r>
+              <a:rPr lang="en-GB" sz="1400" b="0">
+                <a:solidFill>
+                  <a:srgbClr val="CCCCCC"/>
+                </a:solidFill>
+                <a:effectLst/>
+                <a:latin typeface="Consolas" panose="020B0609020204030204" pitchFamily="49" charset="0"/>
+              </a:rPr>
+              <a:t> </a:t>
+            </a:r>
+            <a:r>
+              <a:rPr lang="en-GB" sz="1400" b="0">
+                <a:solidFill>
+                  <a:srgbClr val="B5CEA8"/>
+                </a:solidFill>
+                <a:effectLst/>
+                <a:latin typeface="Consolas" panose="020B0609020204030204" pitchFamily="49" charset="0"/>
+              </a:rPr>
+              <a:t>0</a:t>
+            </a:r>
+            <a:r>
+              <a:rPr lang="en-GB" sz="1400" b="0">
+                <a:solidFill>
+                  <a:srgbClr val="CCCCCC"/>
+                </a:solidFill>
+                <a:effectLst/>
+                <a:latin typeface="Consolas" panose="020B0609020204030204" pitchFamily="49" charset="0"/>
+              </a:rPr>
+              <a:t>;</a:t>
+            </a:r>
+          </a:p>
+          <a:p>
+            <a:pPr>
+              <a:buNone/>
+            </a:pPr>
+            <a:r>
+              <a:rPr lang="en-GB" sz="1400" b="0">
+                <a:solidFill>
+                  <a:srgbClr val="CCCCCC"/>
+                </a:solidFill>
+                <a:effectLst/>
+                <a:latin typeface="Consolas" panose="020B0609020204030204" pitchFamily="49" charset="0"/>
+              </a:rPr>
+              <a:t>    </a:t>
+            </a:r>
+            <a:r>
+              <a:rPr lang="en-GB" sz="1400" b="0">
+                <a:solidFill>
+                  <a:srgbClr val="9CDCFE"/>
+                </a:solidFill>
+                <a:effectLst/>
+                <a:latin typeface="Consolas" panose="020B0609020204030204" pitchFamily="49" charset="0"/>
+              </a:rPr>
+              <a:t>fileInfo</a:t>
+            </a:r>
+            <a:r>
+              <a:rPr lang="en-GB" sz="1400" b="0">
+                <a:solidFill>
+                  <a:srgbClr val="CCCCCC"/>
+                </a:solidFill>
+                <a:effectLst/>
+                <a:latin typeface="Consolas" panose="020B0609020204030204" pitchFamily="49" charset="0"/>
+              </a:rPr>
+              <a:t>.</a:t>
+            </a:r>
+            <a:r>
+              <a:rPr lang="en-GB" sz="1400" b="0">
+                <a:solidFill>
+                  <a:srgbClr val="9CDCFE"/>
+                </a:solidFill>
+                <a:effectLst/>
+                <a:latin typeface="Consolas" panose="020B0609020204030204" pitchFamily="49" charset="0"/>
+              </a:rPr>
+              <a:t>executable</a:t>
+            </a:r>
+            <a:r>
+              <a:rPr lang="en-GB" sz="1400" b="0">
+                <a:solidFill>
+                  <a:srgbClr val="CCCCCC"/>
+                </a:solidFill>
+                <a:effectLst/>
+                <a:latin typeface="Consolas" panose="020B0609020204030204" pitchFamily="49" charset="0"/>
+              </a:rPr>
+              <a:t> </a:t>
+            </a:r>
+            <a:r>
+              <a:rPr lang="en-GB" sz="1400" b="0">
+                <a:solidFill>
+                  <a:srgbClr val="D4D4D4"/>
+                </a:solidFill>
+                <a:effectLst/>
+                <a:latin typeface="Consolas" panose="020B0609020204030204" pitchFamily="49" charset="0"/>
+              </a:rPr>
+              <a:t>=</a:t>
+            </a:r>
+            <a:r>
+              <a:rPr lang="en-GB" sz="1400" b="0">
+                <a:solidFill>
+                  <a:srgbClr val="CCCCCC"/>
+                </a:solidFill>
+                <a:effectLst/>
+                <a:latin typeface="Consolas" panose="020B0609020204030204" pitchFamily="49" charset="0"/>
+              </a:rPr>
+              <a:t> </a:t>
+            </a:r>
+            <a:r>
+              <a:rPr lang="en-GB" sz="1400" b="0">
+                <a:solidFill>
+                  <a:srgbClr val="B5CEA8"/>
+                </a:solidFill>
+                <a:effectLst/>
+                <a:latin typeface="Consolas" panose="020B0609020204030204" pitchFamily="49" charset="0"/>
+              </a:rPr>
+              <a:t>1</a:t>
+            </a:r>
+            <a:r>
+              <a:rPr lang="en-GB" sz="1400" b="0">
+                <a:solidFill>
+                  <a:srgbClr val="CCCCCC"/>
+                </a:solidFill>
+                <a:effectLst/>
+                <a:latin typeface="Consolas" panose="020B0609020204030204" pitchFamily="49" charset="0"/>
+              </a:rPr>
+              <a:t>;</a:t>
+            </a:r>
+          </a:p>
+          <a:p>
+            <a:pPr>
+              <a:buNone/>
+            </a:pPr>
+            <a:r>
+              <a:rPr lang="en-GB" sz="1400" b="0">
+                <a:solidFill>
+                  <a:srgbClr val="CCCCCC"/>
+                </a:solidFill>
+                <a:effectLst/>
+                <a:latin typeface="Consolas" panose="020B0609020204030204" pitchFamily="49" charset="0"/>
+              </a:rPr>
+              <a:t>    </a:t>
+            </a:r>
+            <a:r>
+              <a:rPr lang="en-GB" sz="1400" b="0">
+                <a:solidFill>
+                  <a:srgbClr val="9CDCFE"/>
+                </a:solidFill>
+                <a:effectLst/>
+                <a:latin typeface="Consolas" panose="020B0609020204030204" pitchFamily="49" charset="0"/>
+              </a:rPr>
+              <a:t>fileInfo</a:t>
+            </a:r>
+            <a:r>
+              <a:rPr lang="en-GB" sz="1400" b="0">
+                <a:solidFill>
+                  <a:srgbClr val="CCCCCC"/>
+                </a:solidFill>
+                <a:effectLst/>
+                <a:latin typeface="Consolas" panose="020B0609020204030204" pitchFamily="49" charset="0"/>
+              </a:rPr>
+              <a:t>.</a:t>
+            </a:r>
+            <a:r>
+              <a:rPr lang="en-GB" sz="1400" b="0">
+                <a:solidFill>
+                  <a:srgbClr val="9CDCFE"/>
+                </a:solidFill>
+                <a:effectLst/>
+                <a:latin typeface="Consolas" panose="020B0609020204030204" pitchFamily="49" charset="0"/>
+              </a:rPr>
+              <a:t>priority</a:t>
+            </a:r>
+            <a:r>
+              <a:rPr lang="en-GB" sz="1400" b="0">
+                <a:solidFill>
+                  <a:srgbClr val="CCCCCC"/>
+                </a:solidFill>
+                <a:effectLst/>
+                <a:latin typeface="Consolas" panose="020B0609020204030204" pitchFamily="49" charset="0"/>
+              </a:rPr>
+              <a:t> </a:t>
+            </a:r>
+            <a:r>
+              <a:rPr lang="en-GB" sz="1400" b="0">
+                <a:solidFill>
+                  <a:srgbClr val="D4D4D4"/>
+                </a:solidFill>
+                <a:effectLst/>
+                <a:latin typeface="Consolas" panose="020B0609020204030204" pitchFamily="49" charset="0"/>
+              </a:rPr>
+              <a:t>=</a:t>
+            </a:r>
+            <a:r>
+              <a:rPr lang="en-GB" sz="1400" b="0">
+                <a:solidFill>
+                  <a:srgbClr val="CCCCCC"/>
+                </a:solidFill>
+                <a:effectLst/>
+                <a:latin typeface="Consolas" panose="020B0609020204030204" pitchFamily="49" charset="0"/>
+              </a:rPr>
+              <a:t> </a:t>
+            </a:r>
+            <a:r>
+              <a:rPr lang="en-GB" sz="1400" b="0">
+                <a:solidFill>
+                  <a:srgbClr val="B5CEA8"/>
+                </a:solidFill>
+                <a:effectLst/>
+                <a:latin typeface="Consolas" panose="020B0609020204030204" pitchFamily="49" charset="0"/>
+              </a:rPr>
+              <a:t>5</a:t>
+            </a:r>
+            <a:r>
+              <a:rPr lang="en-GB" sz="1400" b="0">
+                <a:solidFill>
+                  <a:srgbClr val="CCCCCC"/>
+                </a:solidFill>
+                <a:effectLst/>
+                <a:latin typeface="Consolas" panose="020B0609020204030204" pitchFamily="49" charset="0"/>
+              </a:rPr>
+              <a:t>;</a:t>
+            </a:r>
+          </a:p>
+          <a:p>
+            <a:pPr>
+              <a:buNone/>
+            </a:pPr>
+            <a:r>
+              <a:rPr lang="en-GB" sz="1400" b="0">
+                <a:solidFill>
+                  <a:srgbClr val="CCCCCC"/>
+                </a:solidFill>
+                <a:effectLst/>
+                <a:latin typeface="Consolas" panose="020B0609020204030204" pitchFamily="49" charset="0"/>
+              </a:rPr>
+              <a:t>}</a:t>
+            </a:r>
+          </a:p>
+        </p:txBody>
+      </p:sp>
+      <p:sp>
+        <p:nvSpPr>
+          <p:cNvPr id="7" name="TextBox 6">
+            <a:extLst>
+              <a:ext uri="{FF2B5EF4-FFF2-40B4-BE49-F238E27FC236}">
+                <a16:creationId xmlns:a16="http://schemas.microsoft.com/office/drawing/2014/main" id="{7A77FA1B-7CF5-1DB3-2F63-54829369604F}"/>
+              </a:ext>
+            </a:extLst>
+          </p:cNvPr>
+          <p:cNvSpPr txBox="1"/>
+          <p:nvPr/>
+        </p:nvSpPr>
+        <p:spPr>
+          <a:xfrm>
+            <a:off x="3305286" y="3170916"/>
+            <a:ext cx="6096896" cy="3539430"/>
+          </a:xfrm>
+          <a:prstGeom prst="rect">
+            <a:avLst/>
+          </a:prstGeom>
+          <a:solidFill>
+            <a:schemeClr val="tx1">
+              <a:lumMod val="85000"/>
+              <a:lumOff val="15000"/>
+            </a:schemeClr>
+          </a:solidFill>
+          <a:ln>
+            <a:solidFill>
+              <a:schemeClr val="bg1"/>
+            </a:solidFill>
+          </a:ln>
+        </p:spPr>
+        <p:txBody>
+          <a:bodyPr wrap="square">
+            <a:spAutoFit/>
+          </a:bodyPr>
+          <a:lstStyle/>
+          <a:p>
+            <a:pPr>
+              <a:buNone/>
+            </a:pPr>
+            <a:r>
+              <a:rPr lang="en-GB" sz="1400" b="0">
+                <a:solidFill>
+                  <a:srgbClr val="569CD6"/>
+                </a:solidFill>
+                <a:effectLst/>
+                <a:latin typeface="Consolas" panose="020B0609020204030204" pitchFamily="49" charset="0"/>
+              </a:rPr>
+              <a:t>typedef</a:t>
+            </a:r>
+            <a:r>
+              <a:rPr lang="en-GB" sz="1400" b="0">
+                <a:solidFill>
+                  <a:srgbClr val="CCCCCC"/>
+                </a:solidFill>
+                <a:effectLst/>
+                <a:latin typeface="Consolas" panose="020B0609020204030204" pitchFamily="49" charset="0"/>
+              </a:rPr>
+              <a:t> </a:t>
+            </a:r>
+            <a:r>
+              <a:rPr lang="en-GB" sz="1400" b="0">
+                <a:solidFill>
+                  <a:srgbClr val="4EC9B0"/>
+                </a:solidFill>
+                <a:effectLst/>
+                <a:latin typeface="Consolas" panose="020B0609020204030204" pitchFamily="49" charset="0"/>
+              </a:rPr>
+              <a:t>uint8_t</a:t>
+            </a:r>
+            <a:r>
+              <a:rPr lang="en-GB" sz="1400" b="0">
+                <a:solidFill>
+                  <a:srgbClr val="CCCCCC"/>
+                </a:solidFill>
+                <a:effectLst/>
+                <a:latin typeface="Consolas" panose="020B0609020204030204" pitchFamily="49" charset="0"/>
+              </a:rPr>
+              <a:t> </a:t>
+            </a:r>
+            <a:r>
+              <a:rPr lang="en-GB" sz="1400" b="0">
+                <a:solidFill>
+                  <a:srgbClr val="4EC9B0"/>
+                </a:solidFill>
+                <a:effectLst/>
+                <a:latin typeface="Consolas" panose="020B0609020204030204" pitchFamily="49" charset="0"/>
+              </a:rPr>
+              <a:t>FileInfo</a:t>
+            </a:r>
+            <a:r>
+              <a:rPr lang="en-GB" sz="1400" b="0">
+                <a:solidFill>
+                  <a:srgbClr val="CCCCCC"/>
+                </a:solidFill>
+                <a:effectLst/>
+                <a:latin typeface="Consolas" panose="020B0609020204030204" pitchFamily="49" charset="0"/>
+              </a:rPr>
+              <a:t>; </a:t>
+            </a:r>
+          </a:p>
+          <a:p>
+            <a:pPr>
+              <a:buNone/>
+            </a:pPr>
+            <a:r>
+              <a:rPr lang="en-GB" sz="1400" b="0">
+                <a:solidFill>
+                  <a:srgbClr val="C586C0"/>
+                </a:solidFill>
+                <a:effectLst/>
+                <a:latin typeface="Consolas" panose="020B0609020204030204" pitchFamily="49" charset="0"/>
+              </a:rPr>
+              <a:t>#define</a:t>
+            </a:r>
+            <a:r>
+              <a:rPr lang="en-GB" sz="1400" b="0">
+                <a:solidFill>
+                  <a:srgbClr val="569CD6"/>
+                </a:solidFill>
+                <a:effectLst/>
+                <a:latin typeface="Consolas" panose="020B0609020204030204" pitchFamily="49" charset="0"/>
+              </a:rPr>
+              <a:t> FILE_READABLE </a:t>
+            </a:r>
+            <a:r>
+              <a:rPr lang="en-GB" sz="1400" b="0">
+                <a:solidFill>
+                  <a:srgbClr val="B5CEA8"/>
+                </a:solidFill>
+                <a:effectLst/>
+                <a:latin typeface="Consolas" panose="020B0609020204030204" pitchFamily="49" charset="0"/>
+              </a:rPr>
+              <a:t>0x01</a:t>
+            </a:r>
+            <a:endParaRPr lang="en-GB" sz="1400" b="0">
+              <a:solidFill>
+                <a:srgbClr val="CCCCCC"/>
+              </a:solidFill>
+              <a:effectLst/>
+              <a:latin typeface="Consolas" panose="020B0609020204030204" pitchFamily="49" charset="0"/>
+            </a:endParaRPr>
+          </a:p>
+          <a:p>
+            <a:pPr>
+              <a:buNone/>
+            </a:pPr>
+            <a:r>
+              <a:rPr lang="en-GB" sz="1400" b="0">
+                <a:solidFill>
+                  <a:srgbClr val="C586C0"/>
+                </a:solidFill>
+                <a:effectLst/>
+                <a:latin typeface="Consolas" panose="020B0609020204030204" pitchFamily="49" charset="0"/>
+              </a:rPr>
+              <a:t>#define</a:t>
+            </a:r>
+            <a:r>
+              <a:rPr lang="en-GB" sz="1400" b="0">
+                <a:solidFill>
+                  <a:srgbClr val="569CD6"/>
+                </a:solidFill>
+                <a:effectLst/>
+                <a:latin typeface="Consolas" panose="020B0609020204030204" pitchFamily="49" charset="0"/>
+              </a:rPr>
+              <a:t> FILE_WRITABLE </a:t>
+            </a:r>
+            <a:r>
+              <a:rPr lang="en-GB" sz="1400" b="0">
+                <a:solidFill>
+                  <a:srgbClr val="B5CEA8"/>
+                </a:solidFill>
+                <a:effectLst/>
+                <a:latin typeface="Consolas" panose="020B0609020204030204" pitchFamily="49" charset="0"/>
+              </a:rPr>
+              <a:t>0x02</a:t>
+            </a:r>
+            <a:endParaRPr lang="en-GB" sz="1400" b="0">
+              <a:solidFill>
+                <a:srgbClr val="CCCCCC"/>
+              </a:solidFill>
+              <a:effectLst/>
+              <a:latin typeface="Consolas" panose="020B0609020204030204" pitchFamily="49" charset="0"/>
+            </a:endParaRPr>
+          </a:p>
+          <a:p>
+            <a:pPr>
+              <a:buNone/>
+            </a:pPr>
+            <a:r>
+              <a:rPr lang="en-GB" sz="1400" b="0">
+                <a:solidFill>
+                  <a:srgbClr val="C586C0"/>
+                </a:solidFill>
+                <a:effectLst/>
+                <a:latin typeface="Consolas" panose="020B0609020204030204" pitchFamily="49" charset="0"/>
+              </a:rPr>
+              <a:t>#define</a:t>
+            </a:r>
+            <a:r>
+              <a:rPr lang="en-GB" sz="1400" b="0">
+                <a:solidFill>
+                  <a:srgbClr val="569CD6"/>
+                </a:solidFill>
+                <a:effectLst/>
+                <a:latin typeface="Consolas" panose="020B0609020204030204" pitchFamily="49" charset="0"/>
+              </a:rPr>
+              <a:t> FILE_EXECUTABLE </a:t>
+            </a:r>
+            <a:r>
+              <a:rPr lang="en-GB" sz="1400" b="0">
+                <a:solidFill>
+                  <a:srgbClr val="B5CEA8"/>
+                </a:solidFill>
+                <a:effectLst/>
+                <a:latin typeface="Consolas" panose="020B0609020204030204" pitchFamily="49" charset="0"/>
+              </a:rPr>
+              <a:t>0x04</a:t>
+            </a:r>
+            <a:endParaRPr lang="en-GB" sz="1400" b="0">
+              <a:solidFill>
+                <a:srgbClr val="CCCCCC"/>
+              </a:solidFill>
+              <a:effectLst/>
+              <a:latin typeface="Consolas" panose="020B0609020204030204" pitchFamily="49" charset="0"/>
+            </a:endParaRPr>
+          </a:p>
+          <a:p>
+            <a:pPr>
+              <a:buNone/>
+            </a:pPr>
+            <a:r>
+              <a:rPr lang="en-GB" sz="1400" b="0">
+                <a:solidFill>
+                  <a:srgbClr val="C586C0"/>
+                </a:solidFill>
+                <a:effectLst/>
+                <a:latin typeface="Consolas" panose="020B0609020204030204" pitchFamily="49" charset="0"/>
+              </a:rPr>
+              <a:t>#define</a:t>
+            </a:r>
+            <a:r>
+              <a:rPr lang="en-GB" sz="1400" b="0">
+                <a:solidFill>
+                  <a:srgbClr val="569CD6"/>
+                </a:solidFill>
+                <a:effectLst/>
+                <a:latin typeface="Consolas" panose="020B0609020204030204" pitchFamily="49" charset="0"/>
+              </a:rPr>
+              <a:t> FILE_PRIORITY_MASK </a:t>
+            </a:r>
+            <a:r>
+              <a:rPr lang="en-GB" sz="1400" b="0">
+                <a:solidFill>
+                  <a:srgbClr val="B5CEA8"/>
+                </a:solidFill>
+                <a:effectLst/>
+                <a:latin typeface="Consolas" panose="020B0609020204030204" pitchFamily="49" charset="0"/>
+              </a:rPr>
+              <a:t>0xF8</a:t>
+            </a:r>
+            <a:endParaRPr lang="en-GB" sz="1400" b="0">
+              <a:solidFill>
+                <a:srgbClr val="CCCCCC"/>
+              </a:solidFill>
+              <a:effectLst/>
+              <a:latin typeface="Consolas" panose="020B0609020204030204" pitchFamily="49" charset="0"/>
+            </a:endParaRPr>
+          </a:p>
+          <a:p>
+            <a:pPr>
+              <a:buNone/>
+            </a:pPr>
+            <a:br>
+              <a:rPr lang="en-GB" sz="1400" b="0">
+                <a:solidFill>
+                  <a:srgbClr val="CCCCCC"/>
+                </a:solidFill>
+                <a:effectLst/>
+                <a:latin typeface="Consolas" panose="020B0609020204030204" pitchFamily="49" charset="0"/>
+              </a:rPr>
+            </a:br>
+            <a:endParaRPr lang="en-GB" sz="1400" b="0">
+              <a:solidFill>
+                <a:srgbClr val="CCCCCC"/>
+              </a:solidFill>
+              <a:effectLst/>
+              <a:latin typeface="Consolas" panose="020B0609020204030204" pitchFamily="49" charset="0"/>
+            </a:endParaRPr>
+          </a:p>
+          <a:p>
+            <a:pPr>
+              <a:buNone/>
+            </a:pPr>
+            <a:r>
+              <a:rPr lang="en-GB" sz="1400" b="0">
+                <a:solidFill>
+                  <a:srgbClr val="569CD6"/>
+                </a:solidFill>
+                <a:effectLst/>
+                <a:latin typeface="Consolas" panose="020B0609020204030204" pitchFamily="49" charset="0"/>
+              </a:rPr>
+              <a:t>int</a:t>
+            </a:r>
+            <a:r>
+              <a:rPr lang="en-GB" sz="1400" b="0">
+                <a:solidFill>
+                  <a:srgbClr val="CCCCCC"/>
+                </a:solidFill>
+                <a:effectLst/>
+                <a:latin typeface="Consolas" panose="020B0609020204030204" pitchFamily="49" charset="0"/>
+              </a:rPr>
+              <a:t> </a:t>
+            </a:r>
+            <a:r>
+              <a:rPr lang="en-GB" sz="1400" b="0">
+                <a:solidFill>
+                  <a:srgbClr val="DCDCAA"/>
+                </a:solidFill>
+                <a:effectLst/>
+                <a:latin typeface="Consolas" panose="020B0609020204030204" pitchFamily="49" charset="0"/>
+              </a:rPr>
+              <a:t>main</a:t>
+            </a:r>
+            <a:r>
+              <a:rPr lang="en-GB" sz="1400" b="0">
+                <a:solidFill>
+                  <a:srgbClr val="CCCCCC"/>
+                </a:solidFill>
+                <a:effectLst/>
+                <a:latin typeface="Consolas" panose="020B0609020204030204" pitchFamily="49" charset="0"/>
+              </a:rPr>
+              <a:t>(</a:t>
+            </a:r>
+            <a:r>
+              <a:rPr lang="en-GB" sz="1400" b="0">
+                <a:solidFill>
+                  <a:srgbClr val="569CD6"/>
+                </a:solidFill>
+                <a:effectLst/>
+                <a:latin typeface="Consolas" panose="020B0609020204030204" pitchFamily="49" charset="0"/>
+              </a:rPr>
+              <a:t>void</a:t>
+            </a:r>
+            <a:r>
+              <a:rPr lang="en-GB" sz="1400" b="0">
+                <a:solidFill>
+                  <a:srgbClr val="CCCCCC"/>
+                </a:solidFill>
+                <a:effectLst/>
+                <a:latin typeface="Consolas" panose="020B0609020204030204" pitchFamily="49" charset="0"/>
+              </a:rPr>
+              <a:t>)</a:t>
+            </a:r>
+          </a:p>
+          <a:p>
+            <a:pPr>
+              <a:buNone/>
+            </a:pPr>
+            <a:r>
+              <a:rPr lang="en-GB" sz="1400" b="0">
+                <a:solidFill>
+                  <a:srgbClr val="CCCCCC"/>
+                </a:solidFill>
+                <a:effectLst/>
+                <a:latin typeface="Consolas" panose="020B0609020204030204" pitchFamily="49" charset="0"/>
+              </a:rPr>
+              <a:t>{</a:t>
+            </a:r>
+          </a:p>
+          <a:p>
+            <a:pPr>
+              <a:buNone/>
+            </a:pPr>
+            <a:r>
+              <a:rPr lang="en-GB" sz="1400" b="0">
+                <a:solidFill>
+                  <a:srgbClr val="CCCCCC"/>
+                </a:solidFill>
+                <a:effectLst/>
+                <a:latin typeface="Consolas" panose="020B0609020204030204" pitchFamily="49" charset="0"/>
+              </a:rPr>
+              <a:t>    </a:t>
+            </a:r>
+            <a:r>
+              <a:rPr lang="en-GB" sz="1400" b="0">
+                <a:solidFill>
+                  <a:srgbClr val="4EC9B0"/>
+                </a:solidFill>
+                <a:effectLst/>
+                <a:latin typeface="Consolas" panose="020B0609020204030204" pitchFamily="49" charset="0"/>
+              </a:rPr>
+              <a:t>FileInfo</a:t>
+            </a:r>
+            <a:r>
+              <a:rPr lang="en-GB" sz="1400" b="0">
+                <a:solidFill>
+                  <a:srgbClr val="CCCCCC"/>
+                </a:solidFill>
+                <a:effectLst/>
+                <a:latin typeface="Consolas" panose="020B0609020204030204" pitchFamily="49" charset="0"/>
+              </a:rPr>
+              <a:t> </a:t>
+            </a:r>
+            <a:r>
+              <a:rPr lang="en-GB" sz="1400" b="0">
+                <a:solidFill>
+                  <a:srgbClr val="9CDCFE"/>
+                </a:solidFill>
+                <a:effectLst/>
+                <a:latin typeface="Consolas" panose="020B0609020204030204" pitchFamily="49" charset="0"/>
+              </a:rPr>
+              <a:t>fileInfo</a:t>
+            </a:r>
+            <a:r>
+              <a:rPr lang="en-GB" sz="1400" b="0">
+                <a:solidFill>
+                  <a:srgbClr val="CCCCCC"/>
+                </a:solidFill>
+                <a:effectLst/>
+                <a:latin typeface="Consolas" panose="020B0609020204030204" pitchFamily="49" charset="0"/>
+              </a:rPr>
+              <a:t>;</a:t>
+            </a:r>
+          </a:p>
+          <a:p>
+            <a:pPr>
+              <a:buNone/>
+            </a:pPr>
+            <a:r>
+              <a:rPr lang="en-GB" sz="1400" b="0">
+                <a:solidFill>
+                  <a:srgbClr val="CCCCCC"/>
+                </a:solidFill>
+                <a:effectLst/>
+                <a:latin typeface="Consolas" panose="020B0609020204030204" pitchFamily="49" charset="0"/>
+              </a:rPr>
+              <a:t>    </a:t>
+            </a:r>
+            <a:r>
+              <a:rPr lang="en-GB" sz="1400" b="0">
+                <a:solidFill>
+                  <a:srgbClr val="9CDCFE"/>
+                </a:solidFill>
+                <a:effectLst/>
+                <a:latin typeface="Consolas" panose="020B0609020204030204" pitchFamily="49" charset="0"/>
+              </a:rPr>
+              <a:t>fileInfo</a:t>
+            </a:r>
+            <a:r>
+              <a:rPr lang="en-GB" sz="1400" b="0">
+                <a:solidFill>
+                  <a:srgbClr val="CCCCCC"/>
+                </a:solidFill>
+                <a:effectLst/>
+                <a:latin typeface="Consolas" panose="020B0609020204030204" pitchFamily="49" charset="0"/>
+              </a:rPr>
+              <a:t> </a:t>
+            </a:r>
+            <a:r>
+              <a:rPr lang="en-GB" sz="1400" b="0">
+                <a:solidFill>
+                  <a:srgbClr val="D4D4D4"/>
+                </a:solidFill>
+                <a:effectLst/>
+                <a:latin typeface="Consolas" panose="020B0609020204030204" pitchFamily="49" charset="0"/>
+              </a:rPr>
+              <a:t>|=</a:t>
+            </a:r>
+            <a:r>
+              <a:rPr lang="en-GB" sz="1400" b="0">
+                <a:solidFill>
+                  <a:srgbClr val="CCCCCC"/>
+                </a:solidFill>
+                <a:effectLst/>
+                <a:latin typeface="Consolas" panose="020B0609020204030204" pitchFamily="49" charset="0"/>
+              </a:rPr>
+              <a:t> </a:t>
+            </a:r>
+            <a:r>
+              <a:rPr lang="en-GB" sz="1400" b="0">
+                <a:solidFill>
+                  <a:srgbClr val="569CD6"/>
+                </a:solidFill>
+                <a:effectLst/>
+                <a:latin typeface="Consolas" panose="020B0609020204030204" pitchFamily="49" charset="0"/>
+              </a:rPr>
+              <a:t>FILE_READABLE</a:t>
+            </a:r>
+            <a:r>
+              <a:rPr lang="en-GB" sz="1400" b="0">
+                <a:solidFill>
+                  <a:srgbClr val="CCCCCC"/>
+                </a:solidFill>
+                <a:effectLst/>
+                <a:latin typeface="Consolas" panose="020B0609020204030204" pitchFamily="49" charset="0"/>
+              </a:rPr>
+              <a:t>; </a:t>
+            </a:r>
+          </a:p>
+          <a:p>
+            <a:pPr>
+              <a:buNone/>
+            </a:pPr>
+            <a:r>
+              <a:rPr lang="en-GB" sz="1400" b="0">
+                <a:solidFill>
+                  <a:srgbClr val="CCCCCC"/>
+                </a:solidFill>
+                <a:effectLst/>
+                <a:latin typeface="Consolas" panose="020B0609020204030204" pitchFamily="49" charset="0"/>
+              </a:rPr>
+              <a:t>    </a:t>
+            </a:r>
+            <a:r>
+              <a:rPr lang="en-GB" sz="1400" b="0">
+                <a:solidFill>
+                  <a:srgbClr val="9CDCFE"/>
+                </a:solidFill>
+                <a:effectLst/>
+                <a:latin typeface="Consolas" panose="020B0609020204030204" pitchFamily="49" charset="0"/>
+              </a:rPr>
+              <a:t>fileInfo</a:t>
+            </a:r>
+            <a:r>
+              <a:rPr lang="en-GB" sz="1400" b="0">
+                <a:solidFill>
+                  <a:srgbClr val="CCCCCC"/>
+                </a:solidFill>
+                <a:effectLst/>
+                <a:latin typeface="Consolas" panose="020B0609020204030204" pitchFamily="49" charset="0"/>
+              </a:rPr>
+              <a:t> </a:t>
+            </a:r>
+            <a:r>
+              <a:rPr lang="en-GB" sz="1400" b="0">
+                <a:solidFill>
+                  <a:srgbClr val="D4D4D4"/>
+                </a:solidFill>
+                <a:effectLst/>
+                <a:latin typeface="Consolas" panose="020B0609020204030204" pitchFamily="49" charset="0"/>
+              </a:rPr>
+              <a:t>&amp;=</a:t>
+            </a:r>
+            <a:r>
+              <a:rPr lang="en-GB" sz="1400" b="0">
+                <a:solidFill>
+                  <a:srgbClr val="CCCCCC"/>
+                </a:solidFill>
+                <a:effectLst/>
+                <a:latin typeface="Consolas" panose="020B0609020204030204" pitchFamily="49" charset="0"/>
+              </a:rPr>
+              <a:t> </a:t>
+            </a:r>
+            <a:r>
+              <a:rPr lang="en-GB" sz="1400" b="0">
+                <a:solidFill>
+                  <a:srgbClr val="D4D4D4"/>
+                </a:solidFill>
+                <a:effectLst/>
+                <a:latin typeface="Consolas" panose="020B0609020204030204" pitchFamily="49" charset="0"/>
+              </a:rPr>
+              <a:t>~</a:t>
+            </a:r>
+            <a:r>
+              <a:rPr lang="en-GB" sz="1400" b="0">
+                <a:solidFill>
+                  <a:srgbClr val="569CD6"/>
+                </a:solidFill>
+                <a:effectLst/>
+                <a:latin typeface="Consolas" panose="020B0609020204030204" pitchFamily="49" charset="0"/>
+              </a:rPr>
+              <a:t>FILE_WRITABLE</a:t>
+            </a:r>
+            <a:r>
+              <a:rPr lang="en-GB" sz="1400" b="0">
+                <a:solidFill>
+                  <a:srgbClr val="CCCCCC"/>
+                </a:solidFill>
+                <a:effectLst/>
+                <a:latin typeface="Consolas" panose="020B0609020204030204" pitchFamily="49" charset="0"/>
+              </a:rPr>
+              <a:t>;</a:t>
+            </a:r>
+          </a:p>
+          <a:p>
+            <a:pPr>
+              <a:buNone/>
+            </a:pPr>
+            <a:r>
+              <a:rPr lang="en-GB" sz="1400" b="0">
+                <a:solidFill>
+                  <a:srgbClr val="CCCCCC"/>
+                </a:solidFill>
+                <a:effectLst/>
+                <a:latin typeface="Consolas" panose="020B0609020204030204" pitchFamily="49" charset="0"/>
+              </a:rPr>
+              <a:t>    </a:t>
+            </a:r>
+            <a:r>
+              <a:rPr lang="en-GB" sz="1400" b="0">
+                <a:solidFill>
+                  <a:srgbClr val="9CDCFE"/>
+                </a:solidFill>
+                <a:effectLst/>
+                <a:latin typeface="Consolas" panose="020B0609020204030204" pitchFamily="49" charset="0"/>
+              </a:rPr>
+              <a:t>fileInfo</a:t>
+            </a:r>
+            <a:r>
+              <a:rPr lang="en-GB" sz="1400" b="0">
+                <a:solidFill>
+                  <a:srgbClr val="CCCCCC"/>
+                </a:solidFill>
+                <a:effectLst/>
+                <a:latin typeface="Consolas" panose="020B0609020204030204" pitchFamily="49" charset="0"/>
+              </a:rPr>
+              <a:t> </a:t>
+            </a:r>
+            <a:r>
+              <a:rPr lang="en-GB" sz="1400" b="0">
+                <a:solidFill>
+                  <a:srgbClr val="D4D4D4"/>
+                </a:solidFill>
+                <a:effectLst/>
+                <a:latin typeface="Consolas" panose="020B0609020204030204" pitchFamily="49" charset="0"/>
+              </a:rPr>
+              <a:t>|=</a:t>
+            </a:r>
+            <a:r>
+              <a:rPr lang="en-GB" sz="1400" b="0">
+                <a:solidFill>
+                  <a:srgbClr val="CCCCCC"/>
+                </a:solidFill>
+                <a:effectLst/>
+                <a:latin typeface="Consolas" panose="020B0609020204030204" pitchFamily="49" charset="0"/>
+              </a:rPr>
+              <a:t> </a:t>
+            </a:r>
+            <a:r>
+              <a:rPr lang="en-GB" sz="1400" b="0">
+                <a:solidFill>
+                  <a:srgbClr val="569CD6"/>
+                </a:solidFill>
+                <a:effectLst/>
+                <a:latin typeface="Consolas" panose="020B0609020204030204" pitchFamily="49" charset="0"/>
+              </a:rPr>
+              <a:t>FILE_EXECUTABLE</a:t>
+            </a:r>
+            <a:r>
+              <a:rPr lang="en-GB" sz="1400" b="0">
+                <a:solidFill>
+                  <a:srgbClr val="CCCCCC"/>
+                </a:solidFill>
+                <a:effectLst/>
+                <a:latin typeface="Consolas" panose="020B0609020204030204" pitchFamily="49" charset="0"/>
+              </a:rPr>
+              <a:t>; </a:t>
+            </a:r>
+          </a:p>
+          <a:p>
+            <a:pPr>
+              <a:buNone/>
+            </a:pPr>
+            <a:r>
+              <a:rPr lang="en-GB" sz="1400" b="0">
+                <a:solidFill>
+                  <a:srgbClr val="CCCCCC"/>
+                </a:solidFill>
+                <a:effectLst/>
+                <a:latin typeface="Consolas" panose="020B0609020204030204" pitchFamily="49" charset="0"/>
+              </a:rPr>
+              <a:t>    </a:t>
+            </a:r>
+            <a:r>
+              <a:rPr lang="en-GB" sz="1400" b="0">
+                <a:solidFill>
+                  <a:srgbClr val="9CDCFE"/>
+                </a:solidFill>
+                <a:effectLst/>
+                <a:latin typeface="Consolas" panose="020B0609020204030204" pitchFamily="49" charset="0"/>
+              </a:rPr>
+              <a:t>fileInfo</a:t>
+            </a:r>
+            <a:r>
+              <a:rPr lang="en-GB" sz="1400" b="0">
+                <a:solidFill>
+                  <a:srgbClr val="CCCCCC"/>
+                </a:solidFill>
+                <a:effectLst/>
+                <a:latin typeface="Consolas" panose="020B0609020204030204" pitchFamily="49" charset="0"/>
+              </a:rPr>
+              <a:t> </a:t>
+            </a:r>
+            <a:r>
+              <a:rPr lang="en-GB" sz="1400" b="0">
+                <a:solidFill>
+                  <a:srgbClr val="D4D4D4"/>
+                </a:solidFill>
+                <a:effectLst/>
+                <a:latin typeface="Consolas" panose="020B0609020204030204" pitchFamily="49" charset="0"/>
+              </a:rPr>
+              <a:t>&amp;=</a:t>
+            </a:r>
+            <a:r>
+              <a:rPr lang="en-GB" sz="1400" b="0">
+                <a:solidFill>
+                  <a:srgbClr val="CCCCCC"/>
+                </a:solidFill>
+                <a:effectLst/>
+                <a:latin typeface="Consolas" panose="020B0609020204030204" pitchFamily="49" charset="0"/>
+              </a:rPr>
+              <a:t> </a:t>
+            </a:r>
+            <a:r>
+              <a:rPr lang="en-GB" sz="1400" b="0">
+                <a:solidFill>
+                  <a:srgbClr val="D4D4D4"/>
+                </a:solidFill>
+                <a:effectLst/>
+                <a:latin typeface="Consolas" panose="020B0609020204030204" pitchFamily="49" charset="0"/>
+              </a:rPr>
+              <a:t>~</a:t>
+            </a:r>
+            <a:r>
+              <a:rPr lang="en-GB" sz="1400" b="0">
+                <a:solidFill>
+                  <a:srgbClr val="569CD6"/>
+                </a:solidFill>
+                <a:effectLst/>
+                <a:latin typeface="Consolas" panose="020B0609020204030204" pitchFamily="49" charset="0"/>
+              </a:rPr>
+              <a:t>FILE_PRIORITY_MASK</a:t>
+            </a:r>
+            <a:r>
+              <a:rPr lang="en-GB" sz="1400" b="0">
+                <a:solidFill>
+                  <a:srgbClr val="CCCCCC"/>
+                </a:solidFill>
+                <a:effectLst/>
+                <a:latin typeface="Consolas" panose="020B0609020204030204" pitchFamily="49" charset="0"/>
+              </a:rPr>
+              <a:t>;</a:t>
+            </a:r>
+          </a:p>
+          <a:p>
+            <a:pPr>
+              <a:buNone/>
+            </a:pPr>
+            <a:r>
+              <a:rPr lang="en-GB" sz="1400" b="0">
+                <a:solidFill>
+                  <a:srgbClr val="CCCCCC"/>
+                </a:solidFill>
+                <a:effectLst/>
+                <a:latin typeface="Consolas" panose="020B0609020204030204" pitchFamily="49" charset="0"/>
+              </a:rPr>
+              <a:t>    </a:t>
+            </a:r>
+            <a:r>
+              <a:rPr lang="en-GB" sz="1400" b="0">
+                <a:solidFill>
+                  <a:srgbClr val="9CDCFE"/>
+                </a:solidFill>
+                <a:effectLst/>
+                <a:latin typeface="Consolas" panose="020B0609020204030204" pitchFamily="49" charset="0"/>
+              </a:rPr>
+              <a:t>fileInfo</a:t>
+            </a:r>
+            <a:r>
+              <a:rPr lang="en-GB" sz="1400" b="0">
+                <a:solidFill>
+                  <a:srgbClr val="CCCCCC"/>
+                </a:solidFill>
+                <a:effectLst/>
+                <a:latin typeface="Consolas" panose="020B0609020204030204" pitchFamily="49" charset="0"/>
+              </a:rPr>
+              <a:t> </a:t>
+            </a:r>
+            <a:r>
+              <a:rPr lang="en-GB" sz="1400" b="0">
+                <a:solidFill>
+                  <a:srgbClr val="D4D4D4"/>
+                </a:solidFill>
+                <a:effectLst/>
+                <a:latin typeface="Consolas" panose="020B0609020204030204" pitchFamily="49" charset="0"/>
+              </a:rPr>
+              <a:t>|=</a:t>
+            </a:r>
+            <a:r>
+              <a:rPr lang="en-GB" sz="1400" b="0">
+                <a:solidFill>
+                  <a:srgbClr val="CCCCCC"/>
+                </a:solidFill>
+                <a:effectLst/>
+                <a:latin typeface="Consolas" panose="020B0609020204030204" pitchFamily="49" charset="0"/>
+              </a:rPr>
+              <a:t> (</a:t>
+            </a:r>
+            <a:r>
+              <a:rPr lang="en-GB" sz="1400" b="0">
+                <a:solidFill>
+                  <a:srgbClr val="B5CEA8"/>
+                </a:solidFill>
+                <a:effectLst/>
+                <a:latin typeface="Consolas" panose="020B0609020204030204" pitchFamily="49" charset="0"/>
+              </a:rPr>
+              <a:t>5</a:t>
+            </a:r>
+            <a:r>
+              <a:rPr lang="en-GB" sz="1400" b="0">
+                <a:solidFill>
+                  <a:srgbClr val="CCCCCC"/>
+                </a:solidFill>
+                <a:effectLst/>
+                <a:latin typeface="Consolas" panose="020B0609020204030204" pitchFamily="49" charset="0"/>
+              </a:rPr>
+              <a:t> </a:t>
+            </a:r>
+            <a:r>
+              <a:rPr lang="en-GB" sz="1400" b="0">
+                <a:solidFill>
+                  <a:srgbClr val="D4D4D4"/>
+                </a:solidFill>
+                <a:effectLst/>
+                <a:latin typeface="Consolas" panose="020B0609020204030204" pitchFamily="49" charset="0"/>
+              </a:rPr>
+              <a:t>&lt;&lt;</a:t>
+            </a:r>
+            <a:r>
+              <a:rPr lang="en-GB" sz="1400" b="0">
+                <a:solidFill>
+                  <a:srgbClr val="CCCCCC"/>
+                </a:solidFill>
+                <a:effectLst/>
+                <a:latin typeface="Consolas" panose="020B0609020204030204" pitchFamily="49" charset="0"/>
+              </a:rPr>
+              <a:t> </a:t>
+            </a:r>
+            <a:r>
+              <a:rPr lang="en-GB" sz="1400" b="0">
+                <a:solidFill>
+                  <a:srgbClr val="B5CEA8"/>
+                </a:solidFill>
+                <a:effectLst/>
+                <a:latin typeface="Consolas" panose="020B0609020204030204" pitchFamily="49" charset="0"/>
+              </a:rPr>
+              <a:t>3</a:t>
+            </a:r>
+            <a:r>
+              <a:rPr lang="en-GB" sz="1400" b="0">
+                <a:solidFill>
+                  <a:srgbClr val="CCCCCC"/>
+                </a:solidFill>
+                <a:effectLst/>
+                <a:latin typeface="Consolas" panose="020B0609020204030204" pitchFamily="49" charset="0"/>
+              </a:rPr>
+              <a:t>);</a:t>
+            </a:r>
+          </a:p>
+          <a:p>
+            <a:pPr>
+              <a:buNone/>
+            </a:pPr>
+            <a:r>
+              <a:rPr lang="en-GB" sz="1400" b="0">
+                <a:solidFill>
+                  <a:srgbClr val="CCCCCC"/>
+                </a:solidFill>
+                <a:effectLst/>
+                <a:latin typeface="Consolas" panose="020B0609020204030204" pitchFamily="49" charset="0"/>
+              </a:rPr>
+              <a:t>}</a:t>
+            </a:r>
+            <a:endParaRPr lang="en-GB" b="0">
+              <a:solidFill>
+                <a:srgbClr val="CCCCCC"/>
+              </a:solidFill>
+              <a:effectLst/>
+              <a:latin typeface="Consolas" panose="020B0609020204030204" pitchFamily="49" charset="0"/>
+            </a:endParaRPr>
+          </a:p>
+        </p:txBody>
+      </p:sp>
+      <p:sp>
+        <p:nvSpPr>
+          <p:cNvPr id="8" name="TextBox 7">
+            <a:extLst>
+              <a:ext uri="{FF2B5EF4-FFF2-40B4-BE49-F238E27FC236}">
+                <a16:creationId xmlns:a16="http://schemas.microsoft.com/office/drawing/2014/main" id="{5C8671C9-532B-8A72-A6B5-F68F74A22406}"/>
+              </a:ext>
+            </a:extLst>
+          </p:cNvPr>
+          <p:cNvSpPr txBox="1"/>
+          <p:nvPr/>
+        </p:nvSpPr>
+        <p:spPr>
+          <a:xfrm>
+            <a:off x="7109908" y="2086186"/>
+            <a:ext cx="3464860" cy="3539430"/>
+          </a:xfrm>
+          <a:prstGeom prst="rect">
+            <a:avLst/>
+          </a:prstGeom>
+          <a:solidFill>
+            <a:schemeClr val="tx1">
+              <a:lumMod val="85000"/>
+              <a:lumOff val="15000"/>
+            </a:schemeClr>
+          </a:solidFill>
+          <a:ln>
+            <a:solidFill>
+              <a:schemeClr val="bg1"/>
+            </a:solidFill>
+          </a:ln>
+        </p:spPr>
+        <p:txBody>
+          <a:bodyPr wrap="square">
+            <a:spAutoFit/>
+          </a:bodyPr>
+          <a:lstStyle/>
+          <a:p>
+            <a:pPr>
+              <a:buNone/>
+            </a:pPr>
+            <a:r>
+              <a:rPr lang="en-GB" sz="1400" b="0">
+                <a:solidFill>
+                  <a:srgbClr val="569CD6"/>
+                </a:solidFill>
+                <a:effectLst/>
+                <a:latin typeface="Consolas" panose="020B0609020204030204" pitchFamily="49" charset="0"/>
+              </a:rPr>
+              <a:t>typedef</a:t>
+            </a:r>
+            <a:r>
+              <a:rPr lang="en-GB" sz="1400" b="0">
+                <a:solidFill>
+                  <a:srgbClr val="CCCCCC"/>
+                </a:solidFill>
+                <a:effectLst/>
+                <a:latin typeface="Consolas" panose="020B0609020204030204" pitchFamily="49" charset="0"/>
+              </a:rPr>
+              <a:t> </a:t>
+            </a:r>
+            <a:r>
+              <a:rPr lang="en-GB" sz="1400" b="0">
+                <a:solidFill>
+                  <a:srgbClr val="569CD6"/>
+                </a:solidFill>
+                <a:effectLst/>
+                <a:latin typeface="Consolas" panose="020B0609020204030204" pitchFamily="49" charset="0"/>
+              </a:rPr>
+              <a:t>struct</a:t>
+            </a:r>
+            <a:r>
+              <a:rPr lang="en-GB" sz="1400" b="0">
+                <a:solidFill>
+                  <a:srgbClr val="CCCCCC"/>
+                </a:solidFill>
+                <a:effectLst/>
+                <a:latin typeface="Consolas" panose="020B0609020204030204" pitchFamily="49" charset="0"/>
+              </a:rPr>
+              <a:t> {</a:t>
+            </a:r>
+          </a:p>
+          <a:p>
+            <a:pPr>
+              <a:buNone/>
+            </a:pPr>
+            <a:r>
+              <a:rPr lang="en-GB" sz="1400" b="0">
+                <a:solidFill>
+                  <a:srgbClr val="CCCCCC"/>
+                </a:solidFill>
+                <a:effectLst/>
+                <a:latin typeface="Consolas" panose="020B0609020204030204" pitchFamily="49" charset="0"/>
+              </a:rPr>
+              <a:t>    </a:t>
+            </a:r>
+            <a:r>
+              <a:rPr lang="en-GB" sz="1400" b="0">
+                <a:solidFill>
+                  <a:srgbClr val="4EC9B0"/>
+                </a:solidFill>
+                <a:effectLst/>
+                <a:latin typeface="Consolas" panose="020B0609020204030204" pitchFamily="49" charset="0"/>
+              </a:rPr>
+              <a:t>uint8_t</a:t>
+            </a:r>
+            <a:r>
+              <a:rPr lang="en-GB" sz="1400" b="0">
+                <a:solidFill>
+                  <a:srgbClr val="CCCCCC"/>
+                </a:solidFill>
+                <a:effectLst/>
+                <a:latin typeface="Consolas" panose="020B0609020204030204" pitchFamily="49" charset="0"/>
+              </a:rPr>
+              <a:t> </a:t>
+            </a:r>
+            <a:r>
+              <a:rPr lang="en-GB" sz="1400" b="0">
+                <a:solidFill>
+                  <a:srgbClr val="9CDCFE"/>
+                </a:solidFill>
+                <a:effectLst/>
+                <a:latin typeface="Consolas" panose="020B0609020204030204" pitchFamily="49" charset="0"/>
+              </a:rPr>
+              <a:t>readable</a:t>
+            </a:r>
+            <a:r>
+              <a:rPr lang="en-GB" sz="1400" b="0">
+                <a:solidFill>
+                  <a:srgbClr val="CCCCCC"/>
+                </a:solidFill>
+                <a:effectLst/>
+                <a:latin typeface="Consolas" panose="020B0609020204030204" pitchFamily="49" charset="0"/>
+              </a:rPr>
+              <a:t> : </a:t>
+            </a:r>
+            <a:r>
+              <a:rPr lang="en-GB" sz="1400" b="0">
+                <a:solidFill>
+                  <a:srgbClr val="B5CEA8"/>
+                </a:solidFill>
+                <a:effectLst/>
+                <a:latin typeface="Consolas" panose="020B0609020204030204" pitchFamily="49" charset="0"/>
+              </a:rPr>
+              <a:t>1</a:t>
+            </a:r>
+            <a:r>
+              <a:rPr lang="en-GB" sz="1400" b="0">
+                <a:solidFill>
+                  <a:srgbClr val="CCCCCC"/>
+                </a:solidFill>
+                <a:effectLst/>
+                <a:latin typeface="Consolas" panose="020B0609020204030204" pitchFamily="49" charset="0"/>
+              </a:rPr>
+              <a:t>;</a:t>
+            </a:r>
+          </a:p>
+          <a:p>
+            <a:pPr>
+              <a:buNone/>
+            </a:pPr>
+            <a:r>
+              <a:rPr lang="en-GB" sz="1400" b="0">
+                <a:solidFill>
+                  <a:srgbClr val="CCCCCC"/>
+                </a:solidFill>
+                <a:effectLst/>
+                <a:latin typeface="Consolas" panose="020B0609020204030204" pitchFamily="49" charset="0"/>
+              </a:rPr>
+              <a:t>    </a:t>
+            </a:r>
+            <a:r>
+              <a:rPr lang="en-GB" sz="1400" b="0">
+                <a:solidFill>
+                  <a:srgbClr val="4EC9B0"/>
+                </a:solidFill>
+                <a:effectLst/>
+                <a:latin typeface="Consolas" panose="020B0609020204030204" pitchFamily="49" charset="0"/>
+              </a:rPr>
+              <a:t>uint8_t</a:t>
+            </a:r>
+            <a:r>
+              <a:rPr lang="en-GB" sz="1400" b="0">
+                <a:solidFill>
+                  <a:srgbClr val="CCCCCC"/>
+                </a:solidFill>
+                <a:effectLst/>
+                <a:latin typeface="Consolas" panose="020B0609020204030204" pitchFamily="49" charset="0"/>
+              </a:rPr>
+              <a:t> </a:t>
+            </a:r>
+            <a:r>
+              <a:rPr lang="en-GB" sz="1400" b="0">
+                <a:solidFill>
+                  <a:srgbClr val="9CDCFE"/>
+                </a:solidFill>
+                <a:effectLst/>
+                <a:latin typeface="Consolas" panose="020B0609020204030204" pitchFamily="49" charset="0"/>
+              </a:rPr>
+              <a:t>writable</a:t>
+            </a:r>
+            <a:r>
+              <a:rPr lang="en-GB" sz="1400" b="0">
+                <a:solidFill>
+                  <a:srgbClr val="CCCCCC"/>
+                </a:solidFill>
+                <a:effectLst/>
+                <a:latin typeface="Consolas" panose="020B0609020204030204" pitchFamily="49" charset="0"/>
+              </a:rPr>
+              <a:t> : </a:t>
+            </a:r>
+            <a:r>
+              <a:rPr lang="en-GB" sz="1400" b="0">
+                <a:solidFill>
+                  <a:srgbClr val="B5CEA8"/>
+                </a:solidFill>
+                <a:effectLst/>
+                <a:latin typeface="Consolas" panose="020B0609020204030204" pitchFamily="49" charset="0"/>
+              </a:rPr>
+              <a:t>1</a:t>
+            </a:r>
+            <a:r>
+              <a:rPr lang="en-GB" sz="1400" b="0">
+                <a:solidFill>
+                  <a:srgbClr val="CCCCCC"/>
+                </a:solidFill>
+                <a:effectLst/>
+                <a:latin typeface="Consolas" panose="020B0609020204030204" pitchFamily="49" charset="0"/>
+              </a:rPr>
+              <a:t>;</a:t>
+            </a:r>
+          </a:p>
+          <a:p>
+            <a:pPr>
+              <a:buNone/>
+            </a:pPr>
+            <a:r>
+              <a:rPr lang="en-GB" sz="1400" b="0">
+                <a:solidFill>
+                  <a:srgbClr val="CCCCCC"/>
+                </a:solidFill>
+                <a:effectLst/>
+                <a:latin typeface="Consolas" panose="020B0609020204030204" pitchFamily="49" charset="0"/>
+              </a:rPr>
+              <a:t>    </a:t>
+            </a:r>
+            <a:r>
+              <a:rPr lang="en-GB" sz="1400" b="0">
+                <a:solidFill>
+                  <a:srgbClr val="4EC9B0"/>
+                </a:solidFill>
+                <a:effectLst/>
+                <a:latin typeface="Consolas" panose="020B0609020204030204" pitchFamily="49" charset="0"/>
+              </a:rPr>
+              <a:t>uint8_t</a:t>
+            </a:r>
+            <a:r>
+              <a:rPr lang="en-GB" sz="1400" b="0">
+                <a:solidFill>
+                  <a:srgbClr val="CCCCCC"/>
+                </a:solidFill>
+                <a:effectLst/>
+                <a:latin typeface="Consolas" panose="020B0609020204030204" pitchFamily="49" charset="0"/>
+              </a:rPr>
+              <a:t> </a:t>
+            </a:r>
+            <a:r>
+              <a:rPr lang="en-GB" sz="1400" b="0">
+                <a:solidFill>
+                  <a:srgbClr val="9CDCFE"/>
+                </a:solidFill>
+                <a:effectLst/>
+                <a:latin typeface="Consolas" panose="020B0609020204030204" pitchFamily="49" charset="0"/>
+              </a:rPr>
+              <a:t>executable</a:t>
+            </a:r>
+            <a:r>
+              <a:rPr lang="en-GB" sz="1400" b="0">
+                <a:solidFill>
+                  <a:srgbClr val="CCCCCC"/>
+                </a:solidFill>
+                <a:effectLst/>
+                <a:latin typeface="Consolas" panose="020B0609020204030204" pitchFamily="49" charset="0"/>
+              </a:rPr>
+              <a:t> : </a:t>
+            </a:r>
+            <a:r>
+              <a:rPr lang="en-GB" sz="1400" b="0">
+                <a:solidFill>
+                  <a:srgbClr val="B5CEA8"/>
+                </a:solidFill>
+                <a:effectLst/>
+                <a:latin typeface="Consolas" panose="020B0609020204030204" pitchFamily="49" charset="0"/>
+              </a:rPr>
+              <a:t>1</a:t>
+            </a:r>
+            <a:r>
+              <a:rPr lang="en-GB" sz="1400" b="0">
+                <a:solidFill>
+                  <a:srgbClr val="CCCCCC"/>
+                </a:solidFill>
+                <a:effectLst/>
+                <a:latin typeface="Consolas" panose="020B0609020204030204" pitchFamily="49" charset="0"/>
+              </a:rPr>
+              <a:t>;</a:t>
+            </a:r>
+          </a:p>
+          <a:p>
+            <a:pPr>
+              <a:buNone/>
+            </a:pPr>
+            <a:r>
+              <a:rPr lang="en-GB" sz="1400" b="0">
+                <a:solidFill>
+                  <a:srgbClr val="CCCCCC"/>
+                </a:solidFill>
+                <a:effectLst/>
+                <a:latin typeface="Consolas" panose="020B0609020204030204" pitchFamily="49" charset="0"/>
+              </a:rPr>
+              <a:t>    </a:t>
+            </a:r>
+            <a:r>
+              <a:rPr lang="en-GB" sz="1400" b="0">
+                <a:solidFill>
+                  <a:srgbClr val="4EC9B0"/>
+                </a:solidFill>
+                <a:effectLst/>
+                <a:latin typeface="Consolas" panose="020B0609020204030204" pitchFamily="49" charset="0"/>
+              </a:rPr>
+              <a:t>uint8_t</a:t>
+            </a:r>
+            <a:r>
+              <a:rPr lang="en-GB" sz="1400" b="0">
+                <a:solidFill>
+                  <a:srgbClr val="CCCCCC"/>
+                </a:solidFill>
+                <a:effectLst/>
+                <a:latin typeface="Consolas" panose="020B0609020204030204" pitchFamily="49" charset="0"/>
+              </a:rPr>
+              <a:t> </a:t>
+            </a:r>
+            <a:r>
+              <a:rPr lang="en-GB" sz="1400" b="0">
+                <a:solidFill>
+                  <a:srgbClr val="9CDCFE"/>
+                </a:solidFill>
+                <a:effectLst/>
+                <a:latin typeface="Consolas" panose="020B0609020204030204" pitchFamily="49" charset="0"/>
+              </a:rPr>
+              <a:t>priority</a:t>
+            </a:r>
+            <a:r>
+              <a:rPr lang="en-GB" sz="1400" b="0">
+                <a:solidFill>
+                  <a:srgbClr val="CCCCCC"/>
+                </a:solidFill>
+                <a:effectLst/>
+                <a:latin typeface="Consolas" panose="020B0609020204030204" pitchFamily="49" charset="0"/>
+              </a:rPr>
+              <a:t> : </a:t>
+            </a:r>
+            <a:r>
+              <a:rPr lang="en-GB" sz="1400" b="0">
+                <a:solidFill>
+                  <a:srgbClr val="B5CEA8"/>
+                </a:solidFill>
+                <a:effectLst/>
+                <a:latin typeface="Consolas" panose="020B0609020204030204" pitchFamily="49" charset="0"/>
+              </a:rPr>
+              <a:t>5</a:t>
+            </a:r>
+            <a:r>
+              <a:rPr lang="en-GB" sz="1400" b="0">
+                <a:solidFill>
+                  <a:srgbClr val="CCCCCC"/>
+                </a:solidFill>
+                <a:effectLst/>
+                <a:latin typeface="Consolas" panose="020B0609020204030204" pitchFamily="49" charset="0"/>
+              </a:rPr>
+              <a:t>;</a:t>
+            </a:r>
+          </a:p>
+          <a:p>
+            <a:pPr>
+              <a:buNone/>
+            </a:pPr>
+            <a:r>
+              <a:rPr lang="en-GB" sz="1400" b="0">
+                <a:solidFill>
+                  <a:srgbClr val="CCCCCC"/>
+                </a:solidFill>
+                <a:effectLst/>
+                <a:latin typeface="Consolas" panose="020B0609020204030204" pitchFamily="49" charset="0"/>
+              </a:rPr>
+              <a:t>} </a:t>
+            </a:r>
+            <a:r>
+              <a:rPr lang="en-GB" sz="1400" b="0">
+                <a:solidFill>
+                  <a:srgbClr val="4EC9B0"/>
+                </a:solidFill>
+                <a:effectLst/>
+                <a:latin typeface="Consolas" panose="020B0609020204030204" pitchFamily="49" charset="0"/>
+              </a:rPr>
+              <a:t>FileInfo</a:t>
+            </a:r>
+            <a:r>
+              <a:rPr lang="en-GB" sz="1400" b="0">
+                <a:solidFill>
+                  <a:srgbClr val="CCCCCC"/>
+                </a:solidFill>
+                <a:effectLst/>
+                <a:latin typeface="Consolas" panose="020B0609020204030204" pitchFamily="49" charset="0"/>
+              </a:rPr>
+              <a:t>;</a:t>
+            </a:r>
+          </a:p>
+          <a:p>
+            <a:pPr>
+              <a:buNone/>
+            </a:pPr>
+            <a:br>
+              <a:rPr lang="en-GB" sz="1400" b="0">
+                <a:solidFill>
+                  <a:srgbClr val="CCCCCC"/>
+                </a:solidFill>
+                <a:effectLst/>
+                <a:latin typeface="Consolas" panose="020B0609020204030204" pitchFamily="49" charset="0"/>
+              </a:rPr>
+            </a:br>
+            <a:endParaRPr lang="en-GB" sz="1400" b="0">
+              <a:solidFill>
+                <a:srgbClr val="CCCCCC"/>
+              </a:solidFill>
+              <a:effectLst/>
+              <a:latin typeface="Consolas" panose="020B0609020204030204" pitchFamily="49" charset="0"/>
+            </a:endParaRPr>
+          </a:p>
+          <a:p>
+            <a:pPr>
+              <a:buNone/>
+            </a:pPr>
+            <a:r>
+              <a:rPr lang="en-GB" sz="1400" b="0">
+                <a:solidFill>
+                  <a:srgbClr val="569CD6"/>
+                </a:solidFill>
+                <a:effectLst/>
+                <a:latin typeface="Consolas" panose="020B0609020204030204" pitchFamily="49" charset="0"/>
+              </a:rPr>
+              <a:t>int</a:t>
+            </a:r>
+            <a:r>
+              <a:rPr lang="en-GB" sz="1400" b="0">
+                <a:solidFill>
+                  <a:srgbClr val="CCCCCC"/>
+                </a:solidFill>
+                <a:effectLst/>
+                <a:latin typeface="Consolas" panose="020B0609020204030204" pitchFamily="49" charset="0"/>
+              </a:rPr>
+              <a:t> </a:t>
+            </a:r>
+            <a:r>
+              <a:rPr lang="en-GB" sz="1400" b="0">
+                <a:solidFill>
+                  <a:srgbClr val="DCDCAA"/>
+                </a:solidFill>
+                <a:effectLst/>
+                <a:latin typeface="Consolas" panose="020B0609020204030204" pitchFamily="49" charset="0"/>
+              </a:rPr>
+              <a:t>main</a:t>
+            </a:r>
+            <a:r>
+              <a:rPr lang="en-GB" sz="1400" b="0">
+                <a:solidFill>
+                  <a:srgbClr val="CCCCCC"/>
+                </a:solidFill>
+                <a:effectLst/>
+                <a:latin typeface="Consolas" panose="020B0609020204030204" pitchFamily="49" charset="0"/>
+              </a:rPr>
+              <a:t>(</a:t>
+            </a:r>
+            <a:r>
+              <a:rPr lang="en-GB" sz="1400" b="0">
+                <a:solidFill>
+                  <a:srgbClr val="569CD6"/>
+                </a:solidFill>
+                <a:effectLst/>
+                <a:latin typeface="Consolas" panose="020B0609020204030204" pitchFamily="49" charset="0"/>
+              </a:rPr>
+              <a:t>void</a:t>
+            </a:r>
+            <a:r>
+              <a:rPr lang="en-GB" sz="1400" b="0">
+                <a:solidFill>
+                  <a:srgbClr val="CCCCCC"/>
+                </a:solidFill>
+                <a:effectLst/>
+                <a:latin typeface="Consolas" panose="020B0609020204030204" pitchFamily="49" charset="0"/>
+              </a:rPr>
+              <a:t>)</a:t>
+            </a:r>
+          </a:p>
+          <a:p>
+            <a:pPr>
+              <a:buNone/>
+            </a:pPr>
+            <a:r>
+              <a:rPr lang="en-GB" sz="1400" b="0">
+                <a:solidFill>
+                  <a:srgbClr val="CCCCCC"/>
+                </a:solidFill>
+                <a:effectLst/>
+                <a:latin typeface="Consolas" panose="020B0609020204030204" pitchFamily="49" charset="0"/>
+              </a:rPr>
+              <a:t>{</a:t>
+            </a:r>
+          </a:p>
+          <a:p>
+            <a:pPr>
+              <a:buNone/>
+            </a:pPr>
+            <a:r>
+              <a:rPr lang="en-GB" sz="1400" b="0">
+                <a:solidFill>
+                  <a:srgbClr val="CCCCCC"/>
+                </a:solidFill>
+                <a:effectLst/>
+                <a:latin typeface="Consolas" panose="020B0609020204030204" pitchFamily="49" charset="0"/>
+              </a:rPr>
+              <a:t>    </a:t>
+            </a:r>
+            <a:r>
+              <a:rPr lang="en-GB" sz="1400" b="0">
+                <a:solidFill>
+                  <a:srgbClr val="4EC9B0"/>
+                </a:solidFill>
+                <a:effectLst/>
+                <a:latin typeface="Consolas" panose="020B0609020204030204" pitchFamily="49" charset="0"/>
+              </a:rPr>
+              <a:t>FileInfo</a:t>
+            </a:r>
+            <a:r>
+              <a:rPr lang="en-GB" sz="1400" b="0">
+                <a:solidFill>
+                  <a:srgbClr val="CCCCCC"/>
+                </a:solidFill>
+                <a:effectLst/>
+                <a:latin typeface="Consolas" panose="020B0609020204030204" pitchFamily="49" charset="0"/>
+              </a:rPr>
+              <a:t> </a:t>
+            </a:r>
+            <a:r>
+              <a:rPr lang="en-GB" sz="1400" b="0">
+                <a:solidFill>
+                  <a:srgbClr val="9CDCFE"/>
+                </a:solidFill>
+                <a:effectLst/>
+                <a:latin typeface="Consolas" panose="020B0609020204030204" pitchFamily="49" charset="0"/>
+              </a:rPr>
+              <a:t>fileInfo</a:t>
+            </a:r>
+            <a:r>
+              <a:rPr lang="en-GB" sz="1400" b="0">
+                <a:solidFill>
+                  <a:srgbClr val="CCCCCC"/>
+                </a:solidFill>
+                <a:effectLst/>
+                <a:latin typeface="Consolas" panose="020B0609020204030204" pitchFamily="49" charset="0"/>
+              </a:rPr>
+              <a:t>;</a:t>
+            </a:r>
+          </a:p>
+          <a:p>
+            <a:pPr>
+              <a:buNone/>
+            </a:pPr>
+            <a:r>
+              <a:rPr lang="en-GB" sz="1400" b="0">
+                <a:solidFill>
+                  <a:srgbClr val="CCCCCC"/>
+                </a:solidFill>
+                <a:effectLst/>
+                <a:latin typeface="Consolas" panose="020B0609020204030204" pitchFamily="49" charset="0"/>
+              </a:rPr>
+              <a:t>    </a:t>
+            </a:r>
+            <a:r>
+              <a:rPr lang="en-GB" sz="1400" b="0">
+                <a:solidFill>
+                  <a:srgbClr val="9CDCFE"/>
+                </a:solidFill>
+                <a:effectLst/>
+                <a:latin typeface="Consolas" panose="020B0609020204030204" pitchFamily="49" charset="0"/>
+              </a:rPr>
+              <a:t>fileInfo</a:t>
+            </a:r>
+            <a:r>
+              <a:rPr lang="en-GB" sz="1400" b="0">
+                <a:solidFill>
+                  <a:srgbClr val="CCCCCC"/>
+                </a:solidFill>
+                <a:effectLst/>
+                <a:latin typeface="Consolas" panose="020B0609020204030204" pitchFamily="49" charset="0"/>
+              </a:rPr>
+              <a:t>.</a:t>
+            </a:r>
+            <a:r>
+              <a:rPr lang="en-GB" sz="1400" b="0">
+                <a:solidFill>
+                  <a:srgbClr val="9CDCFE"/>
+                </a:solidFill>
+                <a:effectLst/>
+                <a:latin typeface="Consolas" panose="020B0609020204030204" pitchFamily="49" charset="0"/>
+              </a:rPr>
+              <a:t>readable</a:t>
+            </a:r>
+            <a:r>
+              <a:rPr lang="en-GB" sz="1400" b="0">
+                <a:solidFill>
+                  <a:srgbClr val="CCCCCC"/>
+                </a:solidFill>
+                <a:effectLst/>
+                <a:latin typeface="Consolas" panose="020B0609020204030204" pitchFamily="49" charset="0"/>
+              </a:rPr>
+              <a:t> </a:t>
+            </a:r>
+            <a:r>
+              <a:rPr lang="en-GB" sz="1400" b="0">
+                <a:solidFill>
+                  <a:srgbClr val="D4D4D4"/>
+                </a:solidFill>
+                <a:effectLst/>
+                <a:latin typeface="Consolas" panose="020B0609020204030204" pitchFamily="49" charset="0"/>
+              </a:rPr>
+              <a:t>=</a:t>
+            </a:r>
+            <a:r>
+              <a:rPr lang="en-GB" sz="1400" b="0">
+                <a:solidFill>
+                  <a:srgbClr val="CCCCCC"/>
+                </a:solidFill>
+                <a:effectLst/>
+                <a:latin typeface="Consolas" panose="020B0609020204030204" pitchFamily="49" charset="0"/>
+              </a:rPr>
+              <a:t> </a:t>
+            </a:r>
+            <a:r>
+              <a:rPr lang="en-GB" sz="1400" b="0">
+                <a:solidFill>
+                  <a:srgbClr val="B5CEA8"/>
+                </a:solidFill>
+                <a:effectLst/>
+                <a:latin typeface="Consolas" panose="020B0609020204030204" pitchFamily="49" charset="0"/>
+              </a:rPr>
+              <a:t>1</a:t>
+            </a:r>
+            <a:r>
+              <a:rPr lang="en-GB" sz="1400" b="0">
+                <a:solidFill>
+                  <a:srgbClr val="CCCCCC"/>
+                </a:solidFill>
+                <a:effectLst/>
+                <a:latin typeface="Consolas" panose="020B0609020204030204" pitchFamily="49" charset="0"/>
+              </a:rPr>
+              <a:t>; </a:t>
+            </a:r>
+          </a:p>
+          <a:p>
+            <a:pPr>
+              <a:buNone/>
+            </a:pPr>
+            <a:r>
+              <a:rPr lang="en-GB" sz="1400" b="0">
+                <a:solidFill>
+                  <a:srgbClr val="CCCCCC"/>
+                </a:solidFill>
+                <a:effectLst/>
+                <a:latin typeface="Consolas" panose="020B0609020204030204" pitchFamily="49" charset="0"/>
+              </a:rPr>
+              <a:t>    </a:t>
+            </a:r>
+            <a:r>
+              <a:rPr lang="en-GB" sz="1400" b="0">
+                <a:solidFill>
+                  <a:srgbClr val="9CDCFE"/>
+                </a:solidFill>
+                <a:effectLst/>
+                <a:latin typeface="Consolas" panose="020B0609020204030204" pitchFamily="49" charset="0"/>
+              </a:rPr>
+              <a:t>fileInfo</a:t>
+            </a:r>
+            <a:r>
+              <a:rPr lang="en-GB" sz="1400" b="0">
+                <a:solidFill>
+                  <a:srgbClr val="CCCCCC"/>
+                </a:solidFill>
+                <a:effectLst/>
+                <a:latin typeface="Consolas" panose="020B0609020204030204" pitchFamily="49" charset="0"/>
+              </a:rPr>
+              <a:t>.</a:t>
+            </a:r>
+            <a:r>
+              <a:rPr lang="en-GB" sz="1400" b="0">
+                <a:solidFill>
+                  <a:srgbClr val="9CDCFE"/>
+                </a:solidFill>
+                <a:effectLst/>
+                <a:latin typeface="Consolas" panose="020B0609020204030204" pitchFamily="49" charset="0"/>
+              </a:rPr>
+              <a:t>writable</a:t>
+            </a:r>
+            <a:r>
+              <a:rPr lang="en-GB" sz="1400" b="0">
+                <a:solidFill>
+                  <a:srgbClr val="CCCCCC"/>
+                </a:solidFill>
+                <a:effectLst/>
+                <a:latin typeface="Consolas" panose="020B0609020204030204" pitchFamily="49" charset="0"/>
+              </a:rPr>
+              <a:t> </a:t>
+            </a:r>
+            <a:r>
+              <a:rPr lang="en-GB" sz="1400" b="0">
+                <a:solidFill>
+                  <a:srgbClr val="D4D4D4"/>
+                </a:solidFill>
+                <a:effectLst/>
+                <a:latin typeface="Consolas" panose="020B0609020204030204" pitchFamily="49" charset="0"/>
+              </a:rPr>
+              <a:t>=</a:t>
+            </a:r>
+            <a:r>
+              <a:rPr lang="en-GB" sz="1400" b="0">
+                <a:solidFill>
+                  <a:srgbClr val="CCCCCC"/>
+                </a:solidFill>
+                <a:effectLst/>
+                <a:latin typeface="Consolas" panose="020B0609020204030204" pitchFamily="49" charset="0"/>
+              </a:rPr>
+              <a:t> </a:t>
+            </a:r>
+            <a:r>
+              <a:rPr lang="en-GB" sz="1400" b="0">
+                <a:solidFill>
+                  <a:srgbClr val="B5CEA8"/>
+                </a:solidFill>
+                <a:effectLst/>
+                <a:latin typeface="Consolas" panose="020B0609020204030204" pitchFamily="49" charset="0"/>
+              </a:rPr>
+              <a:t>0</a:t>
+            </a:r>
+            <a:r>
+              <a:rPr lang="en-GB" sz="1400" b="0">
+                <a:solidFill>
+                  <a:srgbClr val="CCCCCC"/>
+                </a:solidFill>
+                <a:effectLst/>
+                <a:latin typeface="Consolas" panose="020B0609020204030204" pitchFamily="49" charset="0"/>
+              </a:rPr>
+              <a:t>;</a:t>
+            </a:r>
+          </a:p>
+          <a:p>
+            <a:pPr>
+              <a:buNone/>
+            </a:pPr>
+            <a:r>
+              <a:rPr lang="en-GB" sz="1400" b="0">
+                <a:solidFill>
+                  <a:srgbClr val="CCCCCC"/>
+                </a:solidFill>
+                <a:effectLst/>
+                <a:latin typeface="Consolas" panose="020B0609020204030204" pitchFamily="49" charset="0"/>
+              </a:rPr>
+              <a:t>    </a:t>
+            </a:r>
+            <a:r>
+              <a:rPr lang="en-GB" sz="1400" b="0">
+                <a:solidFill>
+                  <a:srgbClr val="9CDCFE"/>
+                </a:solidFill>
+                <a:effectLst/>
+                <a:latin typeface="Consolas" panose="020B0609020204030204" pitchFamily="49" charset="0"/>
+              </a:rPr>
+              <a:t>fileInfo</a:t>
+            </a:r>
+            <a:r>
+              <a:rPr lang="en-GB" sz="1400" b="0">
+                <a:solidFill>
+                  <a:srgbClr val="CCCCCC"/>
+                </a:solidFill>
+                <a:effectLst/>
+                <a:latin typeface="Consolas" panose="020B0609020204030204" pitchFamily="49" charset="0"/>
+              </a:rPr>
+              <a:t>.</a:t>
+            </a:r>
+            <a:r>
+              <a:rPr lang="en-GB" sz="1400" b="0">
+                <a:solidFill>
+                  <a:srgbClr val="9CDCFE"/>
+                </a:solidFill>
+                <a:effectLst/>
+                <a:latin typeface="Consolas" panose="020B0609020204030204" pitchFamily="49" charset="0"/>
+              </a:rPr>
+              <a:t>executable</a:t>
+            </a:r>
+            <a:r>
+              <a:rPr lang="en-GB" sz="1400" b="0">
+                <a:solidFill>
+                  <a:srgbClr val="CCCCCC"/>
+                </a:solidFill>
+                <a:effectLst/>
+                <a:latin typeface="Consolas" panose="020B0609020204030204" pitchFamily="49" charset="0"/>
+              </a:rPr>
+              <a:t> </a:t>
+            </a:r>
+            <a:r>
+              <a:rPr lang="en-GB" sz="1400" b="0">
+                <a:solidFill>
+                  <a:srgbClr val="D4D4D4"/>
+                </a:solidFill>
+                <a:effectLst/>
+                <a:latin typeface="Consolas" panose="020B0609020204030204" pitchFamily="49" charset="0"/>
+              </a:rPr>
+              <a:t>=</a:t>
+            </a:r>
+            <a:r>
+              <a:rPr lang="en-GB" sz="1400" b="0">
+                <a:solidFill>
+                  <a:srgbClr val="CCCCCC"/>
+                </a:solidFill>
+                <a:effectLst/>
+                <a:latin typeface="Consolas" panose="020B0609020204030204" pitchFamily="49" charset="0"/>
+              </a:rPr>
+              <a:t> </a:t>
+            </a:r>
+            <a:r>
+              <a:rPr lang="en-GB" sz="1400" b="0">
+                <a:solidFill>
+                  <a:srgbClr val="B5CEA8"/>
+                </a:solidFill>
+                <a:effectLst/>
+                <a:latin typeface="Consolas" panose="020B0609020204030204" pitchFamily="49" charset="0"/>
+              </a:rPr>
+              <a:t>1</a:t>
+            </a:r>
+            <a:r>
+              <a:rPr lang="en-GB" sz="1400" b="0">
+                <a:solidFill>
+                  <a:srgbClr val="CCCCCC"/>
+                </a:solidFill>
+                <a:effectLst/>
+                <a:latin typeface="Consolas" panose="020B0609020204030204" pitchFamily="49" charset="0"/>
+              </a:rPr>
+              <a:t>;</a:t>
+            </a:r>
+          </a:p>
+          <a:p>
+            <a:pPr>
+              <a:buNone/>
+            </a:pPr>
+            <a:r>
+              <a:rPr lang="en-GB" sz="1400" b="0">
+                <a:solidFill>
+                  <a:srgbClr val="CCCCCC"/>
+                </a:solidFill>
+                <a:effectLst/>
+                <a:latin typeface="Consolas" panose="020B0609020204030204" pitchFamily="49" charset="0"/>
+              </a:rPr>
+              <a:t>    </a:t>
+            </a:r>
+            <a:r>
+              <a:rPr lang="en-GB" sz="1400" b="0">
+                <a:solidFill>
+                  <a:srgbClr val="9CDCFE"/>
+                </a:solidFill>
+                <a:effectLst/>
+                <a:latin typeface="Consolas" panose="020B0609020204030204" pitchFamily="49" charset="0"/>
+              </a:rPr>
+              <a:t>fileInfo</a:t>
+            </a:r>
+            <a:r>
+              <a:rPr lang="en-GB" sz="1400" b="0">
+                <a:solidFill>
+                  <a:srgbClr val="CCCCCC"/>
+                </a:solidFill>
+                <a:effectLst/>
+                <a:latin typeface="Consolas" panose="020B0609020204030204" pitchFamily="49" charset="0"/>
+              </a:rPr>
+              <a:t>.</a:t>
+            </a:r>
+            <a:r>
+              <a:rPr lang="en-GB" sz="1400" b="0">
+                <a:solidFill>
+                  <a:srgbClr val="9CDCFE"/>
+                </a:solidFill>
+                <a:effectLst/>
+                <a:latin typeface="Consolas" panose="020B0609020204030204" pitchFamily="49" charset="0"/>
+              </a:rPr>
+              <a:t>priority</a:t>
+            </a:r>
+            <a:r>
+              <a:rPr lang="en-GB" sz="1400" b="0">
+                <a:solidFill>
+                  <a:srgbClr val="CCCCCC"/>
+                </a:solidFill>
+                <a:effectLst/>
+                <a:latin typeface="Consolas" panose="020B0609020204030204" pitchFamily="49" charset="0"/>
+              </a:rPr>
+              <a:t> </a:t>
+            </a:r>
+            <a:r>
+              <a:rPr lang="en-GB" sz="1400" b="0">
+                <a:solidFill>
+                  <a:srgbClr val="D4D4D4"/>
+                </a:solidFill>
+                <a:effectLst/>
+                <a:latin typeface="Consolas" panose="020B0609020204030204" pitchFamily="49" charset="0"/>
+              </a:rPr>
+              <a:t>=</a:t>
+            </a:r>
+            <a:r>
+              <a:rPr lang="en-GB" sz="1400" b="0">
+                <a:solidFill>
+                  <a:srgbClr val="CCCCCC"/>
+                </a:solidFill>
+                <a:effectLst/>
+                <a:latin typeface="Consolas" panose="020B0609020204030204" pitchFamily="49" charset="0"/>
+              </a:rPr>
+              <a:t> </a:t>
+            </a:r>
+            <a:r>
+              <a:rPr lang="en-GB" sz="1400" b="0">
+                <a:solidFill>
+                  <a:srgbClr val="B5CEA8"/>
+                </a:solidFill>
+                <a:effectLst/>
+                <a:latin typeface="Consolas" panose="020B0609020204030204" pitchFamily="49" charset="0"/>
+              </a:rPr>
+              <a:t>5</a:t>
+            </a:r>
+            <a:r>
+              <a:rPr lang="en-GB" sz="1400" b="0">
+                <a:solidFill>
+                  <a:srgbClr val="CCCCCC"/>
+                </a:solidFill>
+                <a:effectLst/>
+                <a:latin typeface="Consolas" panose="020B0609020204030204" pitchFamily="49" charset="0"/>
+              </a:rPr>
+              <a:t>;</a:t>
+            </a:r>
+          </a:p>
+          <a:p>
+            <a:pPr>
+              <a:buNone/>
+            </a:pPr>
+            <a:r>
+              <a:rPr lang="en-GB" sz="1400" b="0">
+                <a:solidFill>
+                  <a:srgbClr val="CCCCCC"/>
+                </a:solidFill>
+                <a:effectLst/>
+                <a:latin typeface="Consolas" panose="020B0609020204030204" pitchFamily="49" charset="0"/>
+              </a:rPr>
+              <a:t>}</a:t>
+            </a:r>
+          </a:p>
+        </p:txBody>
+      </p:sp>
+      <p:sp>
+        <p:nvSpPr>
+          <p:cNvPr id="9" name="TextBox 8">
+            <a:extLst>
+              <a:ext uri="{FF2B5EF4-FFF2-40B4-BE49-F238E27FC236}">
+                <a16:creationId xmlns:a16="http://schemas.microsoft.com/office/drawing/2014/main" id="{92458864-D6E7-63EC-1165-430C8900DEB5}"/>
+              </a:ext>
+            </a:extLst>
+          </p:cNvPr>
+          <p:cNvSpPr txBox="1"/>
+          <p:nvPr/>
+        </p:nvSpPr>
+        <p:spPr>
+          <a:xfrm>
+            <a:off x="7912024" y="5107880"/>
+            <a:ext cx="4152902" cy="1384995"/>
+          </a:xfrm>
+          <a:prstGeom prst="rect">
+            <a:avLst/>
+          </a:prstGeom>
+          <a:solidFill>
+            <a:schemeClr val="tx1">
+              <a:lumMod val="85000"/>
+              <a:lumOff val="15000"/>
+            </a:schemeClr>
+          </a:solidFill>
+          <a:ln>
+            <a:solidFill>
+              <a:schemeClr val="bg1"/>
+            </a:solidFill>
+          </a:ln>
+        </p:spPr>
+        <p:txBody>
+          <a:bodyPr wrap="square">
+            <a:spAutoFit/>
+          </a:bodyPr>
+          <a:lstStyle/>
+          <a:p>
+            <a:pPr>
+              <a:buNone/>
+            </a:pPr>
+            <a:r>
+              <a:rPr lang="en-GB" sz="1400" b="0">
+                <a:solidFill>
+                  <a:srgbClr val="FF0000"/>
+                </a:solidFill>
+                <a:effectLst/>
+                <a:latin typeface="Consolas" panose="020B0609020204030204" pitchFamily="49" charset="0"/>
+              </a:rPr>
+              <a:t>WARNING: </a:t>
+            </a:r>
+            <a:r>
+              <a:rPr lang="en-GB" sz="1400" b="0">
+                <a:solidFill>
+                  <a:schemeClr val="bg1"/>
+                </a:solidFill>
+                <a:effectLst/>
+                <a:latin typeface="Consolas" panose="020B0609020204030204" pitchFamily="49" charset="0"/>
+              </a:rPr>
+              <a:t>Bitfields är VÄLDIGT implementationsberoende och svårportade.</a:t>
+            </a:r>
+          </a:p>
+          <a:p>
+            <a:pPr>
+              <a:buNone/>
+            </a:pPr>
+            <a:endParaRPr lang="en-GB" sz="1400">
+              <a:solidFill>
+                <a:schemeClr val="bg1"/>
+              </a:solidFill>
+              <a:latin typeface="Consolas" panose="020B0609020204030204" pitchFamily="49" charset="0"/>
+            </a:endParaRPr>
+          </a:p>
+          <a:p>
+            <a:pPr>
+              <a:buNone/>
+            </a:pPr>
+            <a:r>
+              <a:rPr lang="en-GB" sz="1400" b="0">
+                <a:solidFill>
+                  <a:schemeClr val="bg1"/>
+                </a:solidFill>
+                <a:effectLst/>
+                <a:latin typeface="Consolas" panose="020B0609020204030204" pitchFamily="49" charset="0"/>
+              </a:rPr>
+              <a:t>Men väldigt användbara när hårdvara, kompilator och ABI är kända och inte ändras.  </a:t>
+            </a:r>
+            <a:r>
+              <a:rPr lang="en-GB" sz="1400" b="0">
+                <a:solidFill>
+                  <a:srgbClr val="FF0000"/>
+                </a:solidFill>
+                <a:effectLst/>
+                <a:latin typeface="Consolas" panose="020B0609020204030204" pitchFamily="49" charset="0"/>
+              </a:rPr>
+              <a:t> </a:t>
+            </a:r>
           </a:p>
         </p:txBody>
       </p:sp>
@@ -14958,6 +18352,200 @@
   <p:clrMapOvr>
     <a:masterClrMapping/>
   </p:clrMapOvr>
+  <p:timing>
+    <p:tnLst>
+      <p:par>
+        <p:cTn id="1" dur="indefinite" restart="never" nodeType="tmRoot">
+          <p:childTnLst>
+            <p:seq concurrent="1" nextAc="seek">
+              <p:cTn id="2" dur="indefinite" nodeType="mainSeq">
+                <p:childTnLst>
+                  <p:par>
+                    <p:cTn id="3" fill="hold">
+                      <p:stCondLst>
+                        <p:cond delay="indefinite"/>
+                      </p:stCondLst>
+                      <p:childTnLst>
+                        <p:par>
+                          <p:cTn id="4" fill="hold">
+                            <p:stCondLst>
+                              <p:cond delay="0"/>
+                            </p:stCondLst>
+                            <p:childTnLst>
+                              <p:par>
+                                <p:cTn id="5" presetID="10" presetClass="entr" presetSubtype="0" fill="hold" grpId="0" nodeType="clickEffect">
+                                  <p:stCondLst>
+                                    <p:cond delay="0"/>
+                                  </p:stCondLst>
+                                  <p:childTnLst>
+                                    <p:set>
+                                      <p:cBhvr>
+                                        <p:cTn id="6" dur="1" fill="hold">
+                                          <p:stCondLst>
+                                            <p:cond delay="0"/>
+                                          </p:stCondLst>
+                                        </p:cTn>
+                                        <p:tgtEl>
+                                          <p:spTgt spid="7"/>
+                                        </p:tgtEl>
+                                        <p:attrNameLst>
+                                          <p:attrName>style.visibility</p:attrName>
+                                        </p:attrNameLst>
+                                      </p:cBhvr>
+                                      <p:to>
+                                        <p:strVal val="visible"/>
+                                      </p:to>
+                                    </p:set>
+                                    <p:animEffect transition="in" filter="fade">
+                                      <p:cBhvr>
+                                        <p:cTn id="7" dur="500"/>
+                                        <p:tgtEl>
+                                          <p:spTgt spid="7"/>
+                                        </p:tgtEl>
+                                      </p:cBhvr>
+                                    </p:animEffect>
+                                  </p:childTnLst>
+                                </p:cTn>
+                              </p:par>
+                            </p:childTnLst>
+                          </p:cTn>
+                        </p:par>
+                      </p:childTnLst>
+                    </p:cTn>
+                  </p:par>
+                  <p:par>
+                    <p:cTn id="8" fill="hold">
+                      <p:stCondLst>
+                        <p:cond delay="indefinite"/>
+                      </p:stCondLst>
+                      <p:childTnLst>
+                        <p:par>
+                          <p:cTn id="9" fill="hold">
+                            <p:stCondLst>
+                              <p:cond delay="0"/>
+                            </p:stCondLst>
+                            <p:childTnLst>
+                              <p:par>
+                                <p:cTn id="10" presetID="10" presetClass="entr" presetSubtype="0" fill="hold" grpId="0" nodeType="clickEffect">
+                                  <p:stCondLst>
+                                    <p:cond delay="0"/>
+                                  </p:stCondLst>
+                                  <p:childTnLst>
+                                    <p:set>
+                                      <p:cBhvr>
+                                        <p:cTn id="11" dur="1" fill="hold">
+                                          <p:stCondLst>
+                                            <p:cond delay="0"/>
+                                          </p:stCondLst>
+                                        </p:cTn>
+                                        <p:tgtEl>
+                                          <p:spTgt spid="8"/>
+                                        </p:tgtEl>
+                                        <p:attrNameLst>
+                                          <p:attrName>style.visibility</p:attrName>
+                                        </p:attrNameLst>
+                                      </p:cBhvr>
+                                      <p:to>
+                                        <p:strVal val="visible"/>
+                                      </p:to>
+                                    </p:set>
+                                    <p:animEffect transition="in" filter="fade">
+                                      <p:cBhvr>
+                                        <p:cTn id="12" dur="500"/>
+                                        <p:tgtEl>
+                                          <p:spTgt spid="8"/>
+                                        </p:tgtEl>
+                                      </p:cBhvr>
+                                    </p:animEffect>
+                                  </p:childTnLst>
+                                </p:cTn>
+                              </p:par>
+                            </p:childTnLst>
+                          </p:cTn>
+                        </p:par>
+                      </p:childTnLst>
+                    </p:cTn>
+                  </p:par>
+                  <p:par>
+                    <p:cTn id="13" fill="hold">
+                      <p:stCondLst>
+                        <p:cond delay="indefinite"/>
+                      </p:stCondLst>
+                      <p:childTnLst>
+                        <p:par>
+                          <p:cTn id="14" fill="hold">
+                            <p:stCondLst>
+                              <p:cond delay="0"/>
+                            </p:stCondLst>
+                            <p:childTnLst>
+                              <p:par>
+                                <p:cTn id="15" presetID="10" presetClass="entr" presetSubtype="0" fill="hold" grpId="0" nodeType="clickEffect">
+                                  <p:stCondLst>
+                                    <p:cond delay="0"/>
+                                  </p:stCondLst>
+                                  <p:childTnLst>
+                                    <p:set>
+                                      <p:cBhvr>
+                                        <p:cTn id="16" dur="1" fill="hold">
+                                          <p:stCondLst>
+                                            <p:cond delay="0"/>
+                                          </p:stCondLst>
+                                        </p:cTn>
+                                        <p:tgtEl>
+                                          <p:spTgt spid="9"/>
+                                        </p:tgtEl>
+                                        <p:attrNameLst>
+                                          <p:attrName>style.visibility</p:attrName>
+                                        </p:attrNameLst>
+                                      </p:cBhvr>
+                                      <p:to>
+                                        <p:strVal val="visible"/>
+                                      </p:to>
+                                    </p:set>
+                                    <p:animEffect transition="in" filter="fade">
+                                      <p:cBhvr>
+                                        <p:cTn id="17" dur="500"/>
+                                        <p:tgtEl>
+                                          <p:spTgt spid="9"/>
+                                        </p:tgtEl>
+                                      </p:cBhvr>
+                                    </p:animEffect>
+                                  </p:childTnLst>
+                                </p:cTn>
+                              </p:par>
+                            </p:childTnLst>
+                          </p:cTn>
+                        </p:par>
+                      </p:childTnLst>
+                    </p:cTn>
+                  </p:par>
+                </p:childTnLst>
+              </p:cTn>
+              <p:prevCondLst>
+                <p:cond evt="onPrev" delay="0">
+                  <p:tgtEl>
+                    <p:sldTgt/>
+                  </p:tgtEl>
+                </p:cond>
+              </p:prevCondLst>
+              <p:nextCondLst>
+                <p:cond evt="onNext" delay="0">
+                  <p:tgtEl>
+                    <p:sldTgt/>
+                  </p:tgtEl>
+                </p:cond>
+              </p:nextCondLst>
+            </p:seq>
+          </p:childTnLst>
+        </p:cTn>
+      </p:par>
+    </p:tnLst>
+    <p:bldLst>
+      <p:bldP spid="7" grpId="0" animBg="1"/>
+      <p:bldP spid="8" grpId="0" animBg="1"/>
+      <p:bldP spid="9" grpId="0" animBg="1"/>
+    </p:bldLst>
+  </p:timing>
 </p:sld>
 </file>
 
@@ -20850,7 +24438,13 @@
   <p:cSld>
     <p:spTree>
       <p:nvGrpSpPr>
-        <p:cNvPr id="1" name=""/>
+        <p:cNvPr id="1" name="">
+          <a:extLst>
+            <a:ext uri="{FF2B5EF4-FFF2-40B4-BE49-F238E27FC236}">
+              <a16:creationId xmlns:a16="http://schemas.microsoft.com/office/drawing/2014/main" id="{9414F307-D522-3B18-42B5-830BA7D596BF}"/>
+            </a:ext>
+          </a:extLst>
+        </p:cNvPr>
         <p:cNvGrpSpPr/>
         <p:nvPr/>
       </p:nvGrpSpPr>
@@ -20862,246 +24456,41 @@
           <a:chExt cx="0" cy="0"/>
         </a:xfrm>
       </p:grpSpPr>
-      <p:cxnSp>
-        <p:nvCxnSpPr>
-          <p:cNvPr id="2" name="Straight Connector 1">
-            <a:extLst>
-              <a:ext uri="{FF2B5EF4-FFF2-40B4-BE49-F238E27FC236}">
-                <a16:creationId xmlns:a16="http://schemas.microsoft.com/office/drawing/2014/main" id="{21C6476B-9468-981C-6026-3BF4D1B3AA6A}"/>
-              </a:ext>
-            </a:extLst>
-          </p:cNvPr>
-          <p:cNvCxnSpPr/>
-          <p:nvPr/>
-        </p:nvCxnSpPr>
-        <p:spPr>
-          <a:xfrm>
-            <a:off x="9629486" y="1948583"/>
-            <a:ext cx="0" cy="3888432"/>
-          </a:xfrm>
-          <a:prstGeom prst="line">
-            <a:avLst/>
-          </a:prstGeom>
-          <a:ln w="25400">
-            <a:solidFill>
-              <a:schemeClr val="tx1">
-                <a:lumMod val="50000"/>
-                <a:lumOff val="50000"/>
-              </a:schemeClr>
-            </a:solidFill>
-          </a:ln>
-        </p:spPr>
-        <p:style>
-          <a:lnRef idx="1">
-            <a:schemeClr val="accent1"/>
-          </a:lnRef>
-          <a:fillRef idx="0">
-            <a:schemeClr val="accent1"/>
-          </a:fillRef>
-          <a:effectRef idx="0">
-            <a:schemeClr val="accent1"/>
-          </a:effectRef>
-          <a:fontRef idx="minor">
-            <a:schemeClr val="tx1"/>
-          </a:fontRef>
-        </p:style>
-      </p:cxnSp>
-      <p:cxnSp>
-        <p:nvCxnSpPr>
-          <p:cNvPr id="6" name="Straight Connector 5">
-            <a:extLst>
-              <a:ext uri="{FF2B5EF4-FFF2-40B4-BE49-F238E27FC236}">
-                <a16:creationId xmlns:a16="http://schemas.microsoft.com/office/drawing/2014/main" id="{45872F0D-54A4-9619-D6C0-F792CFA75DF4}"/>
-              </a:ext>
-            </a:extLst>
-          </p:cNvPr>
-          <p:cNvCxnSpPr/>
-          <p:nvPr/>
-        </p:nvCxnSpPr>
-        <p:spPr>
-          <a:xfrm>
-            <a:off x="9692841" y="1948583"/>
-            <a:ext cx="0" cy="3888432"/>
-          </a:xfrm>
-          <a:prstGeom prst="line">
-            <a:avLst/>
-          </a:prstGeom>
-          <a:ln w="25400">
-            <a:solidFill>
-              <a:schemeClr val="tx1">
-                <a:lumMod val="50000"/>
-                <a:lumOff val="50000"/>
-              </a:schemeClr>
-            </a:solidFill>
-          </a:ln>
-        </p:spPr>
-        <p:style>
-          <a:lnRef idx="1">
-            <a:schemeClr val="accent1"/>
-          </a:lnRef>
-          <a:fillRef idx="0">
-            <a:schemeClr val="accent1"/>
-          </a:fillRef>
-          <a:effectRef idx="0">
-            <a:schemeClr val="accent1"/>
-          </a:effectRef>
-          <a:fontRef idx="minor">
-            <a:schemeClr val="tx1"/>
-          </a:fontRef>
-        </p:style>
-      </p:cxnSp>
-      <p:cxnSp>
-        <p:nvCxnSpPr>
-          <p:cNvPr id="68" name="Straight Connector 67">
-            <a:extLst>
-              <a:ext uri="{FF2B5EF4-FFF2-40B4-BE49-F238E27FC236}">
-                <a16:creationId xmlns:a16="http://schemas.microsoft.com/office/drawing/2014/main" id="{F52DAA16-B176-34E7-4AAC-3FC5FB383875}"/>
-              </a:ext>
-            </a:extLst>
-          </p:cNvPr>
-          <p:cNvCxnSpPr/>
-          <p:nvPr/>
-        </p:nvCxnSpPr>
-        <p:spPr>
-          <a:xfrm>
-            <a:off x="9764849" y="1948583"/>
-            <a:ext cx="0" cy="3888432"/>
-          </a:xfrm>
-          <a:prstGeom prst="line">
-            <a:avLst/>
-          </a:prstGeom>
-          <a:ln w="25400">
-            <a:solidFill>
-              <a:schemeClr val="tx1">
-                <a:lumMod val="50000"/>
-                <a:lumOff val="50000"/>
-              </a:schemeClr>
-            </a:solidFill>
-          </a:ln>
-        </p:spPr>
-        <p:style>
-          <a:lnRef idx="1">
-            <a:schemeClr val="accent1"/>
-          </a:lnRef>
-          <a:fillRef idx="0">
-            <a:schemeClr val="accent1"/>
-          </a:fillRef>
-          <a:effectRef idx="0">
-            <a:schemeClr val="accent1"/>
-          </a:effectRef>
-          <a:fontRef idx="minor">
-            <a:schemeClr val="tx1"/>
-          </a:fontRef>
-        </p:style>
-      </p:cxnSp>
-      <p:cxnSp>
-        <p:nvCxnSpPr>
-          <p:cNvPr id="69" name="Straight Connector 68">
-            <a:extLst>
-              <a:ext uri="{FF2B5EF4-FFF2-40B4-BE49-F238E27FC236}">
-                <a16:creationId xmlns:a16="http://schemas.microsoft.com/office/drawing/2014/main" id="{80140DF5-E73A-E117-B4B8-9547AD809C66}"/>
-              </a:ext>
-            </a:extLst>
-          </p:cNvPr>
-          <p:cNvCxnSpPr/>
-          <p:nvPr/>
-        </p:nvCxnSpPr>
-        <p:spPr>
-          <a:xfrm>
-            <a:off x="9836857" y="1948583"/>
-            <a:ext cx="0" cy="3888432"/>
-          </a:xfrm>
-          <a:prstGeom prst="line">
-            <a:avLst/>
-          </a:prstGeom>
-          <a:ln w="25400">
-            <a:solidFill>
-              <a:schemeClr val="tx1">
-                <a:lumMod val="50000"/>
-                <a:lumOff val="50000"/>
-              </a:schemeClr>
-            </a:solidFill>
-          </a:ln>
-        </p:spPr>
-        <p:style>
-          <a:lnRef idx="1">
-            <a:schemeClr val="accent1"/>
-          </a:lnRef>
-          <a:fillRef idx="0">
-            <a:schemeClr val="accent1"/>
-          </a:fillRef>
-          <a:effectRef idx="0">
-            <a:schemeClr val="accent1"/>
-          </a:effectRef>
-          <a:fontRef idx="minor">
-            <a:schemeClr val="tx1"/>
-          </a:fontRef>
-        </p:style>
-      </p:cxnSp>
-      <p:sp>
-        <p:nvSpPr>
-          <p:cNvPr id="70" name="Arrow: Bent 69">
-            <a:extLst>
-              <a:ext uri="{FF2B5EF4-FFF2-40B4-BE49-F238E27FC236}">
-                <a16:creationId xmlns:a16="http://schemas.microsoft.com/office/drawing/2014/main" id="{1EF57EDB-54B5-EFBA-8367-966BE8B1AC3A}"/>
-              </a:ext>
-            </a:extLst>
-          </p:cNvPr>
-          <p:cNvSpPr/>
-          <p:nvPr/>
-        </p:nvSpPr>
-        <p:spPr>
-          <a:xfrm>
-            <a:off x="1987986" y="2295330"/>
-            <a:ext cx="2503901" cy="921367"/>
-          </a:xfrm>
-          <a:prstGeom prst="bentArrow">
-            <a:avLst/>
-          </a:prstGeom>
-        </p:spPr>
-        <p:style>
-          <a:lnRef idx="2">
-            <a:schemeClr val="accent1">
-              <a:shade val="50000"/>
-            </a:schemeClr>
-          </a:lnRef>
-          <a:fillRef idx="1">
-            <a:schemeClr val="accent1"/>
-          </a:fillRef>
-          <a:effectRef idx="0">
-            <a:schemeClr val="accent1"/>
-          </a:effectRef>
-          <a:fontRef idx="minor">
-            <a:schemeClr val="lt1"/>
-          </a:fontRef>
-        </p:style>
+      <p:sp>
+        <p:nvSpPr>
+          <p:cNvPr id="2" name="Title 1">
+            <a:extLst>
+              <a:ext uri="{FF2B5EF4-FFF2-40B4-BE49-F238E27FC236}">
+                <a16:creationId xmlns:a16="http://schemas.microsoft.com/office/drawing/2014/main" id="{2C014FB1-B7BA-DD3C-E234-58C3D2EE8AEB}"/>
+              </a:ext>
+            </a:extLst>
+          </p:cNvPr>
+          <p:cNvSpPr>
+            <a:spLocks noGrp="1"/>
+          </p:cNvSpPr>
+          <p:nvPr>
+            <p:ph type="title"/>
+          </p:nvPr>
+        </p:nvSpPr>
+        <p:spPr/>
         <p:txBody>
-          <a:bodyPr rtlCol="0" anchor="ctr"/>
+          <a:bodyPr/>
           <a:lstStyle/>
           <a:p>
-            <a:pPr algn="ctr"/>
-            <a:r>
-              <a:rPr lang="sv-SE" sz="1400">
-                <a:solidFill>
-                  <a:schemeClr val="tx1"/>
-                </a:solidFill>
-              </a:rPr>
-              <a:t>Addressbuss (32 bitar)</a:t>
-            </a:r>
-            <a:endParaRPr lang="en-SE" sz="1400">
-              <a:solidFill>
-                <a:schemeClr val="tx1"/>
-              </a:solidFill>
-            </a:endParaRPr>
+            <a:r>
+              <a:rPr lang="sv-SE"/>
+              <a:t>Memory Alignment (repetition)</a:t>
+            </a:r>
+            <a:endParaRPr lang="LID4096"/>
           </a:p>
         </p:txBody>
       </p:sp>
       <p:pic>
         <p:nvPicPr>
-          <p:cNvPr id="71" name="Picture 70">
-            <a:extLst>
-              <a:ext uri="{FF2B5EF4-FFF2-40B4-BE49-F238E27FC236}">
-                <a16:creationId xmlns:a16="http://schemas.microsoft.com/office/drawing/2014/main" id="{1AC6C511-23FD-7DC9-E1CA-E7029DAC0DB0}"/>
+          <p:cNvPr id="4" name="Picture 3">
+            <a:extLst>
+              <a:ext uri="{FF2B5EF4-FFF2-40B4-BE49-F238E27FC236}">
+                <a16:creationId xmlns:a16="http://schemas.microsoft.com/office/drawing/2014/main" id="{4E738D9F-3B69-5412-B763-B4873DA794C0}"/>
               </a:ext>
             </a:extLst>
           </p:cNvPr>
@@ -21111,3024 +24500,25 @@
           <p:nvPr/>
         </p:nvPicPr>
         <p:blipFill>
-          <a:blip r:embed="rId2"/>
+          <a:blip r:embed="rId3"/>
           <a:stretch>
             <a:fillRect/>
           </a:stretch>
         </p:blipFill>
         <p:spPr>
           <a:xfrm>
-            <a:off x="1051881" y="3217986"/>
-            <a:ext cx="1676634" cy="1467055"/>
+            <a:off x="1012069" y="1985974"/>
+            <a:ext cx="9948032" cy="4563157"/>
           </a:xfrm>
           <a:prstGeom prst="rect">
             <a:avLst/>
           </a:prstGeom>
         </p:spPr>
       </p:pic>
-      <p:cxnSp>
-        <p:nvCxnSpPr>
-          <p:cNvPr id="72" name="Straight Connector 71">
-            <a:extLst>
-              <a:ext uri="{FF2B5EF4-FFF2-40B4-BE49-F238E27FC236}">
-                <a16:creationId xmlns:a16="http://schemas.microsoft.com/office/drawing/2014/main" id="{02F36583-A6A2-9015-E655-3586D669F60A}"/>
-              </a:ext>
-            </a:extLst>
-          </p:cNvPr>
-          <p:cNvCxnSpPr/>
-          <p:nvPr/>
-        </p:nvCxnSpPr>
-        <p:spPr>
-          <a:xfrm>
-            <a:off x="7685270" y="1948583"/>
-            <a:ext cx="0" cy="3888432"/>
-          </a:xfrm>
-          <a:prstGeom prst="line">
-            <a:avLst/>
-          </a:prstGeom>
-          <a:ln w="25400">
-            <a:solidFill>
-              <a:schemeClr val="tx1">
-                <a:lumMod val="50000"/>
-                <a:lumOff val="50000"/>
-              </a:schemeClr>
-            </a:solidFill>
-          </a:ln>
-        </p:spPr>
-        <p:style>
-          <a:lnRef idx="1">
-            <a:schemeClr val="accent1"/>
-          </a:lnRef>
-          <a:fillRef idx="0">
-            <a:schemeClr val="accent1"/>
-          </a:fillRef>
-          <a:effectRef idx="0">
-            <a:schemeClr val="accent1"/>
-          </a:effectRef>
-          <a:fontRef idx="minor">
-            <a:schemeClr val="tx1"/>
-          </a:fontRef>
-        </p:style>
-      </p:cxnSp>
-      <p:cxnSp>
-        <p:nvCxnSpPr>
-          <p:cNvPr id="73" name="Straight Connector 72">
-            <a:extLst>
-              <a:ext uri="{FF2B5EF4-FFF2-40B4-BE49-F238E27FC236}">
-                <a16:creationId xmlns:a16="http://schemas.microsoft.com/office/drawing/2014/main" id="{3F0D35E7-8332-B085-7FB2-AFE97D203E60}"/>
-              </a:ext>
-            </a:extLst>
-          </p:cNvPr>
-          <p:cNvCxnSpPr/>
-          <p:nvPr/>
-        </p:nvCxnSpPr>
-        <p:spPr>
-          <a:xfrm>
-            <a:off x="7757278" y="1948583"/>
-            <a:ext cx="0" cy="3888432"/>
-          </a:xfrm>
-          <a:prstGeom prst="line">
-            <a:avLst/>
-          </a:prstGeom>
-          <a:ln w="25400">
-            <a:solidFill>
-              <a:schemeClr val="tx1">
-                <a:lumMod val="50000"/>
-                <a:lumOff val="50000"/>
-              </a:schemeClr>
-            </a:solidFill>
-          </a:ln>
-        </p:spPr>
-        <p:style>
-          <a:lnRef idx="1">
-            <a:schemeClr val="accent1"/>
-          </a:lnRef>
-          <a:fillRef idx="0">
-            <a:schemeClr val="accent1"/>
-          </a:fillRef>
-          <a:effectRef idx="0">
-            <a:schemeClr val="accent1"/>
-          </a:effectRef>
-          <a:fontRef idx="minor">
-            <a:schemeClr val="tx1"/>
-          </a:fontRef>
-        </p:style>
-      </p:cxnSp>
-      <p:cxnSp>
-        <p:nvCxnSpPr>
-          <p:cNvPr id="74" name="Straight Connector 73">
-            <a:extLst>
-              <a:ext uri="{FF2B5EF4-FFF2-40B4-BE49-F238E27FC236}">
-                <a16:creationId xmlns:a16="http://schemas.microsoft.com/office/drawing/2014/main" id="{6665E65D-4FA6-30AA-B69A-083CE0698F70}"/>
-              </a:ext>
-            </a:extLst>
-          </p:cNvPr>
-          <p:cNvCxnSpPr/>
-          <p:nvPr/>
-        </p:nvCxnSpPr>
-        <p:spPr>
-          <a:xfrm>
-            <a:off x="7829286" y="1948583"/>
-            <a:ext cx="0" cy="3888432"/>
-          </a:xfrm>
-          <a:prstGeom prst="line">
-            <a:avLst/>
-          </a:prstGeom>
-          <a:ln w="25400">
-            <a:solidFill>
-              <a:schemeClr val="tx1">
-                <a:lumMod val="50000"/>
-                <a:lumOff val="50000"/>
-              </a:schemeClr>
-            </a:solidFill>
-          </a:ln>
-        </p:spPr>
-        <p:style>
-          <a:lnRef idx="1">
-            <a:schemeClr val="accent1"/>
-          </a:lnRef>
-          <a:fillRef idx="0">
-            <a:schemeClr val="accent1"/>
-          </a:fillRef>
-          <a:effectRef idx="0">
-            <a:schemeClr val="accent1"/>
-          </a:effectRef>
-          <a:fontRef idx="minor">
-            <a:schemeClr val="tx1"/>
-          </a:fontRef>
-        </p:style>
-      </p:cxnSp>
-      <p:cxnSp>
-        <p:nvCxnSpPr>
-          <p:cNvPr id="75" name="Straight Connector 74">
-            <a:extLst>
-              <a:ext uri="{FF2B5EF4-FFF2-40B4-BE49-F238E27FC236}">
-                <a16:creationId xmlns:a16="http://schemas.microsoft.com/office/drawing/2014/main" id="{2E52384B-10F3-39CA-F62E-F689A1B232F7}"/>
-              </a:ext>
-            </a:extLst>
-          </p:cNvPr>
-          <p:cNvCxnSpPr/>
-          <p:nvPr/>
-        </p:nvCxnSpPr>
-        <p:spPr>
-          <a:xfrm>
-            <a:off x="7901294" y="1948583"/>
-            <a:ext cx="0" cy="3888432"/>
-          </a:xfrm>
-          <a:prstGeom prst="line">
-            <a:avLst/>
-          </a:prstGeom>
-          <a:ln w="25400">
-            <a:solidFill>
-              <a:schemeClr val="tx1">
-                <a:lumMod val="50000"/>
-                <a:lumOff val="50000"/>
-              </a:schemeClr>
-            </a:solidFill>
-          </a:ln>
-        </p:spPr>
-        <p:style>
-          <a:lnRef idx="1">
-            <a:schemeClr val="accent1"/>
-          </a:lnRef>
-          <a:fillRef idx="0">
-            <a:schemeClr val="accent1"/>
-          </a:fillRef>
-          <a:effectRef idx="0">
-            <a:schemeClr val="accent1"/>
-          </a:effectRef>
-          <a:fontRef idx="minor">
-            <a:schemeClr val="tx1"/>
-          </a:fontRef>
-        </p:style>
-      </p:cxnSp>
-      <p:cxnSp>
-        <p:nvCxnSpPr>
-          <p:cNvPr id="76" name="Straight Connector 75">
-            <a:extLst>
-              <a:ext uri="{FF2B5EF4-FFF2-40B4-BE49-F238E27FC236}">
-                <a16:creationId xmlns:a16="http://schemas.microsoft.com/office/drawing/2014/main" id="{9CFC7DBE-979D-C90E-07A3-38AAA1D5D466}"/>
-              </a:ext>
-            </a:extLst>
-          </p:cNvPr>
-          <p:cNvCxnSpPr/>
-          <p:nvPr/>
-        </p:nvCxnSpPr>
-        <p:spPr>
-          <a:xfrm>
-            <a:off x="7973302" y="1948583"/>
-            <a:ext cx="0" cy="3888432"/>
-          </a:xfrm>
-          <a:prstGeom prst="line">
-            <a:avLst/>
-          </a:prstGeom>
-          <a:ln w="25400">
-            <a:solidFill>
-              <a:schemeClr val="tx1">
-                <a:lumMod val="50000"/>
-                <a:lumOff val="50000"/>
-              </a:schemeClr>
-            </a:solidFill>
-          </a:ln>
-        </p:spPr>
-        <p:style>
-          <a:lnRef idx="1">
-            <a:schemeClr val="accent1"/>
-          </a:lnRef>
-          <a:fillRef idx="0">
-            <a:schemeClr val="accent1"/>
-          </a:fillRef>
-          <a:effectRef idx="0">
-            <a:schemeClr val="accent1"/>
-          </a:effectRef>
-          <a:fontRef idx="minor">
-            <a:schemeClr val="tx1"/>
-          </a:fontRef>
-        </p:style>
-      </p:cxnSp>
-      <p:cxnSp>
-        <p:nvCxnSpPr>
-          <p:cNvPr id="77" name="Straight Connector 76">
-            <a:extLst>
-              <a:ext uri="{FF2B5EF4-FFF2-40B4-BE49-F238E27FC236}">
-                <a16:creationId xmlns:a16="http://schemas.microsoft.com/office/drawing/2014/main" id="{214AA44B-509E-3A17-2EB9-2D5C54CB90E7}"/>
-              </a:ext>
-            </a:extLst>
-          </p:cNvPr>
-          <p:cNvCxnSpPr/>
-          <p:nvPr/>
-        </p:nvCxnSpPr>
-        <p:spPr>
-          <a:xfrm>
-            <a:off x="8045310" y="1948583"/>
-            <a:ext cx="0" cy="3888432"/>
-          </a:xfrm>
-          <a:prstGeom prst="line">
-            <a:avLst/>
-          </a:prstGeom>
-          <a:ln w="25400">
-            <a:solidFill>
-              <a:schemeClr val="tx1">
-                <a:lumMod val="50000"/>
-                <a:lumOff val="50000"/>
-              </a:schemeClr>
-            </a:solidFill>
-          </a:ln>
-        </p:spPr>
-        <p:style>
-          <a:lnRef idx="1">
-            <a:schemeClr val="accent1"/>
-          </a:lnRef>
-          <a:fillRef idx="0">
-            <a:schemeClr val="accent1"/>
-          </a:fillRef>
-          <a:effectRef idx="0">
-            <a:schemeClr val="accent1"/>
-          </a:effectRef>
-          <a:fontRef idx="minor">
-            <a:schemeClr val="tx1"/>
-          </a:fontRef>
-        </p:style>
-      </p:cxnSp>
-      <p:cxnSp>
-        <p:nvCxnSpPr>
-          <p:cNvPr id="78" name="Straight Connector 77">
-            <a:extLst>
-              <a:ext uri="{FF2B5EF4-FFF2-40B4-BE49-F238E27FC236}">
-                <a16:creationId xmlns:a16="http://schemas.microsoft.com/office/drawing/2014/main" id="{61B8719C-1D49-6815-918D-997752BA24DE}"/>
-              </a:ext>
-            </a:extLst>
-          </p:cNvPr>
-          <p:cNvCxnSpPr/>
-          <p:nvPr/>
-        </p:nvCxnSpPr>
-        <p:spPr>
-          <a:xfrm>
-            <a:off x="8117318" y="1948583"/>
-            <a:ext cx="0" cy="3888432"/>
-          </a:xfrm>
-          <a:prstGeom prst="line">
-            <a:avLst/>
-          </a:prstGeom>
-          <a:ln w="25400">
-            <a:solidFill>
-              <a:schemeClr val="tx1">
-                <a:lumMod val="50000"/>
-                <a:lumOff val="50000"/>
-              </a:schemeClr>
-            </a:solidFill>
-          </a:ln>
-        </p:spPr>
-        <p:style>
-          <a:lnRef idx="1">
-            <a:schemeClr val="accent1"/>
-          </a:lnRef>
-          <a:fillRef idx="0">
-            <a:schemeClr val="accent1"/>
-          </a:fillRef>
-          <a:effectRef idx="0">
-            <a:schemeClr val="accent1"/>
-          </a:effectRef>
-          <a:fontRef idx="minor">
-            <a:schemeClr val="tx1"/>
-          </a:fontRef>
-        </p:style>
-      </p:cxnSp>
-      <p:cxnSp>
-        <p:nvCxnSpPr>
-          <p:cNvPr id="79" name="Straight Connector 78">
-            <a:extLst>
-              <a:ext uri="{FF2B5EF4-FFF2-40B4-BE49-F238E27FC236}">
-                <a16:creationId xmlns:a16="http://schemas.microsoft.com/office/drawing/2014/main" id="{71880750-DC5F-7A17-8FF8-95A7EFFA4963}"/>
-              </a:ext>
-            </a:extLst>
-          </p:cNvPr>
-          <p:cNvCxnSpPr/>
-          <p:nvPr/>
-        </p:nvCxnSpPr>
-        <p:spPr>
-          <a:xfrm>
-            <a:off x="8189326" y="1948583"/>
-            <a:ext cx="0" cy="3888432"/>
-          </a:xfrm>
-          <a:prstGeom prst="line">
-            <a:avLst/>
-          </a:prstGeom>
-          <a:ln w="25400">
-            <a:solidFill>
-              <a:schemeClr val="tx1">
-                <a:lumMod val="50000"/>
-                <a:lumOff val="50000"/>
-              </a:schemeClr>
-            </a:solidFill>
-          </a:ln>
-        </p:spPr>
-        <p:style>
-          <a:lnRef idx="1">
-            <a:schemeClr val="accent1"/>
-          </a:lnRef>
-          <a:fillRef idx="0">
-            <a:schemeClr val="accent1"/>
-          </a:fillRef>
-          <a:effectRef idx="0">
-            <a:schemeClr val="accent1"/>
-          </a:effectRef>
-          <a:fontRef idx="minor">
-            <a:schemeClr val="tx1"/>
-          </a:fontRef>
-        </p:style>
-      </p:cxnSp>
-      <p:sp>
-        <p:nvSpPr>
-          <p:cNvPr id="80" name="TextBox 79">
-            <a:extLst>
-              <a:ext uri="{FF2B5EF4-FFF2-40B4-BE49-F238E27FC236}">
-                <a16:creationId xmlns:a16="http://schemas.microsoft.com/office/drawing/2014/main" id="{B1FA97B7-7D24-CBD1-243C-8939786E2E0C}"/>
-              </a:ext>
-            </a:extLst>
-          </p:cNvPr>
-          <p:cNvSpPr txBox="1"/>
-          <p:nvPr/>
-        </p:nvSpPr>
-        <p:spPr>
-          <a:xfrm>
-            <a:off x="9720227" y="3596868"/>
-            <a:ext cx="1560379" cy="276999"/>
-          </a:xfrm>
-          <a:prstGeom prst="rect">
-            <a:avLst/>
-          </a:prstGeom>
-          <a:noFill/>
-        </p:spPr>
-        <p:txBody>
-          <a:bodyPr wrap="square">
-            <a:spAutoFit/>
-          </a:bodyPr>
-          <a:lstStyle/>
-          <a:p>
-            <a:pPr algn="ctr"/>
-            <a:r>
-              <a:rPr lang="sv-SE" sz="1200">
-                <a:solidFill>
-                  <a:schemeClr val="bg1">
-                    <a:lumMod val="65000"/>
-                  </a:schemeClr>
-                </a:solidFill>
-              </a:rPr>
-              <a:t>0x20000008</a:t>
-            </a:r>
-            <a:endParaRPr lang="en-SE" sz="1200">
-              <a:solidFill>
-                <a:schemeClr val="bg1">
-                  <a:lumMod val="65000"/>
-                </a:schemeClr>
-              </a:solidFill>
-            </a:endParaRPr>
-          </a:p>
-        </p:txBody>
-      </p:sp>
-      <p:cxnSp>
-        <p:nvCxnSpPr>
-          <p:cNvPr id="81" name="Connector: Elbow 80">
-            <a:extLst>
-              <a:ext uri="{FF2B5EF4-FFF2-40B4-BE49-F238E27FC236}">
-                <a16:creationId xmlns:a16="http://schemas.microsoft.com/office/drawing/2014/main" id="{D9862F3B-E418-3C85-50A3-7B2D1B36F653}"/>
-              </a:ext>
-            </a:extLst>
-          </p:cNvPr>
-          <p:cNvCxnSpPr>
-            <a:cxnSpLocks/>
-          </p:cNvCxnSpPr>
-          <p:nvPr/>
-        </p:nvCxnSpPr>
-        <p:spPr>
-          <a:xfrm>
-            <a:off x="5948421" y="2570305"/>
-            <a:ext cx="1520361" cy="943281"/>
-          </a:xfrm>
-          <a:prstGeom prst="bentConnector3">
-            <a:avLst/>
-          </a:prstGeom>
-          <a:ln w="25400">
-            <a:solidFill>
-              <a:srgbClr val="C00000"/>
-            </a:solidFill>
-            <a:tailEnd type="triangle"/>
-          </a:ln>
-        </p:spPr>
-        <p:style>
-          <a:lnRef idx="1">
-            <a:schemeClr val="accent1"/>
-          </a:lnRef>
-          <a:fillRef idx="0">
-            <a:schemeClr val="accent1"/>
-          </a:fillRef>
-          <a:effectRef idx="0">
-            <a:schemeClr val="accent1"/>
-          </a:effectRef>
-          <a:fontRef idx="minor">
-            <a:schemeClr val="tx1"/>
-          </a:fontRef>
-        </p:style>
-      </p:cxnSp>
-      <p:sp>
-        <p:nvSpPr>
-          <p:cNvPr id="82" name="Arrow: Bent 81">
-            <a:extLst>
-              <a:ext uri="{FF2B5EF4-FFF2-40B4-BE49-F238E27FC236}">
-                <a16:creationId xmlns:a16="http://schemas.microsoft.com/office/drawing/2014/main" id="{0F56FF66-3FCB-9EEB-8BA4-4EBB9CC51F00}"/>
-              </a:ext>
-            </a:extLst>
-          </p:cNvPr>
-          <p:cNvSpPr/>
-          <p:nvPr/>
-        </p:nvSpPr>
-        <p:spPr>
-          <a:xfrm rot="5400000" flipH="1" flipV="1">
-            <a:off x="3959035" y="2696218"/>
-            <a:ext cx="1242470" cy="5625270"/>
-          </a:xfrm>
-          <a:prstGeom prst="bentArrow">
-            <a:avLst>
-              <a:gd name="adj1" fmla="val 21049"/>
-              <a:gd name="adj2" fmla="val 18162"/>
-              <a:gd name="adj3" fmla="val 27566"/>
-              <a:gd name="adj4" fmla="val 43097"/>
-            </a:avLst>
-          </a:prstGeom>
-        </p:spPr>
-        <p:style>
-          <a:lnRef idx="2">
-            <a:schemeClr val="accent1">
-              <a:shade val="50000"/>
-            </a:schemeClr>
-          </a:lnRef>
-          <a:fillRef idx="1">
-            <a:schemeClr val="accent1"/>
-          </a:fillRef>
-          <a:effectRef idx="0">
-            <a:schemeClr val="accent1"/>
-          </a:effectRef>
-          <a:fontRef idx="minor">
-            <a:schemeClr val="lt1"/>
-          </a:fontRef>
-        </p:style>
-        <p:txBody>
-          <a:bodyPr rtlCol="0" anchor="ctr"/>
-          <a:lstStyle/>
-          <a:p>
-            <a:pPr algn="ctr"/>
-            <a:endParaRPr lang="en-SE">
-              <a:solidFill>
-                <a:schemeClr val="tx1"/>
-              </a:solidFill>
-            </a:endParaRPr>
-          </a:p>
-        </p:txBody>
-      </p:sp>
-      <p:sp>
-        <p:nvSpPr>
-          <p:cNvPr id="84" name="TextBox 83">
-            <a:extLst>
-              <a:ext uri="{FF2B5EF4-FFF2-40B4-BE49-F238E27FC236}">
-                <a16:creationId xmlns:a16="http://schemas.microsoft.com/office/drawing/2014/main" id="{C434D61C-B882-3BAF-09DF-5F70AD95D55C}"/>
-              </a:ext>
-            </a:extLst>
-          </p:cNvPr>
-          <p:cNvSpPr txBox="1"/>
-          <p:nvPr/>
-        </p:nvSpPr>
-        <p:spPr>
-          <a:xfrm>
-            <a:off x="4292241" y="5529449"/>
-            <a:ext cx="1571649" cy="307777"/>
-          </a:xfrm>
-          <a:prstGeom prst="rect">
-            <a:avLst/>
-          </a:prstGeom>
-          <a:noFill/>
-        </p:spPr>
-        <p:txBody>
-          <a:bodyPr wrap="none" rtlCol="0">
-            <a:spAutoFit/>
-          </a:bodyPr>
-          <a:lstStyle/>
-          <a:p>
-            <a:r>
-              <a:rPr lang="sv-SE" sz="1400"/>
-              <a:t>Databuss (32 bitar)</a:t>
-            </a:r>
-            <a:endParaRPr lang="en-SE" sz="1400"/>
-          </a:p>
-        </p:txBody>
-      </p:sp>
-      <p:cxnSp>
-        <p:nvCxnSpPr>
-          <p:cNvPr id="85" name="Straight Connector 84">
-            <a:extLst>
-              <a:ext uri="{FF2B5EF4-FFF2-40B4-BE49-F238E27FC236}">
-                <a16:creationId xmlns:a16="http://schemas.microsoft.com/office/drawing/2014/main" id="{0E2EE41F-C01F-7D58-F4EC-13A5974D0914}"/>
-              </a:ext>
-            </a:extLst>
-          </p:cNvPr>
-          <p:cNvCxnSpPr/>
-          <p:nvPr/>
-        </p:nvCxnSpPr>
-        <p:spPr>
-          <a:xfrm>
-            <a:off x="8252681" y="1948583"/>
-            <a:ext cx="0" cy="3888432"/>
-          </a:xfrm>
-          <a:prstGeom prst="line">
-            <a:avLst/>
-          </a:prstGeom>
-          <a:ln w="25400">
-            <a:solidFill>
-              <a:schemeClr val="tx1">
-                <a:lumMod val="50000"/>
-                <a:lumOff val="50000"/>
-              </a:schemeClr>
-            </a:solidFill>
-          </a:ln>
-        </p:spPr>
-        <p:style>
-          <a:lnRef idx="1">
-            <a:schemeClr val="accent1"/>
-          </a:lnRef>
-          <a:fillRef idx="0">
-            <a:schemeClr val="accent1"/>
-          </a:fillRef>
-          <a:effectRef idx="0">
-            <a:schemeClr val="accent1"/>
-          </a:effectRef>
-          <a:fontRef idx="minor">
-            <a:schemeClr val="tx1"/>
-          </a:fontRef>
-        </p:style>
-      </p:cxnSp>
-      <p:cxnSp>
-        <p:nvCxnSpPr>
-          <p:cNvPr id="86" name="Straight Connector 85">
-            <a:extLst>
-              <a:ext uri="{FF2B5EF4-FFF2-40B4-BE49-F238E27FC236}">
-                <a16:creationId xmlns:a16="http://schemas.microsoft.com/office/drawing/2014/main" id="{F6A1B45B-1E7D-836F-E9E8-35AE7FC16169}"/>
-              </a:ext>
-            </a:extLst>
-          </p:cNvPr>
-          <p:cNvCxnSpPr/>
-          <p:nvPr/>
-        </p:nvCxnSpPr>
-        <p:spPr>
-          <a:xfrm>
-            <a:off x="8324689" y="1948583"/>
-            <a:ext cx="0" cy="3888432"/>
-          </a:xfrm>
-          <a:prstGeom prst="line">
-            <a:avLst/>
-          </a:prstGeom>
-          <a:ln w="25400">
-            <a:solidFill>
-              <a:schemeClr val="tx1">
-                <a:lumMod val="50000"/>
-                <a:lumOff val="50000"/>
-              </a:schemeClr>
-            </a:solidFill>
-          </a:ln>
-        </p:spPr>
-        <p:style>
-          <a:lnRef idx="1">
-            <a:schemeClr val="accent1"/>
-          </a:lnRef>
-          <a:fillRef idx="0">
-            <a:schemeClr val="accent1"/>
-          </a:fillRef>
-          <a:effectRef idx="0">
-            <a:schemeClr val="accent1"/>
-          </a:effectRef>
-          <a:fontRef idx="minor">
-            <a:schemeClr val="tx1"/>
-          </a:fontRef>
-        </p:style>
-      </p:cxnSp>
-      <p:cxnSp>
-        <p:nvCxnSpPr>
-          <p:cNvPr id="87" name="Straight Connector 86">
-            <a:extLst>
-              <a:ext uri="{FF2B5EF4-FFF2-40B4-BE49-F238E27FC236}">
-                <a16:creationId xmlns:a16="http://schemas.microsoft.com/office/drawing/2014/main" id="{38E7E06F-FF1F-0F11-535C-F8C138B0849A}"/>
-              </a:ext>
-            </a:extLst>
-          </p:cNvPr>
-          <p:cNvCxnSpPr/>
-          <p:nvPr/>
-        </p:nvCxnSpPr>
-        <p:spPr>
-          <a:xfrm>
-            <a:off x="8396697" y="1948583"/>
-            <a:ext cx="0" cy="3888432"/>
-          </a:xfrm>
-          <a:prstGeom prst="line">
-            <a:avLst/>
-          </a:prstGeom>
-          <a:ln w="25400">
-            <a:solidFill>
-              <a:schemeClr val="tx1">
-                <a:lumMod val="50000"/>
-                <a:lumOff val="50000"/>
-              </a:schemeClr>
-            </a:solidFill>
-          </a:ln>
-        </p:spPr>
-        <p:style>
-          <a:lnRef idx="1">
-            <a:schemeClr val="accent1"/>
-          </a:lnRef>
-          <a:fillRef idx="0">
-            <a:schemeClr val="accent1"/>
-          </a:fillRef>
-          <a:effectRef idx="0">
-            <a:schemeClr val="accent1"/>
-          </a:effectRef>
-          <a:fontRef idx="minor">
-            <a:schemeClr val="tx1"/>
-          </a:fontRef>
-        </p:style>
-      </p:cxnSp>
-      <p:cxnSp>
-        <p:nvCxnSpPr>
-          <p:cNvPr id="88" name="Straight Connector 87">
-            <a:extLst>
-              <a:ext uri="{FF2B5EF4-FFF2-40B4-BE49-F238E27FC236}">
-                <a16:creationId xmlns:a16="http://schemas.microsoft.com/office/drawing/2014/main" id="{001930B7-3FDD-6E41-AC0D-CA2F3BCD42F8}"/>
-              </a:ext>
-            </a:extLst>
-          </p:cNvPr>
-          <p:cNvCxnSpPr/>
-          <p:nvPr/>
-        </p:nvCxnSpPr>
-        <p:spPr>
-          <a:xfrm>
-            <a:off x="8468705" y="1948583"/>
-            <a:ext cx="0" cy="3888432"/>
-          </a:xfrm>
-          <a:prstGeom prst="line">
-            <a:avLst/>
-          </a:prstGeom>
-          <a:ln w="25400">
-            <a:solidFill>
-              <a:schemeClr val="tx1">
-                <a:lumMod val="50000"/>
-                <a:lumOff val="50000"/>
-              </a:schemeClr>
-            </a:solidFill>
-          </a:ln>
-        </p:spPr>
-        <p:style>
-          <a:lnRef idx="1">
-            <a:schemeClr val="accent1"/>
-          </a:lnRef>
-          <a:fillRef idx="0">
-            <a:schemeClr val="accent1"/>
-          </a:fillRef>
-          <a:effectRef idx="0">
-            <a:schemeClr val="accent1"/>
-          </a:effectRef>
-          <a:fontRef idx="minor">
-            <a:schemeClr val="tx1"/>
-          </a:fontRef>
-        </p:style>
-      </p:cxnSp>
-      <p:cxnSp>
-        <p:nvCxnSpPr>
-          <p:cNvPr id="89" name="Straight Connector 88">
-            <a:extLst>
-              <a:ext uri="{FF2B5EF4-FFF2-40B4-BE49-F238E27FC236}">
-                <a16:creationId xmlns:a16="http://schemas.microsoft.com/office/drawing/2014/main" id="{6E6A979A-1FEA-3DBD-6FD5-5125532FFA33}"/>
-              </a:ext>
-            </a:extLst>
-          </p:cNvPr>
-          <p:cNvCxnSpPr/>
-          <p:nvPr/>
-        </p:nvCxnSpPr>
-        <p:spPr>
-          <a:xfrm>
-            <a:off x="8540713" y="1948583"/>
-            <a:ext cx="0" cy="3888432"/>
-          </a:xfrm>
-          <a:prstGeom prst="line">
-            <a:avLst/>
-          </a:prstGeom>
-          <a:ln w="25400">
-            <a:solidFill>
-              <a:schemeClr val="tx1">
-                <a:lumMod val="50000"/>
-                <a:lumOff val="50000"/>
-              </a:schemeClr>
-            </a:solidFill>
-          </a:ln>
-        </p:spPr>
-        <p:style>
-          <a:lnRef idx="1">
-            <a:schemeClr val="accent1"/>
-          </a:lnRef>
-          <a:fillRef idx="0">
-            <a:schemeClr val="accent1"/>
-          </a:fillRef>
-          <a:effectRef idx="0">
-            <a:schemeClr val="accent1"/>
-          </a:effectRef>
-          <a:fontRef idx="minor">
-            <a:schemeClr val="tx1"/>
-          </a:fontRef>
-        </p:style>
-      </p:cxnSp>
-      <p:cxnSp>
-        <p:nvCxnSpPr>
-          <p:cNvPr id="90" name="Straight Connector 89">
-            <a:extLst>
-              <a:ext uri="{FF2B5EF4-FFF2-40B4-BE49-F238E27FC236}">
-                <a16:creationId xmlns:a16="http://schemas.microsoft.com/office/drawing/2014/main" id="{51B1E822-340C-1CC1-CD83-DDAB475C0E1F}"/>
-              </a:ext>
-            </a:extLst>
-          </p:cNvPr>
-          <p:cNvCxnSpPr/>
-          <p:nvPr/>
-        </p:nvCxnSpPr>
-        <p:spPr>
-          <a:xfrm>
-            <a:off x="8612721" y="1948583"/>
-            <a:ext cx="0" cy="3888432"/>
-          </a:xfrm>
-          <a:prstGeom prst="line">
-            <a:avLst/>
-          </a:prstGeom>
-          <a:ln w="25400">
-            <a:solidFill>
-              <a:schemeClr val="tx1">
-                <a:lumMod val="50000"/>
-                <a:lumOff val="50000"/>
-              </a:schemeClr>
-            </a:solidFill>
-          </a:ln>
-        </p:spPr>
-        <p:style>
-          <a:lnRef idx="1">
-            <a:schemeClr val="accent1"/>
-          </a:lnRef>
-          <a:fillRef idx="0">
-            <a:schemeClr val="accent1"/>
-          </a:fillRef>
-          <a:effectRef idx="0">
-            <a:schemeClr val="accent1"/>
-          </a:effectRef>
-          <a:fontRef idx="minor">
-            <a:schemeClr val="tx1"/>
-          </a:fontRef>
-        </p:style>
-      </p:cxnSp>
-      <p:cxnSp>
-        <p:nvCxnSpPr>
-          <p:cNvPr id="91" name="Straight Connector 90">
-            <a:extLst>
-              <a:ext uri="{FF2B5EF4-FFF2-40B4-BE49-F238E27FC236}">
-                <a16:creationId xmlns:a16="http://schemas.microsoft.com/office/drawing/2014/main" id="{4B4B8709-4CD8-0274-4116-09B5221E33B3}"/>
-              </a:ext>
-            </a:extLst>
-          </p:cNvPr>
-          <p:cNvCxnSpPr/>
-          <p:nvPr/>
-        </p:nvCxnSpPr>
-        <p:spPr>
-          <a:xfrm>
-            <a:off x="8684729" y="1948583"/>
-            <a:ext cx="0" cy="3888432"/>
-          </a:xfrm>
-          <a:prstGeom prst="line">
-            <a:avLst/>
-          </a:prstGeom>
-          <a:ln w="25400">
-            <a:solidFill>
-              <a:schemeClr val="tx1">
-                <a:lumMod val="50000"/>
-                <a:lumOff val="50000"/>
-              </a:schemeClr>
-            </a:solidFill>
-          </a:ln>
-        </p:spPr>
-        <p:style>
-          <a:lnRef idx="1">
-            <a:schemeClr val="accent1"/>
-          </a:lnRef>
-          <a:fillRef idx="0">
-            <a:schemeClr val="accent1"/>
-          </a:fillRef>
-          <a:effectRef idx="0">
-            <a:schemeClr val="accent1"/>
-          </a:effectRef>
-          <a:fontRef idx="minor">
-            <a:schemeClr val="tx1"/>
-          </a:fontRef>
-        </p:style>
-      </p:cxnSp>
-      <p:cxnSp>
-        <p:nvCxnSpPr>
-          <p:cNvPr id="92" name="Straight Connector 91">
-            <a:extLst>
-              <a:ext uri="{FF2B5EF4-FFF2-40B4-BE49-F238E27FC236}">
-                <a16:creationId xmlns:a16="http://schemas.microsoft.com/office/drawing/2014/main" id="{6D045F8B-C731-24FC-D07E-FF152521CEAA}"/>
-              </a:ext>
-            </a:extLst>
-          </p:cNvPr>
-          <p:cNvCxnSpPr/>
-          <p:nvPr/>
-        </p:nvCxnSpPr>
-        <p:spPr>
-          <a:xfrm>
-            <a:off x="8756737" y="1948583"/>
-            <a:ext cx="0" cy="3888432"/>
-          </a:xfrm>
-          <a:prstGeom prst="line">
-            <a:avLst/>
-          </a:prstGeom>
-          <a:ln w="25400">
-            <a:solidFill>
-              <a:schemeClr val="tx1">
-                <a:lumMod val="50000"/>
-                <a:lumOff val="50000"/>
-              </a:schemeClr>
-            </a:solidFill>
-          </a:ln>
-        </p:spPr>
-        <p:style>
-          <a:lnRef idx="1">
-            <a:schemeClr val="accent1"/>
-          </a:lnRef>
-          <a:fillRef idx="0">
-            <a:schemeClr val="accent1"/>
-          </a:fillRef>
-          <a:effectRef idx="0">
-            <a:schemeClr val="accent1"/>
-          </a:effectRef>
-          <a:fontRef idx="minor">
-            <a:schemeClr val="tx1"/>
-          </a:fontRef>
-        </p:style>
-      </p:cxnSp>
-      <p:cxnSp>
-        <p:nvCxnSpPr>
-          <p:cNvPr id="93" name="Straight Connector 92">
-            <a:extLst>
-              <a:ext uri="{FF2B5EF4-FFF2-40B4-BE49-F238E27FC236}">
-                <a16:creationId xmlns:a16="http://schemas.microsoft.com/office/drawing/2014/main" id="{3D3AAF54-74C1-CA82-1457-6E7602762875}"/>
-              </a:ext>
-            </a:extLst>
-          </p:cNvPr>
-          <p:cNvCxnSpPr/>
-          <p:nvPr/>
-        </p:nvCxnSpPr>
-        <p:spPr>
-          <a:xfrm>
-            <a:off x="8837398" y="1948583"/>
-            <a:ext cx="0" cy="3888432"/>
-          </a:xfrm>
-          <a:prstGeom prst="line">
-            <a:avLst/>
-          </a:prstGeom>
-          <a:ln w="25400">
-            <a:solidFill>
-              <a:schemeClr val="tx1">
-                <a:lumMod val="50000"/>
-                <a:lumOff val="50000"/>
-              </a:schemeClr>
-            </a:solidFill>
-          </a:ln>
-        </p:spPr>
-        <p:style>
-          <a:lnRef idx="1">
-            <a:schemeClr val="accent1"/>
-          </a:lnRef>
-          <a:fillRef idx="0">
-            <a:schemeClr val="accent1"/>
-          </a:fillRef>
-          <a:effectRef idx="0">
-            <a:schemeClr val="accent1"/>
-          </a:effectRef>
-          <a:fontRef idx="minor">
-            <a:schemeClr val="tx1"/>
-          </a:fontRef>
-        </p:style>
-      </p:cxnSp>
-      <p:cxnSp>
-        <p:nvCxnSpPr>
-          <p:cNvPr id="94" name="Straight Connector 93">
-            <a:extLst>
-              <a:ext uri="{FF2B5EF4-FFF2-40B4-BE49-F238E27FC236}">
-                <a16:creationId xmlns:a16="http://schemas.microsoft.com/office/drawing/2014/main" id="{D1F3987B-07D2-C6ED-CF98-3FA7B2A81E4E}"/>
-              </a:ext>
-            </a:extLst>
-          </p:cNvPr>
-          <p:cNvCxnSpPr/>
-          <p:nvPr/>
-        </p:nvCxnSpPr>
-        <p:spPr>
-          <a:xfrm>
-            <a:off x="8909406" y="1948583"/>
-            <a:ext cx="0" cy="3888432"/>
-          </a:xfrm>
-          <a:prstGeom prst="line">
-            <a:avLst/>
-          </a:prstGeom>
-          <a:ln w="25400">
-            <a:solidFill>
-              <a:schemeClr val="tx1">
-                <a:lumMod val="50000"/>
-                <a:lumOff val="50000"/>
-              </a:schemeClr>
-            </a:solidFill>
-          </a:ln>
-        </p:spPr>
-        <p:style>
-          <a:lnRef idx="1">
-            <a:schemeClr val="accent1"/>
-          </a:lnRef>
-          <a:fillRef idx="0">
-            <a:schemeClr val="accent1"/>
-          </a:fillRef>
-          <a:effectRef idx="0">
-            <a:schemeClr val="accent1"/>
-          </a:effectRef>
-          <a:fontRef idx="minor">
-            <a:schemeClr val="tx1"/>
-          </a:fontRef>
-        </p:style>
-      </p:cxnSp>
-      <p:cxnSp>
-        <p:nvCxnSpPr>
-          <p:cNvPr id="95" name="Straight Connector 94">
-            <a:extLst>
-              <a:ext uri="{FF2B5EF4-FFF2-40B4-BE49-F238E27FC236}">
-                <a16:creationId xmlns:a16="http://schemas.microsoft.com/office/drawing/2014/main" id="{927C233B-83BA-73A5-7558-167DFE02AF60}"/>
-              </a:ext>
-            </a:extLst>
-          </p:cNvPr>
-          <p:cNvCxnSpPr/>
-          <p:nvPr/>
-        </p:nvCxnSpPr>
-        <p:spPr>
-          <a:xfrm>
-            <a:off x="8981414" y="1948583"/>
-            <a:ext cx="0" cy="3888432"/>
-          </a:xfrm>
-          <a:prstGeom prst="line">
-            <a:avLst/>
-          </a:prstGeom>
-          <a:ln w="25400">
-            <a:solidFill>
-              <a:schemeClr val="tx1">
-                <a:lumMod val="50000"/>
-                <a:lumOff val="50000"/>
-              </a:schemeClr>
-            </a:solidFill>
-          </a:ln>
-        </p:spPr>
-        <p:style>
-          <a:lnRef idx="1">
-            <a:schemeClr val="accent1"/>
-          </a:lnRef>
-          <a:fillRef idx="0">
-            <a:schemeClr val="accent1"/>
-          </a:fillRef>
-          <a:effectRef idx="0">
-            <a:schemeClr val="accent1"/>
-          </a:effectRef>
-          <a:fontRef idx="minor">
-            <a:schemeClr val="tx1"/>
-          </a:fontRef>
-        </p:style>
-      </p:cxnSp>
-      <p:cxnSp>
-        <p:nvCxnSpPr>
-          <p:cNvPr id="96" name="Straight Connector 95">
-            <a:extLst>
-              <a:ext uri="{FF2B5EF4-FFF2-40B4-BE49-F238E27FC236}">
-                <a16:creationId xmlns:a16="http://schemas.microsoft.com/office/drawing/2014/main" id="{92356709-2124-F9D4-BEED-C92D534F0672}"/>
-              </a:ext>
-            </a:extLst>
-          </p:cNvPr>
-          <p:cNvCxnSpPr/>
-          <p:nvPr/>
-        </p:nvCxnSpPr>
-        <p:spPr>
-          <a:xfrm>
-            <a:off x="9053422" y="1948583"/>
-            <a:ext cx="0" cy="3888432"/>
-          </a:xfrm>
-          <a:prstGeom prst="line">
-            <a:avLst/>
-          </a:prstGeom>
-          <a:ln w="25400">
-            <a:solidFill>
-              <a:schemeClr val="tx1">
-                <a:lumMod val="50000"/>
-                <a:lumOff val="50000"/>
-              </a:schemeClr>
-            </a:solidFill>
-          </a:ln>
-        </p:spPr>
-        <p:style>
-          <a:lnRef idx="1">
-            <a:schemeClr val="accent1"/>
-          </a:lnRef>
-          <a:fillRef idx="0">
-            <a:schemeClr val="accent1"/>
-          </a:fillRef>
-          <a:effectRef idx="0">
-            <a:schemeClr val="accent1"/>
-          </a:effectRef>
-          <a:fontRef idx="minor">
-            <a:schemeClr val="tx1"/>
-          </a:fontRef>
-        </p:style>
-      </p:cxnSp>
-      <p:cxnSp>
-        <p:nvCxnSpPr>
-          <p:cNvPr id="97" name="Straight Connector 96">
-            <a:extLst>
-              <a:ext uri="{FF2B5EF4-FFF2-40B4-BE49-F238E27FC236}">
-                <a16:creationId xmlns:a16="http://schemas.microsoft.com/office/drawing/2014/main" id="{8D8EE98C-D3FD-5DE5-5825-355B5A944B8B}"/>
-              </a:ext>
-            </a:extLst>
-          </p:cNvPr>
-          <p:cNvCxnSpPr/>
-          <p:nvPr/>
-        </p:nvCxnSpPr>
-        <p:spPr>
-          <a:xfrm>
-            <a:off x="9125430" y="1948583"/>
-            <a:ext cx="0" cy="3888432"/>
-          </a:xfrm>
-          <a:prstGeom prst="line">
-            <a:avLst/>
-          </a:prstGeom>
-          <a:ln w="25400">
-            <a:solidFill>
-              <a:schemeClr val="tx1">
-                <a:lumMod val="50000"/>
-                <a:lumOff val="50000"/>
-              </a:schemeClr>
-            </a:solidFill>
-          </a:ln>
-        </p:spPr>
-        <p:style>
-          <a:lnRef idx="1">
-            <a:schemeClr val="accent1"/>
-          </a:lnRef>
-          <a:fillRef idx="0">
-            <a:schemeClr val="accent1"/>
-          </a:fillRef>
-          <a:effectRef idx="0">
-            <a:schemeClr val="accent1"/>
-          </a:effectRef>
-          <a:fontRef idx="minor">
-            <a:schemeClr val="tx1"/>
-          </a:fontRef>
-        </p:style>
-      </p:cxnSp>
-      <p:cxnSp>
-        <p:nvCxnSpPr>
-          <p:cNvPr id="98" name="Straight Connector 97">
-            <a:extLst>
-              <a:ext uri="{FF2B5EF4-FFF2-40B4-BE49-F238E27FC236}">
-                <a16:creationId xmlns:a16="http://schemas.microsoft.com/office/drawing/2014/main" id="{292814E4-9CB4-F5E4-CAC8-746A2BE88AE0}"/>
-              </a:ext>
-            </a:extLst>
-          </p:cNvPr>
-          <p:cNvCxnSpPr/>
-          <p:nvPr/>
-        </p:nvCxnSpPr>
-        <p:spPr>
-          <a:xfrm>
-            <a:off x="9197438" y="1948583"/>
-            <a:ext cx="0" cy="3888432"/>
-          </a:xfrm>
-          <a:prstGeom prst="line">
-            <a:avLst/>
-          </a:prstGeom>
-          <a:ln w="25400">
-            <a:solidFill>
-              <a:schemeClr val="tx1">
-                <a:lumMod val="50000"/>
-                <a:lumOff val="50000"/>
-              </a:schemeClr>
-            </a:solidFill>
-          </a:ln>
-        </p:spPr>
-        <p:style>
-          <a:lnRef idx="1">
-            <a:schemeClr val="accent1"/>
-          </a:lnRef>
-          <a:fillRef idx="0">
-            <a:schemeClr val="accent1"/>
-          </a:fillRef>
-          <a:effectRef idx="0">
-            <a:schemeClr val="accent1"/>
-          </a:effectRef>
-          <a:fontRef idx="minor">
-            <a:schemeClr val="tx1"/>
-          </a:fontRef>
-        </p:style>
-      </p:cxnSp>
-      <p:cxnSp>
-        <p:nvCxnSpPr>
-          <p:cNvPr id="99" name="Straight Connector 98">
-            <a:extLst>
-              <a:ext uri="{FF2B5EF4-FFF2-40B4-BE49-F238E27FC236}">
-                <a16:creationId xmlns:a16="http://schemas.microsoft.com/office/drawing/2014/main" id="{74BD4BCB-912D-6A0C-24E0-D68E4FCC425D}"/>
-              </a:ext>
-            </a:extLst>
-          </p:cNvPr>
-          <p:cNvCxnSpPr/>
-          <p:nvPr/>
-        </p:nvCxnSpPr>
-        <p:spPr>
-          <a:xfrm>
-            <a:off x="9269446" y="1948583"/>
-            <a:ext cx="0" cy="3888432"/>
-          </a:xfrm>
-          <a:prstGeom prst="line">
-            <a:avLst/>
-          </a:prstGeom>
-          <a:ln w="25400">
-            <a:solidFill>
-              <a:schemeClr val="tx1">
-                <a:lumMod val="50000"/>
-                <a:lumOff val="50000"/>
-              </a:schemeClr>
-            </a:solidFill>
-          </a:ln>
-        </p:spPr>
-        <p:style>
-          <a:lnRef idx="1">
-            <a:schemeClr val="accent1"/>
-          </a:lnRef>
-          <a:fillRef idx="0">
-            <a:schemeClr val="accent1"/>
-          </a:fillRef>
-          <a:effectRef idx="0">
-            <a:schemeClr val="accent1"/>
-          </a:effectRef>
-          <a:fontRef idx="minor">
-            <a:schemeClr val="tx1"/>
-          </a:fontRef>
-        </p:style>
-      </p:cxnSp>
-      <p:cxnSp>
-        <p:nvCxnSpPr>
-          <p:cNvPr id="100" name="Straight Connector 99">
-            <a:extLst>
-              <a:ext uri="{FF2B5EF4-FFF2-40B4-BE49-F238E27FC236}">
-                <a16:creationId xmlns:a16="http://schemas.microsoft.com/office/drawing/2014/main" id="{DFF2B716-B38E-1ED2-46AA-8F08420CCCAA}"/>
-              </a:ext>
-            </a:extLst>
-          </p:cNvPr>
-          <p:cNvCxnSpPr/>
-          <p:nvPr/>
-        </p:nvCxnSpPr>
-        <p:spPr>
-          <a:xfrm>
-            <a:off x="9341454" y="1948583"/>
-            <a:ext cx="0" cy="3888432"/>
-          </a:xfrm>
-          <a:prstGeom prst="line">
-            <a:avLst/>
-          </a:prstGeom>
-          <a:ln w="25400">
-            <a:solidFill>
-              <a:schemeClr val="tx1">
-                <a:lumMod val="50000"/>
-                <a:lumOff val="50000"/>
-              </a:schemeClr>
-            </a:solidFill>
-          </a:ln>
-        </p:spPr>
-        <p:style>
-          <a:lnRef idx="1">
-            <a:schemeClr val="accent1"/>
-          </a:lnRef>
-          <a:fillRef idx="0">
-            <a:schemeClr val="accent1"/>
-          </a:fillRef>
-          <a:effectRef idx="0">
-            <a:schemeClr val="accent1"/>
-          </a:effectRef>
-          <a:fontRef idx="minor">
-            <a:schemeClr val="tx1"/>
-          </a:fontRef>
-        </p:style>
-      </p:cxnSp>
-      <p:cxnSp>
-        <p:nvCxnSpPr>
-          <p:cNvPr id="101" name="Straight Connector 100">
-            <a:extLst>
-              <a:ext uri="{FF2B5EF4-FFF2-40B4-BE49-F238E27FC236}">
-                <a16:creationId xmlns:a16="http://schemas.microsoft.com/office/drawing/2014/main" id="{987C6D2E-7E4D-6E05-40CA-C8F08E07240E}"/>
-              </a:ext>
-            </a:extLst>
-          </p:cNvPr>
-          <p:cNvCxnSpPr/>
-          <p:nvPr/>
-        </p:nvCxnSpPr>
-        <p:spPr>
-          <a:xfrm>
-            <a:off x="9404809" y="1948583"/>
-            <a:ext cx="0" cy="3888432"/>
-          </a:xfrm>
-          <a:prstGeom prst="line">
-            <a:avLst/>
-          </a:prstGeom>
-          <a:ln w="25400">
-            <a:solidFill>
-              <a:schemeClr val="tx1">
-                <a:lumMod val="50000"/>
-                <a:lumOff val="50000"/>
-              </a:schemeClr>
-            </a:solidFill>
-          </a:ln>
-        </p:spPr>
-        <p:style>
-          <a:lnRef idx="1">
-            <a:schemeClr val="accent1"/>
-          </a:lnRef>
-          <a:fillRef idx="0">
-            <a:schemeClr val="accent1"/>
-          </a:fillRef>
-          <a:effectRef idx="0">
-            <a:schemeClr val="accent1"/>
-          </a:effectRef>
-          <a:fontRef idx="minor">
-            <a:schemeClr val="tx1"/>
-          </a:fontRef>
-        </p:style>
-      </p:cxnSp>
-      <p:cxnSp>
-        <p:nvCxnSpPr>
-          <p:cNvPr id="102" name="Straight Connector 101">
-            <a:extLst>
-              <a:ext uri="{FF2B5EF4-FFF2-40B4-BE49-F238E27FC236}">
-                <a16:creationId xmlns:a16="http://schemas.microsoft.com/office/drawing/2014/main" id="{A608A87E-6458-0A14-6AF4-0F779A312D86}"/>
-              </a:ext>
-            </a:extLst>
-          </p:cNvPr>
-          <p:cNvCxnSpPr/>
-          <p:nvPr/>
-        </p:nvCxnSpPr>
-        <p:spPr>
-          <a:xfrm>
-            <a:off x="9476817" y="1948583"/>
-            <a:ext cx="0" cy="3888432"/>
-          </a:xfrm>
-          <a:prstGeom prst="line">
-            <a:avLst/>
-          </a:prstGeom>
-          <a:ln w="25400">
-            <a:solidFill>
-              <a:schemeClr val="tx1">
-                <a:lumMod val="50000"/>
-                <a:lumOff val="50000"/>
-              </a:schemeClr>
-            </a:solidFill>
-          </a:ln>
-        </p:spPr>
-        <p:style>
-          <a:lnRef idx="1">
-            <a:schemeClr val="accent1"/>
-          </a:lnRef>
-          <a:fillRef idx="0">
-            <a:schemeClr val="accent1"/>
-          </a:fillRef>
-          <a:effectRef idx="0">
-            <a:schemeClr val="accent1"/>
-          </a:effectRef>
-          <a:fontRef idx="minor">
-            <a:schemeClr val="tx1"/>
-          </a:fontRef>
-        </p:style>
-      </p:cxnSp>
-      <p:cxnSp>
-        <p:nvCxnSpPr>
-          <p:cNvPr id="103" name="Straight Connector 102">
-            <a:extLst>
-              <a:ext uri="{FF2B5EF4-FFF2-40B4-BE49-F238E27FC236}">
-                <a16:creationId xmlns:a16="http://schemas.microsoft.com/office/drawing/2014/main" id="{B423F3C4-5665-3C45-D61B-06A76F874576}"/>
-              </a:ext>
-            </a:extLst>
-          </p:cNvPr>
-          <p:cNvCxnSpPr/>
-          <p:nvPr/>
-        </p:nvCxnSpPr>
-        <p:spPr>
-          <a:xfrm>
-            <a:off x="9548825" y="1948583"/>
-            <a:ext cx="0" cy="3888432"/>
-          </a:xfrm>
-          <a:prstGeom prst="line">
-            <a:avLst/>
-          </a:prstGeom>
-          <a:ln w="25400">
-            <a:solidFill>
-              <a:schemeClr val="tx1">
-                <a:lumMod val="50000"/>
-                <a:lumOff val="50000"/>
-              </a:schemeClr>
-            </a:solidFill>
-          </a:ln>
-        </p:spPr>
-        <p:style>
-          <a:lnRef idx="1">
-            <a:schemeClr val="accent1"/>
-          </a:lnRef>
-          <a:fillRef idx="0">
-            <a:schemeClr val="accent1"/>
-          </a:fillRef>
-          <a:effectRef idx="0">
-            <a:schemeClr val="accent1"/>
-          </a:effectRef>
-          <a:fontRef idx="minor">
-            <a:schemeClr val="tx1"/>
-          </a:fontRef>
-        </p:style>
-      </p:cxnSp>
-      <p:sp>
-        <p:nvSpPr>
-          <p:cNvPr id="104" name="Rectangle 103">
-            <a:extLst>
-              <a:ext uri="{FF2B5EF4-FFF2-40B4-BE49-F238E27FC236}">
-                <a16:creationId xmlns:a16="http://schemas.microsoft.com/office/drawing/2014/main" id="{1B29CE5F-394C-B7A2-256A-EFCB648E04D3}"/>
-              </a:ext>
-            </a:extLst>
-          </p:cNvPr>
-          <p:cNvSpPr/>
-          <p:nvPr/>
-        </p:nvSpPr>
-        <p:spPr>
-          <a:xfrm>
-            <a:off x="7596890" y="2267234"/>
-            <a:ext cx="2383981" cy="360040"/>
-          </a:xfrm>
-          <a:prstGeom prst="rect">
-            <a:avLst/>
-          </a:prstGeom>
-          <a:solidFill>
-            <a:schemeClr val="bg1">
-              <a:lumMod val="75000"/>
-            </a:schemeClr>
-          </a:solidFill>
-          <a:ln w="25400">
-            <a:solidFill>
-              <a:schemeClr val="bg2">
-                <a:lumMod val="50000"/>
-              </a:schemeClr>
-            </a:solidFill>
-          </a:ln>
-        </p:spPr>
-        <p:style>
-          <a:lnRef idx="2">
-            <a:schemeClr val="accent1">
-              <a:shade val="50000"/>
-            </a:schemeClr>
-          </a:lnRef>
-          <a:fillRef idx="1">
-            <a:schemeClr val="accent1"/>
-          </a:fillRef>
-          <a:effectRef idx="0">
-            <a:schemeClr val="accent1"/>
-          </a:effectRef>
-          <a:fontRef idx="minor">
-            <a:schemeClr val="lt1"/>
-          </a:fontRef>
-        </p:style>
-        <p:txBody>
-          <a:bodyPr rtlCol="0" anchor="ctr"/>
-          <a:lstStyle/>
-          <a:p>
-            <a:pPr algn="ctr"/>
-            <a:r>
-              <a:rPr lang="sv-SE">
-                <a:solidFill>
-                  <a:schemeClr val="tx1"/>
-                </a:solidFill>
-              </a:rPr>
-              <a:t>0xABCDEF00</a:t>
-            </a:r>
-            <a:endParaRPr lang="en-SE">
-              <a:solidFill>
-                <a:schemeClr val="tx1"/>
-              </a:solidFill>
-            </a:endParaRPr>
-          </a:p>
-        </p:txBody>
-      </p:sp>
-      <p:sp>
-        <p:nvSpPr>
-          <p:cNvPr id="105" name="Rectangle 104">
-            <a:extLst>
-              <a:ext uri="{FF2B5EF4-FFF2-40B4-BE49-F238E27FC236}">
-                <a16:creationId xmlns:a16="http://schemas.microsoft.com/office/drawing/2014/main" id="{4A8CB4F2-C44F-EFB4-8550-9F34AC768BE1}"/>
-              </a:ext>
-            </a:extLst>
-          </p:cNvPr>
-          <p:cNvSpPr/>
-          <p:nvPr/>
-        </p:nvSpPr>
-        <p:spPr>
-          <a:xfrm>
-            <a:off x="7596887" y="2702961"/>
-            <a:ext cx="2383981" cy="360040"/>
-          </a:xfrm>
-          <a:prstGeom prst="rect">
-            <a:avLst/>
-          </a:prstGeom>
-          <a:solidFill>
-            <a:schemeClr val="bg1">
-              <a:lumMod val="75000"/>
-            </a:schemeClr>
-          </a:solidFill>
-          <a:ln w="25400">
-            <a:solidFill>
-              <a:schemeClr val="bg2">
-                <a:lumMod val="50000"/>
-              </a:schemeClr>
-            </a:solidFill>
-          </a:ln>
-        </p:spPr>
-        <p:style>
-          <a:lnRef idx="2">
-            <a:schemeClr val="accent1">
-              <a:shade val="50000"/>
-            </a:schemeClr>
-          </a:lnRef>
-          <a:fillRef idx="1">
-            <a:schemeClr val="accent1"/>
-          </a:fillRef>
-          <a:effectRef idx="0">
-            <a:schemeClr val="accent1"/>
-          </a:effectRef>
-          <a:fontRef idx="minor">
-            <a:schemeClr val="lt1"/>
-          </a:fontRef>
-        </p:style>
-        <p:txBody>
-          <a:bodyPr rtlCol="0" anchor="ctr"/>
-          <a:lstStyle/>
-          <a:p>
-            <a:pPr algn="ctr"/>
-            <a:r>
-              <a:rPr lang="sv-SE">
-                <a:solidFill>
-                  <a:schemeClr val="tx1"/>
-                </a:solidFill>
-              </a:rPr>
-              <a:t>0xABCDEF11</a:t>
-            </a:r>
-            <a:endParaRPr lang="en-SE">
-              <a:solidFill>
-                <a:schemeClr val="tx1"/>
-              </a:solidFill>
-            </a:endParaRPr>
-          </a:p>
-        </p:txBody>
-      </p:sp>
-      <p:sp>
-        <p:nvSpPr>
-          <p:cNvPr id="106" name="Rectangle 105">
-            <a:extLst>
-              <a:ext uri="{FF2B5EF4-FFF2-40B4-BE49-F238E27FC236}">
-                <a16:creationId xmlns:a16="http://schemas.microsoft.com/office/drawing/2014/main" id="{A6FFDE57-8585-1774-2C6E-594108456BCF}"/>
-              </a:ext>
-            </a:extLst>
-          </p:cNvPr>
-          <p:cNvSpPr/>
-          <p:nvPr/>
-        </p:nvSpPr>
-        <p:spPr>
-          <a:xfrm>
-            <a:off x="7596884" y="3138688"/>
-            <a:ext cx="2383981" cy="360040"/>
-          </a:xfrm>
-          <a:prstGeom prst="rect">
-            <a:avLst/>
-          </a:prstGeom>
-          <a:solidFill>
-            <a:schemeClr val="bg1">
-              <a:lumMod val="75000"/>
-            </a:schemeClr>
-          </a:solidFill>
-          <a:ln w="25400">
-            <a:solidFill>
-              <a:schemeClr val="bg2">
-                <a:lumMod val="50000"/>
-              </a:schemeClr>
-            </a:solidFill>
-          </a:ln>
-        </p:spPr>
-        <p:style>
-          <a:lnRef idx="2">
-            <a:schemeClr val="accent1">
-              <a:shade val="50000"/>
-            </a:schemeClr>
-          </a:lnRef>
-          <a:fillRef idx="1">
-            <a:schemeClr val="accent1"/>
-          </a:fillRef>
-          <a:effectRef idx="0">
-            <a:schemeClr val="accent1"/>
-          </a:effectRef>
-          <a:fontRef idx="minor">
-            <a:schemeClr val="lt1"/>
-          </a:fontRef>
-        </p:style>
-        <p:txBody>
-          <a:bodyPr rtlCol="0" anchor="ctr"/>
-          <a:lstStyle/>
-          <a:p>
-            <a:pPr algn="ctr"/>
-            <a:r>
-              <a:rPr lang="sv-SE">
-                <a:solidFill>
-                  <a:schemeClr val="tx1"/>
-                </a:solidFill>
-              </a:rPr>
-              <a:t>0xABCDEF22</a:t>
-            </a:r>
-            <a:endParaRPr lang="en-SE">
-              <a:solidFill>
-                <a:schemeClr val="tx1"/>
-              </a:solidFill>
-            </a:endParaRPr>
-          </a:p>
-        </p:txBody>
-      </p:sp>
-      <p:sp>
-        <p:nvSpPr>
-          <p:cNvPr id="107" name="Rectangle 106">
-            <a:extLst>
-              <a:ext uri="{FF2B5EF4-FFF2-40B4-BE49-F238E27FC236}">
-                <a16:creationId xmlns:a16="http://schemas.microsoft.com/office/drawing/2014/main" id="{A1A1893A-79F8-49FE-DEA9-671E5CE02B65}"/>
-              </a:ext>
-            </a:extLst>
-          </p:cNvPr>
-          <p:cNvSpPr/>
-          <p:nvPr/>
-        </p:nvSpPr>
-        <p:spPr>
-          <a:xfrm>
-            <a:off x="7596881" y="3574415"/>
-            <a:ext cx="2383981" cy="360040"/>
-          </a:xfrm>
-          <a:prstGeom prst="rect">
-            <a:avLst/>
-          </a:prstGeom>
-          <a:solidFill>
-            <a:schemeClr val="bg1">
-              <a:lumMod val="75000"/>
-            </a:schemeClr>
-          </a:solidFill>
-          <a:ln w="25400">
-            <a:solidFill>
-              <a:schemeClr val="bg1">
-                <a:lumMod val="50000"/>
-              </a:schemeClr>
-            </a:solidFill>
-          </a:ln>
-        </p:spPr>
-        <p:style>
-          <a:lnRef idx="2">
-            <a:schemeClr val="accent1">
-              <a:shade val="50000"/>
-            </a:schemeClr>
-          </a:lnRef>
-          <a:fillRef idx="1">
-            <a:schemeClr val="accent1"/>
-          </a:fillRef>
-          <a:effectRef idx="0">
-            <a:schemeClr val="accent1"/>
-          </a:effectRef>
-          <a:fontRef idx="minor">
-            <a:schemeClr val="lt1"/>
-          </a:fontRef>
-        </p:style>
-        <p:txBody>
-          <a:bodyPr rtlCol="0" anchor="ctr"/>
-          <a:lstStyle/>
-          <a:p>
-            <a:pPr algn="ctr"/>
-            <a:r>
-              <a:rPr lang="sv-SE" dirty="0">
-                <a:solidFill>
-                  <a:schemeClr val="tx1"/>
-                </a:solidFill>
-              </a:rPr>
-              <a:t>0xABCDEF33</a:t>
-            </a:r>
-            <a:endParaRPr lang="en-SE" dirty="0">
-              <a:solidFill>
-                <a:schemeClr val="tx1"/>
-              </a:solidFill>
-            </a:endParaRPr>
-          </a:p>
-        </p:txBody>
-      </p:sp>
-      <p:sp>
-        <p:nvSpPr>
-          <p:cNvPr id="108" name="Rectangle 107">
-            <a:extLst>
-              <a:ext uri="{FF2B5EF4-FFF2-40B4-BE49-F238E27FC236}">
-                <a16:creationId xmlns:a16="http://schemas.microsoft.com/office/drawing/2014/main" id="{7AE251B7-EC73-534E-424F-7BCE3FE80E20}"/>
-              </a:ext>
-            </a:extLst>
-          </p:cNvPr>
-          <p:cNvSpPr/>
-          <p:nvPr/>
-        </p:nvSpPr>
-        <p:spPr>
-          <a:xfrm>
-            <a:off x="7596878" y="4010142"/>
-            <a:ext cx="2383981" cy="360040"/>
-          </a:xfrm>
-          <a:prstGeom prst="rect">
-            <a:avLst/>
-          </a:prstGeom>
-          <a:solidFill>
-            <a:schemeClr val="bg1">
-              <a:lumMod val="75000"/>
-            </a:schemeClr>
-          </a:solidFill>
-          <a:ln w="25400">
-            <a:solidFill>
-              <a:schemeClr val="bg2">
-                <a:lumMod val="50000"/>
-              </a:schemeClr>
-            </a:solidFill>
-          </a:ln>
-        </p:spPr>
-        <p:style>
-          <a:lnRef idx="2">
-            <a:schemeClr val="accent1">
-              <a:shade val="50000"/>
-            </a:schemeClr>
-          </a:lnRef>
-          <a:fillRef idx="1">
-            <a:schemeClr val="accent1"/>
-          </a:fillRef>
-          <a:effectRef idx="0">
-            <a:schemeClr val="accent1"/>
-          </a:effectRef>
-          <a:fontRef idx="minor">
-            <a:schemeClr val="lt1"/>
-          </a:fontRef>
-        </p:style>
-        <p:txBody>
-          <a:bodyPr rtlCol="0" anchor="ctr"/>
-          <a:lstStyle/>
-          <a:p>
-            <a:pPr algn="ctr"/>
-            <a:r>
-              <a:rPr lang="sv-SE">
-                <a:solidFill>
-                  <a:schemeClr val="tx1"/>
-                </a:solidFill>
-              </a:rPr>
-              <a:t>0xABCDEF44</a:t>
-            </a:r>
-            <a:endParaRPr lang="en-SE">
-              <a:solidFill>
-                <a:schemeClr val="tx1"/>
-              </a:solidFill>
-            </a:endParaRPr>
-          </a:p>
-        </p:txBody>
-      </p:sp>
-      <p:sp>
-        <p:nvSpPr>
-          <p:cNvPr id="109" name="Rectangle 108">
-            <a:extLst>
-              <a:ext uri="{FF2B5EF4-FFF2-40B4-BE49-F238E27FC236}">
-                <a16:creationId xmlns:a16="http://schemas.microsoft.com/office/drawing/2014/main" id="{87E41305-E4DE-D91C-F1E0-03ACD947C528}"/>
-              </a:ext>
-            </a:extLst>
-          </p:cNvPr>
-          <p:cNvSpPr/>
-          <p:nvPr/>
-        </p:nvSpPr>
-        <p:spPr>
-          <a:xfrm>
-            <a:off x="7596875" y="4445869"/>
-            <a:ext cx="2383981" cy="360040"/>
-          </a:xfrm>
-          <a:prstGeom prst="rect">
-            <a:avLst/>
-          </a:prstGeom>
-          <a:solidFill>
-            <a:schemeClr val="bg1">
-              <a:lumMod val="75000"/>
-            </a:schemeClr>
-          </a:solidFill>
-          <a:ln w="25400">
-            <a:solidFill>
-              <a:schemeClr val="bg2">
-                <a:lumMod val="50000"/>
-              </a:schemeClr>
-            </a:solidFill>
-          </a:ln>
-        </p:spPr>
-        <p:style>
-          <a:lnRef idx="2">
-            <a:schemeClr val="accent1">
-              <a:shade val="50000"/>
-            </a:schemeClr>
-          </a:lnRef>
-          <a:fillRef idx="1">
-            <a:schemeClr val="accent1"/>
-          </a:fillRef>
-          <a:effectRef idx="0">
-            <a:schemeClr val="accent1"/>
-          </a:effectRef>
-          <a:fontRef idx="minor">
-            <a:schemeClr val="lt1"/>
-          </a:fontRef>
-        </p:style>
-        <p:txBody>
-          <a:bodyPr rtlCol="0" anchor="ctr"/>
-          <a:lstStyle/>
-          <a:p>
-            <a:pPr algn="ctr"/>
-            <a:r>
-              <a:rPr lang="sv-SE">
-                <a:solidFill>
-                  <a:schemeClr val="tx1"/>
-                </a:solidFill>
-              </a:rPr>
-              <a:t>0xABCDEF55</a:t>
-            </a:r>
-            <a:endParaRPr lang="en-SE">
-              <a:solidFill>
-                <a:schemeClr val="tx1"/>
-              </a:solidFill>
-            </a:endParaRPr>
-          </a:p>
-        </p:txBody>
-      </p:sp>
-      <p:sp>
-        <p:nvSpPr>
-          <p:cNvPr id="110" name="Rectangle 109">
-            <a:extLst>
-              <a:ext uri="{FF2B5EF4-FFF2-40B4-BE49-F238E27FC236}">
-                <a16:creationId xmlns:a16="http://schemas.microsoft.com/office/drawing/2014/main" id="{3179E5F5-36F0-B0B6-997B-66652B59773D}"/>
-              </a:ext>
-            </a:extLst>
-          </p:cNvPr>
-          <p:cNvSpPr/>
-          <p:nvPr/>
-        </p:nvSpPr>
-        <p:spPr>
-          <a:xfrm>
-            <a:off x="7596872" y="4881596"/>
-            <a:ext cx="2383981" cy="360040"/>
-          </a:xfrm>
-          <a:prstGeom prst="rect">
-            <a:avLst/>
-          </a:prstGeom>
-          <a:solidFill>
-            <a:schemeClr val="bg1">
-              <a:lumMod val="75000"/>
-            </a:schemeClr>
-          </a:solidFill>
-          <a:ln w="25400">
-            <a:solidFill>
-              <a:schemeClr val="bg2">
-                <a:lumMod val="50000"/>
-              </a:schemeClr>
-            </a:solidFill>
-          </a:ln>
-        </p:spPr>
-        <p:style>
-          <a:lnRef idx="2">
-            <a:schemeClr val="accent1">
-              <a:shade val="50000"/>
-            </a:schemeClr>
-          </a:lnRef>
-          <a:fillRef idx="1">
-            <a:schemeClr val="accent1"/>
-          </a:fillRef>
-          <a:effectRef idx="0">
-            <a:schemeClr val="accent1"/>
-          </a:effectRef>
-          <a:fontRef idx="minor">
-            <a:schemeClr val="lt1"/>
-          </a:fontRef>
-        </p:style>
-        <p:txBody>
-          <a:bodyPr rtlCol="0" anchor="ctr"/>
-          <a:lstStyle/>
-          <a:p>
-            <a:pPr algn="ctr"/>
-            <a:r>
-              <a:rPr lang="sv-SE">
-                <a:solidFill>
-                  <a:schemeClr val="tx1"/>
-                </a:solidFill>
-              </a:rPr>
-              <a:t>0xABCDEF66</a:t>
-            </a:r>
-            <a:endParaRPr lang="en-SE">
-              <a:solidFill>
-                <a:schemeClr val="tx1"/>
-              </a:solidFill>
-            </a:endParaRPr>
-          </a:p>
-        </p:txBody>
-      </p:sp>
-      <p:sp>
-        <p:nvSpPr>
-          <p:cNvPr id="111" name="Rectangle 110">
-            <a:extLst>
-              <a:ext uri="{FF2B5EF4-FFF2-40B4-BE49-F238E27FC236}">
-                <a16:creationId xmlns:a16="http://schemas.microsoft.com/office/drawing/2014/main" id="{00BF8209-2090-7F28-94C4-C6CFABE26ED5}"/>
-              </a:ext>
-            </a:extLst>
-          </p:cNvPr>
-          <p:cNvSpPr/>
-          <p:nvPr/>
-        </p:nvSpPr>
-        <p:spPr>
-          <a:xfrm>
-            <a:off x="7596869" y="5317323"/>
-            <a:ext cx="2383981" cy="360040"/>
-          </a:xfrm>
-          <a:prstGeom prst="rect">
-            <a:avLst/>
-          </a:prstGeom>
-          <a:solidFill>
-            <a:schemeClr val="bg1">
-              <a:lumMod val="75000"/>
-            </a:schemeClr>
-          </a:solidFill>
-          <a:ln w="25400">
-            <a:solidFill>
-              <a:schemeClr val="bg2">
-                <a:lumMod val="50000"/>
-              </a:schemeClr>
-            </a:solidFill>
-          </a:ln>
-        </p:spPr>
-        <p:style>
-          <a:lnRef idx="2">
-            <a:schemeClr val="accent1">
-              <a:shade val="50000"/>
-            </a:schemeClr>
-          </a:lnRef>
-          <a:fillRef idx="1">
-            <a:schemeClr val="accent1"/>
-          </a:fillRef>
-          <a:effectRef idx="0">
-            <a:schemeClr val="accent1"/>
-          </a:effectRef>
-          <a:fontRef idx="minor">
-            <a:schemeClr val="lt1"/>
-          </a:fontRef>
-        </p:style>
-        <p:txBody>
-          <a:bodyPr rtlCol="0" anchor="ctr"/>
-          <a:lstStyle/>
-          <a:p>
-            <a:pPr algn="ctr"/>
-            <a:r>
-              <a:rPr lang="sv-SE">
-                <a:solidFill>
-                  <a:schemeClr val="tx1"/>
-                </a:solidFill>
-              </a:rPr>
-              <a:t>0xABCDEF77</a:t>
-            </a:r>
-            <a:endParaRPr lang="en-SE">
-              <a:solidFill>
-                <a:schemeClr val="tx1"/>
-              </a:solidFill>
-            </a:endParaRPr>
-          </a:p>
-        </p:txBody>
-      </p:sp>
-      <p:sp>
-        <p:nvSpPr>
-          <p:cNvPr id="112" name="Rectangle 111">
-            <a:extLst>
-              <a:ext uri="{FF2B5EF4-FFF2-40B4-BE49-F238E27FC236}">
-                <a16:creationId xmlns:a16="http://schemas.microsoft.com/office/drawing/2014/main" id="{656BAB03-FB4B-E454-BE73-365DEA8C4DA5}"/>
-              </a:ext>
-            </a:extLst>
-          </p:cNvPr>
-          <p:cNvSpPr/>
-          <p:nvPr/>
-        </p:nvSpPr>
-        <p:spPr>
-          <a:xfrm>
-            <a:off x="7596141" y="5847081"/>
-            <a:ext cx="2383981" cy="360040"/>
-          </a:xfrm>
-          <a:prstGeom prst="rect">
-            <a:avLst/>
-          </a:prstGeom>
-          <a:solidFill>
-            <a:schemeClr val="bg1">
-              <a:lumMod val="50000"/>
-            </a:schemeClr>
-          </a:solidFill>
-          <a:ln w="25400">
-            <a:solidFill>
-              <a:srgbClr val="92D050"/>
-            </a:solidFill>
-          </a:ln>
-        </p:spPr>
-        <p:style>
-          <a:lnRef idx="2">
-            <a:schemeClr val="accent1">
-              <a:shade val="50000"/>
-            </a:schemeClr>
-          </a:lnRef>
-          <a:fillRef idx="1">
-            <a:schemeClr val="accent1"/>
-          </a:fillRef>
-          <a:effectRef idx="0">
-            <a:schemeClr val="accent1"/>
-          </a:effectRef>
-          <a:fontRef idx="minor">
-            <a:schemeClr val="lt1"/>
-          </a:fontRef>
-        </p:style>
-        <p:txBody>
-          <a:bodyPr rtlCol="0" anchor="ctr"/>
-          <a:lstStyle/>
-          <a:p>
-            <a:pPr algn="ctr"/>
-            <a:r>
-              <a:rPr lang="sv-SE">
-                <a:solidFill>
-                  <a:srgbClr val="C00000"/>
-                </a:solidFill>
-              </a:rPr>
-              <a:t>0x????????</a:t>
-            </a:r>
-            <a:endParaRPr lang="en-SE">
-              <a:solidFill>
-                <a:srgbClr val="C00000"/>
-              </a:solidFill>
-            </a:endParaRPr>
-          </a:p>
-        </p:txBody>
-      </p:sp>
-      <p:sp>
-        <p:nvSpPr>
-          <p:cNvPr id="113" name="TextBox 112">
-            <a:extLst>
-              <a:ext uri="{FF2B5EF4-FFF2-40B4-BE49-F238E27FC236}">
-                <a16:creationId xmlns:a16="http://schemas.microsoft.com/office/drawing/2014/main" id="{F2AD46AD-D3A1-E34A-0135-9ABE695CD5C6}"/>
-              </a:ext>
-            </a:extLst>
-          </p:cNvPr>
-          <p:cNvSpPr txBox="1"/>
-          <p:nvPr/>
-        </p:nvSpPr>
-        <p:spPr>
-          <a:xfrm>
-            <a:off x="9720227" y="4051662"/>
-            <a:ext cx="1560379" cy="276999"/>
-          </a:xfrm>
-          <a:prstGeom prst="rect">
-            <a:avLst/>
-          </a:prstGeom>
-          <a:noFill/>
-        </p:spPr>
-        <p:txBody>
-          <a:bodyPr wrap="square">
-            <a:spAutoFit/>
-          </a:bodyPr>
-          <a:lstStyle/>
-          <a:p>
-            <a:pPr algn="ctr"/>
-            <a:r>
-              <a:rPr lang="sv-SE" sz="1200">
-                <a:solidFill>
-                  <a:schemeClr val="bg1">
-                    <a:lumMod val="65000"/>
-                  </a:schemeClr>
-                </a:solidFill>
-              </a:rPr>
-              <a:t>0x2000000C</a:t>
-            </a:r>
-            <a:endParaRPr lang="en-SE" sz="1200">
-              <a:solidFill>
-                <a:schemeClr val="bg1">
-                  <a:lumMod val="65000"/>
-                </a:schemeClr>
-              </a:solidFill>
-            </a:endParaRPr>
-          </a:p>
-        </p:txBody>
-      </p:sp>
-      <p:sp>
-        <p:nvSpPr>
-          <p:cNvPr id="114" name="TextBox 113">
-            <a:extLst>
-              <a:ext uri="{FF2B5EF4-FFF2-40B4-BE49-F238E27FC236}">
-                <a16:creationId xmlns:a16="http://schemas.microsoft.com/office/drawing/2014/main" id="{F5BC758D-8652-72AA-C694-385E8F973FA9}"/>
-              </a:ext>
-            </a:extLst>
-          </p:cNvPr>
-          <p:cNvSpPr txBox="1"/>
-          <p:nvPr/>
-        </p:nvSpPr>
-        <p:spPr>
-          <a:xfrm>
-            <a:off x="9720227" y="4506456"/>
-            <a:ext cx="1560379" cy="276999"/>
-          </a:xfrm>
-          <a:prstGeom prst="rect">
-            <a:avLst/>
-          </a:prstGeom>
-          <a:noFill/>
-        </p:spPr>
-        <p:txBody>
-          <a:bodyPr wrap="square">
-            <a:spAutoFit/>
-          </a:bodyPr>
-          <a:lstStyle/>
-          <a:p>
-            <a:pPr algn="ctr"/>
-            <a:r>
-              <a:rPr lang="sv-SE" sz="1200">
-                <a:solidFill>
-                  <a:schemeClr val="bg1">
-                    <a:lumMod val="65000"/>
-                  </a:schemeClr>
-                </a:solidFill>
-              </a:rPr>
-              <a:t>0x20000010</a:t>
-            </a:r>
-            <a:endParaRPr lang="en-SE" sz="1200">
-              <a:solidFill>
-                <a:schemeClr val="bg1">
-                  <a:lumMod val="65000"/>
-                </a:schemeClr>
-              </a:solidFill>
-            </a:endParaRPr>
-          </a:p>
-        </p:txBody>
-      </p:sp>
-      <p:sp>
-        <p:nvSpPr>
-          <p:cNvPr id="115" name="TextBox 114">
-            <a:extLst>
-              <a:ext uri="{FF2B5EF4-FFF2-40B4-BE49-F238E27FC236}">
-                <a16:creationId xmlns:a16="http://schemas.microsoft.com/office/drawing/2014/main" id="{AC48E9F2-3350-51A9-83AB-5F0BF03D5A29}"/>
-              </a:ext>
-            </a:extLst>
-          </p:cNvPr>
-          <p:cNvSpPr txBox="1"/>
-          <p:nvPr/>
-        </p:nvSpPr>
-        <p:spPr>
-          <a:xfrm>
-            <a:off x="9720227" y="4896188"/>
-            <a:ext cx="1560379" cy="276999"/>
-          </a:xfrm>
-          <a:prstGeom prst="rect">
-            <a:avLst/>
-          </a:prstGeom>
-          <a:noFill/>
-        </p:spPr>
-        <p:txBody>
-          <a:bodyPr wrap="square">
-            <a:spAutoFit/>
-          </a:bodyPr>
-          <a:lstStyle/>
-          <a:p>
-            <a:pPr algn="ctr"/>
-            <a:r>
-              <a:rPr lang="sv-SE" sz="1200">
-                <a:solidFill>
-                  <a:schemeClr val="bg1">
-                    <a:lumMod val="65000"/>
-                  </a:schemeClr>
-                </a:solidFill>
-              </a:rPr>
-              <a:t>0x20000014</a:t>
-            </a:r>
-            <a:endParaRPr lang="en-SE" sz="1200">
-              <a:solidFill>
-                <a:schemeClr val="bg1">
-                  <a:lumMod val="65000"/>
-                </a:schemeClr>
-              </a:solidFill>
-            </a:endParaRPr>
-          </a:p>
-        </p:txBody>
-      </p:sp>
-      <p:sp>
-        <p:nvSpPr>
-          <p:cNvPr id="116" name="TextBox 115">
-            <a:extLst>
-              <a:ext uri="{FF2B5EF4-FFF2-40B4-BE49-F238E27FC236}">
-                <a16:creationId xmlns:a16="http://schemas.microsoft.com/office/drawing/2014/main" id="{ADF48DD5-A01D-8502-41D3-6C3EB264CC21}"/>
-              </a:ext>
-            </a:extLst>
-          </p:cNvPr>
-          <p:cNvSpPr txBox="1"/>
-          <p:nvPr/>
-        </p:nvSpPr>
-        <p:spPr>
-          <a:xfrm>
-            <a:off x="9720227" y="5331915"/>
-            <a:ext cx="1560379" cy="276999"/>
-          </a:xfrm>
-          <a:prstGeom prst="rect">
-            <a:avLst/>
-          </a:prstGeom>
-          <a:noFill/>
-        </p:spPr>
-        <p:txBody>
-          <a:bodyPr wrap="square">
-            <a:spAutoFit/>
-          </a:bodyPr>
-          <a:lstStyle/>
-          <a:p>
-            <a:pPr algn="ctr"/>
-            <a:r>
-              <a:rPr lang="sv-SE" sz="1200">
-                <a:solidFill>
-                  <a:schemeClr val="bg1">
-                    <a:lumMod val="65000"/>
-                  </a:schemeClr>
-                </a:solidFill>
-              </a:rPr>
-              <a:t>0x20000018</a:t>
-            </a:r>
-            <a:endParaRPr lang="en-SE" sz="1200">
-              <a:solidFill>
-                <a:schemeClr val="bg1">
-                  <a:lumMod val="65000"/>
-                </a:schemeClr>
-              </a:solidFill>
-            </a:endParaRPr>
-          </a:p>
-        </p:txBody>
-      </p:sp>
-      <p:sp>
-        <p:nvSpPr>
-          <p:cNvPr id="117" name="TextBox 116">
-            <a:extLst>
-              <a:ext uri="{FF2B5EF4-FFF2-40B4-BE49-F238E27FC236}">
-                <a16:creationId xmlns:a16="http://schemas.microsoft.com/office/drawing/2014/main" id="{68E072C1-297B-A9D5-9F04-D138629B1508}"/>
-              </a:ext>
-            </a:extLst>
-          </p:cNvPr>
-          <p:cNvSpPr txBox="1"/>
-          <p:nvPr/>
-        </p:nvSpPr>
-        <p:spPr>
-          <a:xfrm>
-            <a:off x="9720227" y="3202911"/>
-            <a:ext cx="1560379" cy="276999"/>
-          </a:xfrm>
-          <a:prstGeom prst="rect">
-            <a:avLst/>
-          </a:prstGeom>
-          <a:noFill/>
-        </p:spPr>
-        <p:txBody>
-          <a:bodyPr wrap="square">
-            <a:spAutoFit/>
-          </a:bodyPr>
-          <a:lstStyle/>
-          <a:p>
-            <a:pPr algn="ctr"/>
-            <a:r>
-              <a:rPr lang="sv-SE" sz="1200">
-                <a:solidFill>
-                  <a:schemeClr val="bg1">
-                    <a:lumMod val="65000"/>
-                  </a:schemeClr>
-                </a:solidFill>
-              </a:rPr>
-              <a:t>0x20000004</a:t>
-            </a:r>
-            <a:endParaRPr lang="en-SE" sz="1200">
-              <a:solidFill>
-                <a:schemeClr val="bg1">
-                  <a:lumMod val="65000"/>
-                </a:schemeClr>
-              </a:solidFill>
-            </a:endParaRPr>
-          </a:p>
-        </p:txBody>
-      </p:sp>
-      <p:sp>
-        <p:nvSpPr>
-          <p:cNvPr id="118" name="TextBox 117">
-            <a:extLst>
-              <a:ext uri="{FF2B5EF4-FFF2-40B4-BE49-F238E27FC236}">
-                <a16:creationId xmlns:a16="http://schemas.microsoft.com/office/drawing/2014/main" id="{510C2E6F-65EA-D7D8-10B7-DB5F37BDD73E}"/>
-              </a:ext>
-            </a:extLst>
-          </p:cNvPr>
-          <p:cNvSpPr txBox="1"/>
-          <p:nvPr/>
-        </p:nvSpPr>
-        <p:spPr>
-          <a:xfrm>
-            <a:off x="9720227" y="2758070"/>
-            <a:ext cx="1560379" cy="276999"/>
-          </a:xfrm>
-          <a:prstGeom prst="rect">
-            <a:avLst/>
-          </a:prstGeom>
-          <a:noFill/>
-        </p:spPr>
-        <p:txBody>
-          <a:bodyPr wrap="square">
-            <a:spAutoFit/>
-          </a:bodyPr>
-          <a:lstStyle/>
-          <a:p>
-            <a:pPr algn="ctr"/>
-            <a:r>
-              <a:rPr lang="sv-SE" sz="1200">
-                <a:solidFill>
-                  <a:schemeClr val="bg1">
-                    <a:lumMod val="65000"/>
-                  </a:schemeClr>
-                </a:solidFill>
-              </a:rPr>
-              <a:t>0x20000000</a:t>
-            </a:r>
-            <a:endParaRPr lang="en-SE" sz="1200">
-              <a:solidFill>
-                <a:schemeClr val="bg1">
-                  <a:lumMod val="65000"/>
-                </a:schemeClr>
-              </a:solidFill>
-            </a:endParaRPr>
-          </a:p>
-        </p:txBody>
-      </p:sp>
-      <p:sp>
-        <p:nvSpPr>
-          <p:cNvPr id="119" name="TextBox 118">
-            <a:extLst>
-              <a:ext uri="{FF2B5EF4-FFF2-40B4-BE49-F238E27FC236}">
-                <a16:creationId xmlns:a16="http://schemas.microsoft.com/office/drawing/2014/main" id="{AB70DAE2-CBCD-04E9-3D26-1DEE2A4DC08A}"/>
-              </a:ext>
-            </a:extLst>
-          </p:cNvPr>
-          <p:cNvSpPr txBox="1"/>
-          <p:nvPr/>
-        </p:nvSpPr>
-        <p:spPr>
-          <a:xfrm>
-            <a:off x="9720227" y="2313229"/>
-            <a:ext cx="1560379" cy="276999"/>
-          </a:xfrm>
-          <a:prstGeom prst="rect">
-            <a:avLst/>
-          </a:prstGeom>
-          <a:noFill/>
-        </p:spPr>
-        <p:txBody>
-          <a:bodyPr wrap="square">
-            <a:spAutoFit/>
-          </a:bodyPr>
-          <a:lstStyle/>
-          <a:p>
-            <a:pPr algn="ctr"/>
-            <a:r>
-              <a:rPr lang="sv-SE" sz="1200">
-                <a:solidFill>
-                  <a:schemeClr val="bg1">
-                    <a:lumMod val="65000"/>
-                  </a:schemeClr>
-                </a:solidFill>
-              </a:rPr>
-              <a:t>0x1FFFFFFC</a:t>
-            </a:r>
-            <a:endParaRPr lang="en-SE" sz="1200">
-              <a:solidFill>
-                <a:schemeClr val="bg1">
-                  <a:lumMod val="65000"/>
-                </a:schemeClr>
-              </a:solidFill>
-            </a:endParaRPr>
-          </a:p>
-        </p:txBody>
-      </p:sp>
-      <p:sp>
-        <p:nvSpPr>
-          <p:cNvPr id="120" name="TextBox 119">
-            <a:extLst>
-              <a:ext uri="{FF2B5EF4-FFF2-40B4-BE49-F238E27FC236}">
-                <a16:creationId xmlns:a16="http://schemas.microsoft.com/office/drawing/2014/main" id="{D0B0DE4B-A6D2-40E6-B105-817EE251B1C7}"/>
-              </a:ext>
-            </a:extLst>
-          </p:cNvPr>
-          <p:cNvSpPr txBox="1"/>
-          <p:nvPr/>
-        </p:nvSpPr>
-        <p:spPr>
-          <a:xfrm>
-            <a:off x="2805757" y="2367338"/>
-            <a:ext cx="1085554" cy="307777"/>
-          </a:xfrm>
-          <a:prstGeom prst="rect">
-            <a:avLst/>
-          </a:prstGeom>
-          <a:noFill/>
-        </p:spPr>
-        <p:txBody>
-          <a:bodyPr wrap="none" rtlCol="0">
-            <a:spAutoFit/>
-          </a:bodyPr>
-          <a:lstStyle/>
-          <a:p>
-            <a:r>
-              <a:rPr lang="sv-SE" sz="1400">
-                <a:solidFill>
-                  <a:srgbClr val="C00000"/>
-                </a:solidFill>
-              </a:rPr>
-              <a:t>0x20000006</a:t>
-            </a:r>
-            <a:endParaRPr lang="en-SE" sz="1400">
-              <a:solidFill>
-                <a:srgbClr val="C00000"/>
-              </a:solidFill>
-            </a:endParaRPr>
-          </a:p>
-        </p:txBody>
-      </p:sp>
-      <p:sp>
-        <p:nvSpPr>
-          <p:cNvPr id="121" name="TextBox 120">
-            <a:extLst>
-              <a:ext uri="{FF2B5EF4-FFF2-40B4-BE49-F238E27FC236}">
-                <a16:creationId xmlns:a16="http://schemas.microsoft.com/office/drawing/2014/main" id="{20FC5A9B-1237-E0AE-2827-D320B3C8437E}"/>
-              </a:ext>
-            </a:extLst>
-          </p:cNvPr>
-          <p:cNvSpPr txBox="1"/>
-          <p:nvPr/>
-        </p:nvSpPr>
-        <p:spPr>
-          <a:xfrm>
-            <a:off x="1620366" y="5838515"/>
-            <a:ext cx="6136912" cy="307777"/>
-          </a:xfrm>
-          <a:prstGeom prst="rect">
-            <a:avLst/>
-          </a:prstGeom>
-          <a:noFill/>
-        </p:spPr>
-        <p:txBody>
-          <a:bodyPr wrap="square">
-            <a:spAutoFit/>
-          </a:bodyPr>
-          <a:lstStyle/>
-          <a:p>
-            <a:pPr algn="ctr"/>
-            <a:r>
-              <a:rPr lang="sv-SE" sz="1400">
-                <a:solidFill>
-                  <a:srgbClr val="C00000"/>
-                </a:solidFill>
-              </a:rPr>
-              <a:t>0x????????</a:t>
-            </a:r>
-            <a:endParaRPr lang="en-SE" sz="1400">
-              <a:solidFill>
-                <a:srgbClr val="C00000"/>
-              </a:solidFill>
-            </a:endParaRPr>
-          </a:p>
-        </p:txBody>
-      </p:sp>
-      <p:sp>
-        <p:nvSpPr>
-          <p:cNvPr id="122" name="Rectangle 121">
-            <a:extLst>
-              <a:ext uri="{FF2B5EF4-FFF2-40B4-BE49-F238E27FC236}">
-                <a16:creationId xmlns:a16="http://schemas.microsoft.com/office/drawing/2014/main" id="{51CABB0C-0C86-534C-44BD-4F22AD38C4C8}"/>
-              </a:ext>
-            </a:extLst>
-          </p:cNvPr>
-          <p:cNvSpPr/>
-          <p:nvPr/>
-        </p:nvSpPr>
-        <p:spPr>
-          <a:xfrm>
-            <a:off x="4580270" y="2367338"/>
-            <a:ext cx="1368151" cy="360040"/>
-          </a:xfrm>
-          <a:prstGeom prst="rect">
-            <a:avLst/>
-          </a:prstGeom>
-          <a:noFill/>
-          <a:ln w="25400">
-            <a:solidFill>
-              <a:srgbClr val="C00000"/>
-            </a:solidFill>
-          </a:ln>
-        </p:spPr>
-        <p:style>
-          <a:lnRef idx="2">
-            <a:schemeClr val="accent1">
-              <a:shade val="50000"/>
-            </a:schemeClr>
-          </a:lnRef>
-          <a:fillRef idx="1">
-            <a:schemeClr val="accent1"/>
-          </a:fillRef>
-          <a:effectRef idx="0">
-            <a:schemeClr val="accent1"/>
-          </a:effectRef>
-          <a:fontRef idx="minor">
-            <a:schemeClr val="lt1"/>
-          </a:fontRef>
-        </p:style>
-        <p:txBody>
-          <a:bodyPr rtlCol="0" anchor="ctr"/>
-          <a:lstStyle/>
-          <a:p>
-            <a:pPr algn="ctr"/>
-            <a:r>
-              <a:rPr lang="sv-SE">
-                <a:solidFill>
-                  <a:schemeClr val="tx1"/>
-                </a:solidFill>
-              </a:rPr>
-              <a:t>Addresslogik</a:t>
-            </a:r>
-            <a:endParaRPr lang="en-SE">
-              <a:solidFill>
-                <a:schemeClr val="tx1"/>
-              </a:solidFill>
-            </a:endParaRPr>
-          </a:p>
-        </p:txBody>
-      </p:sp>
-      <p:sp>
-        <p:nvSpPr>
-          <p:cNvPr id="123" name="Freeform: Shape 122">
-            <a:extLst>
-              <a:ext uri="{FF2B5EF4-FFF2-40B4-BE49-F238E27FC236}">
-                <a16:creationId xmlns:a16="http://schemas.microsoft.com/office/drawing/2014/main" id="{3018F8AF-6FD5-1756-172A-C490573B222E}"/>
-              </a:ext>
-            </a:extLst>
-          </p:cNvPr>
-          <p:cNvSpPr/>
-          <p:nvPr/>
-        </p:nvSpPr>
-        <p:spPr>
-          <a:xfrm>
-            <a:off x="8784554" y="3565808"/>
-            <a:ext cx="1215109" cy="368214"/>
-          </a:xfrm>
-          <a:custGeom>
-            <a:avLst/>
-            <a:gdLst>
-              <a:gd name="csX0" fmla="*/ 1215109 w 1215109"/>
-              <a:gd name="csY0" fmla="*/ 0 h 368214"/>
-              <a:gd name="csX1" fmla="*/ 822224 w 1215109"/>
-              <a:gd name="csY1" fmla="*/ 1984 h 368214"/>
-              <a:gd name="csX2" fmla="*/ 453641 w 1215109"/>
-              <a:gd name="csY2" fmla="*/ 3846 h 368214"/>
-              <a:gd name="csX3" fmla="*/ 0 w 1215109"/>
-              <a:gd name="csY3" fmla="*/ 6137 h 368214"/>
-              <a:gd name="csX4" fmla="*/ 6137 w 1215109"/>
-              <a:gd name="csY4" fmla="*/ 368214 h 368214"/>
-              <a:gd name="csX5" fmla="*/ 384948 w 1215109"/>
-              <a:gd name="csY5" fmla="*/ 366291 h 368214"/>
-              <a:gd name="csX6" fmla="*/ 812118 w 1215109"/>
-              <a:gd name="csY6" fmla="*/ 364123 h 368214"/>
-              <a:gd name="csX7" fmla="*/ 1215109 w 1215109"/>
-              <a:gd name="csY7" fmla="*/ 362078 h 368214"/>
-              <a:gd name="csX8" fmla="*/ 1215109 w 1215109"/>
-              <a:gd name="csY8" fmla="*/ 362078 h 368214"/>
-            </a:gdLst>
-            <a:ahLst/>
-            <a:cxnLst>
-              <a:cxn ang="0">
-                <a:pos x="csX0" y="csY0"/>
-              </a:cxn>
-              <a:cxn ang="0">
-                <a:pos x="csX1" y="csY1"/>
-              </a:cxn>
-              <a:cxn ang="0">
-                <a:pos x="csX2" y="csY2"/>
-              </a:cxn>
-              <a:cxn ang="0">
-                <a:pos x="csX3" y="csY3"/>
-              </a:cxn>
-              <a:cxn ang="0">
-                <a:pos x="csX4" y="csY4"/>
-              </a:cxn>
-              <a:cxn ang="0">
-                <a:pos x="csX5" y="csY5"/>
-              </a:cxn>
-              <a:cxn ang="0">
-                <a:pos x="csX6" y="csY6"/>
-              </a:cxn>
-              <a:cxn ang="0">
-                <a:pos x="csX7" y="csY7"/>
-              </a:cxn>
-              <a:cxn ang="0">
-                <a:pos x="csX8" y="csY8"/>
-              </a:cxn>
-            </a:cxnLst>
-            <a:rect l="l" t="t" r="r" b="b"/>
-            <a:pathLst>
-              <a:path w="1215109" h="368214" extrusionOk="0">
-                <a:moveTo>
-                  <a:pt x="1215109" y="0"/>
-                </a:moveTo>
-                <a:cubicBezTo>
-                  <a:pt x="1020858" y="32652"/>
-                  <a:pt x="1000259" y="-13616"/>
-                  <a:pt x="822224" y="1984"/>
-                </a:cubicBezTo>
-                <a:cubicBezTo>
-                  <a:pt x="644189" y="17585"/>
-                  <a:pt x="545076" y="-27752"/>
-                  <a:pt x="453641" y="3846"/>
-                </a:cubicBezTo>
-                <a:cubicBezTo>
-                  <a:pt x="362206" y="35444"/>
-                  <a:pt x="172220" y="-7782"/>
-                  <a:pt x="0" y="6137"/>
-                </a:cubicBezTo>
-                <a:cubicBezTo>
-                  <a:pt x="1621" y="87890"/>
-                  <a:pt x="-39792" y="216906"/>
-                  <a:pt x="6137" y="368214"/>
-                </a:cubicBezTo>
-                <a:cubicBezTo>
-                  <a:pt x="134178" y="326547"/>
-                  <a:pt x="235903" y="378445"/>
-                  <a:pt x="384948" y="366291"/>
-                </a:cubicBezTo>
-                <a:cubicBezTo>
-                  <a:pt x="533993" y="354137"/>
-                  <a:pt x="599210" y="371812"/>
-                  <a:pt x="812118" y="364123"/>
-                </a:cubicBezTo>
-                <a:cubicBezTo>
-                  <a:pt x="1025026" y="356435"/>
-                  <a:pt x="1054891" y="402912"/>
-                  <a:pt x="1215109" y="362078"/>
-                </a:cubicBezTo>
-                <a:lnTo>
-                  <a:pt x="1215109" y="362078"/>
-                </a:lnTo>
-              </a:path>
-            </a:pathLst>
-          </a:custGeom>
-          <a:noFill/>
-          <a:ln w="25400">
-            <a:solidFill>
-              <a:srgbClr val="C00000"/>
-            </a:solidFill>
-            <a:extLst>
-              <a:ext uri="{C807C97D-BFC1-408E-A445-0C87EB9F89A2}">
-                <ask:lineSketchStyleProps xmlns:ask="http://schemas.microsoft.com/office/drawing/2018/sketchyshapes" sd="1219033472">
-                  <a:custGeom>
-                    <a:avLst/>
-                    <a:gdLst>
-                      <a:gd name="connsiteX0" fmla="*/ 1215109 w 1215109"/>
-                      <a:gd name="connsiteY0" fmla="*/ 0 h 368214"/>
-                      <a:gd name="connsiteX1" fmla="*/ 0 w 1215109"/>
-                      <a:gd name="connsiteY1" fmla="*/ 6137 h 368214"/>
-                      <a:gd name="connsiteX2" fmla="*/ 6137 w 1215109"/>
-                      <a:gd name="connsiteY2" fmla="*/ 368214 h 368214"/>
-                      <a:gd name="connsiteX3" fmla="*/ 1215109 w 1215109"/>
-                      <a:gd name="connsiteY3" fmla="*/ 362078 h 368214"/>
-                      <a:gd name="connsiteX4" fmla="*/ 1215109 w 1215109"/>
-                      <a:gd name="connsiteY4" fmla="*/ 362078 h 368214"/>
-                    </a:gdLst>
-                    <a:ahLst/>
-                    <a:cxnLst>
-                      <a:cxn ang="0">
-                        <a:pos x="connsiteX0" y="connsiteY0"/>
-                      </a:cxn>
-                      <a:cxn ang="0">
-                        <a:pos x="connsiteX1" y="connsiteY1"/>
-                      </a:cxn>
-                      <a:cxn ang="0">
-                        <a:pos x="connsiteX2" y="connsiteY2"/>
-                      </a:cxn>
-                      <a:cxn ang="0">
-                        <a:pos x="connsiteX3" y="connsiteY3"/>
-                      </a:cxn>
-                      <a:cxn ang="0">
-                        <a:pos x="connsiteX4" y="connsiteY4"/>
-                      </a:cxn>
-                    </a:cxnLst>
-                    <a:rect l="l" t="t" r="r" b="b"/>
-                    <a:pathLst>
-                      <a:path w="1215109" h="368214">
-                        <a:moveTo>
-                          <a:pt x="1215109" y="0"/>
-                        </a:moveTo>
-                        <a:lnTo>
-                          <a:pt x="0" y="6137"/>
-                        </a:lnTo>
-                        <a:lnTo>
-                          <a:pt x="6137" y="368214"/>
-                        </a:lnTo>
-                        <a:lnTo>
-                          <a:pt x="1215109" y="362078"/>
-                        </a:lnTo>
-                        <a:lnTo>
-                          <a:pt x="1215109" y="362078"/>
-                        </a:lnTo>
-                      </a:path>
-                    </a:pathLst>
-                  </a:custGeom>
-                  <ask:type>
-                    <ask:lineSketchScribble/>
-                  </ask:type>
-                </ask:lineSketchStyleProps>
-              </a:ext>
-            </a:extLst>
-          </a:ln>
-        </p:spPr>
-        <p:style>
-          <a:lnRef idx="2">
-            <a:schemeClr val="accent1">
-              <a:shade val="50000"/>
-            </a:schemeClr>
-          </a:lnRef>
-          <a:fillRef idx="1">
-            <a:schemeClr val="accent1"/>
-          </a:fillRef>
-          <a:effectRef idx="0">
-            <a:schemeClr val="accent1"/>
-          </a:effectRef>
-          <a:fontRef idx="minor">
-            <a:schemeClr val="lt1"/>
-          </a:fontRef>
-        </p:style>
-        <p:txBody>
-          <a:bodyPr rtlCol="0" anchor="ctr"/>
-          <a:lstStyle/>
-          <a:p>
-            <a:pPr algn="ctr"/>
-            <a:endParaRPr lang="en-SE"/>
-          </a:p>
-        </p:txBody>
-      </p:sp>
-      <p:sp>
-        <p:nvSpPr>
-          <p:cNvPr id="124" name="Freeform: Shape 123">
-            <a:extLst>
-              <a:ext uri="{FF2B5EF4-FFF2-40B4-BE49-F238E27FC236}">
-                <a16:creationId xmlns:a16="http://schemas.microsoft.com/office/drawing/2014/main" id="{B6B1CCA8-881C-8A6A-BE8C-DB31C8A5C62C}"/>
-              </a:ext>
-            </a:extLst>
-          </p:cNvPr>
-          <p:cNvSpPr/>
-          <p:nvPr/>
-        </p:nvSpPr>
-        <p:spPr>
-          <a:xfrm flipH="1">
-            <a:off x="7618624" y="3159382"/>
-            <a:ext cx="1191389" cy="368214"/>
-          </a:xfrm>
-          <a:custGeom>
-            <a:avLst/>
-            <a:gdLst>
-              <a:gd name="csX0" fmla="*/ 1191389 w 1191389"/>
-              <a:gd name="csY0" fmla="*/ 0 h 368214"/>
-              <a:gd name="csX1" fmla="*/ 607608 w 1191389"/>
-              <a:gd name="csY1" fmla="*/ 3007 h 368214"/>
-              <a:gd name="csX2" fmla="*/ 0 w 1191389"/>
-              <a:gd name="csY2" fmla="*/ 6137 h 368214"/>
-              <a:gd name="csX3" fmla="*/ 6017 w 1191389"/>
-              <a:gd name="csY3" fmla="*/ 368214 h 368214"/>
-              <a:gd name="csX4" fmla="*/ 598703 w 1191389"/>
-              <a:gd name="csY4" fmla="*/ 365146 h 368214"/>
-              <a:gd name="csX5" fmla="*/ 1191389 w 1191389"/>
-              <a:gd name="csY5" fmla="*/ 362078 h 368214"/>
-              <a:gd name="csX6" fmla="*/ 1191389 w 1191389"/>
-              <a:gd name="csY6" fmla="*/ 362078 h 368214"/>
-            </a:gdLst>
-            <a:ahLst/>
-            <a:cxnLst>
-              <a:cxn ang="0">
-                <a:pos x="csX0" y="csY0"/>
-              </a:cxn>
-              <a:cxn ang="0">
-                <a:pos x="csX1" y="csY1"/>
-              </a:cxn>
-              <a:cxn ang="0">
-                <a:pos x="csX2" y="csY2"/>
-              </a:cxn>
-              <a:cxn ang="0">
-                <a:pos x="csX3" y="csY3"/>
-              </a:cxn>
-              <a:cxn ang="0">
-                <a:pos x="csX4" y="csY4"/>
-              </a:cxn>
-              <a:cxn ang="0">
-                <a:pos x="csX5" y="csY5"/>
-              </a:cxn>
-              <a:cxn ang="0">
-                <a:pos x="csX6" y="csY6"/>
-              </a:cxn>
-            </a:cxnLst>
-            <a:rect l="l" t="t" r="r" b="b"/>
-            <a:pathLst>
-              <a:path w="1191389" h="368214" extrusionOk="0">
-                <a:moveTo>
-                  <a:pt x="1191389" y="0"/>
-                </a:moveTo>
-                <a:cubicBezTo>
-                  <a:pt x="1006698" y="55467"/>
-                  <a:pt x="824956" y="-31230"/>
-                  <a:pt x="607608" y="3007"/>
-                </a:cubicBezTo>
-                <a:cubicBezTo>
-                  <a:pt x="390260" y="37244"/>
-                  <a:pt x="196911" y="-2435"/>
-                  <a:pt x="0" y="6137"/>
-                </a:cubicBezTo>
-                <a:cubicBezTo>
-                  <a:pt x="26430" y="177301"/>
-                  <a:pt x="-4453" y="268659"/>
-                  <a:pt x="6017" y="368214"/>
-                </a:cubicBezTo>
-                <a:cubicBezTo>
-                  <a:pt x="200404" y="343406"/>
-                  <a:pt x="451516" y="407754"/>
-                  <a:pt x="598703" y="365146"/>
-                </a:cubicBezTo>
-                <a:cubicBezTo>
-                  <a:pt x="745890" y="322538"/>
-                  <a:pt x="999899" y="370518"/>
-                  <a:pt x="1191389" y="362078"/>
-                </a:cubicBezTo>
-                <a:lnTo>
-                  <a:pt x="1191389" y="362078"/>
-                </a:lnTo>
-              </a:path>
-            </a:pathLst>
-          </a:custGeom>
-          <a:noFill/>
-          <a:ln w="25400">
-            <a:solidFill>
-              <a:srgbClr val="C00000"/>
-            </a:solidFill>
-            <a:extLst>
-              <a:ext uri="{C807C97D-BFC1-408E-A445-0C87EB9F89A2}">
-                <ask:lineSketchStyleProps xmlns:ask="http://schemas.microsoft.com/office/drawing/2018/sketchyshapes" sd="1219033472">
-                  <a:custGeom>
-                    <a:avLst/>
-                    <a:gdLst>
-                      <a:gd name="connsiteX0" fmla="*/ 1215109 w 1215109"/>
-                      <a:gd name="connsiteY0" fmla="*/ 0 h 368214"/>
-                      <a:gd name="connsiteX1" fmla="*/ 0 w 1215109"/>
-                      <a:gd name="connsiteY1" fmla="*/ 6137 h 368214"/>
-                      <a:gd name="connsiteX2" fmla="*/ 6137 w 1215109"/>
-                      <a:gd name="connsiteY2" fmla="*/ 368214 h 368214"/>
-                      <a:gd name="connsiteX3" fmla="*/ 1215109 w 1215109"/>
-                      <a:gd name="connsiteY3" fmla="*/ 362078 h 368214"/>
-                      <a:gd name="connsiteX4" fmla="*/ 1215109 w 1215109"/>
-                      <a:gd name="connsiteY4" fmla="*/ 362078 h 368214"/>
-                    </a:gdLst>
-                    <a:ahLst/>
-                    <a:cxnLst>
-                      <a:cxn ang="0">
-                        <a:pos x="connsiteX0" y="connsiteY0"/>
-                      </a:cxn>
-                      <a:cxn ang="0">
-                        <a:pos x="connsiteX1" y="connsiteY1"/>
-                      </a:cxn>
-                      <a:cxn ang="0">
-                        <a:pos x="connsiteX2" y="connsiteY2"/>
-                      </a:cxn>
-                      <a:cxn ang="0">
-                        <a:pos x="connsiteX3" y="connsiteY3"/>
-                      </a:cxn>
-                      <a:cxn ang="0">
-                        <a:pos x="connsiteX4" y="connsiteY4"/>
-                      </a:cxn>
-                    </a:cxnLst>
-                    <a:rect l="l" t="t" r="r" b="b"/>
-                    <a:pathLst>
-                      <a:path w="1215109" h="368214">
-                        <a:moveTo>
-                          <a:pt x="1215109" y="0"/>
-                        </a:moveTo>
-                        <a:lnTo>
-                          <a:pt x="0" y="6137"/>
-                        </a:lnTo>
-                        <a:lnTo>
-                          <a:pt x="6137" y="368214"/>
-                        </a:lnTo>
-                        <a:lnTo>
-                          <a:pt x="1215109" y="362078"/>
-                        </a:lnTo>
-                        <a:lnTo>
-                          <a:pt x="1215109" y="362078"/>
-                        </a:lnTo>
-                      </a:path>
-                    </a:pathLst>
-                  </a:custGeom>
-                  <ask:type>
-                    <ask:lineSketchScribble/>
-                  </ask:type>
-                </ask:lineSketchStyleProps>
-              </a:ext>
-            </a:extLst>
-          </a:ln>
-        </p:spPr>
-        <p:style>
-          <a:lnRef idx="2">
-            <a:schemeClr val="accent1">
-              <a:shade val="50000"/>
-            </a:schemeClr>
-          </a:lnRef>
-          <a:fillRef idx="1">
-            <a:schemeClr val="accent1"/>
-          </a:fillRef>
-          <a:effectRef idx="0">
-            <a:schemeClr val="accent1"/>
-          </a:effectRef>
-          <a:fontRef idx="minor">
-            <a:schemeClr val="lt1"/>
-          </a:fontRef>
-        </p:style>
-        <p:txBody>
-          <a:bodyPr rtlCol="0" anchor="ctr"/>
-          <a:lstStyle/>
-          <a:p>
-            <a:pPr algn="ctr"/>
-            <a:endParaRPr lang="en-SE"/>
-          </a:p>
-        </p:txBody>
-      </p:sp>
-      <p:sp>
-        <p:nvSpPr>
-          <p:cNvPr id="125" name="TextBox 124">
-            <a:extLst>
-              <a:ext uri="{FF2B5EF4-FFF2-40B4-BE49-F238E27FC236}">
-                <a16:creationId xmlns:a16="http://schemas.microsoft.com/office/drawing/2014/main" id="{45BE10ED-BF28-B2A1-FA68-E3E5D972A64B}"/>
-              </a:ext>
-            </a:extLst>
-          </p:cNvPr>
-          <p:cNvSpPr txBox="1"/>
-          <p:nvPr/>
-        </p:nvSpPr>
-        <p:spPr>
-          <a:xfrm>
-            <a:off x="3045497" y="3780068"/>
-            <a:ext cx="2073003" cy="523220"/>
-          </a:xfrm>
-          <a:prstGeom prst="rect">
-            <a:avLst/>
-          </a:prstGeom>
-          <a:noFill/>
-          <a:ln>
-            <a:solidFill>
-              <a:schemeClr val="tx1"/>
-            </a:solidFill>
-          </a:ln>
-        </p:spPr>
-        <p:txBody>
-          <a:bodyPr wrap="none" rtlCol="0">
-            <a:spAutoFit/>
-          </a:bodyPr>
-          <a:lstStyle/>
-          <a:p>
-            <a:r>
-              <a:rPr lang="sv-SE" sz="1400">
-                <a:latin typeface="Consolas" panose="020B0609020204030204" pitchFamily="49" charset="0"/>
-              </a:rPr>
-              <a:t>LDR r0, </a:t>
-            </a:r>
-            <a:r>
-              <a:rPr lang="en-GB" sz="1400">
-                <a:latin typeface="Consolas" panose="020B0609020204030204" pitchFamily="49" charset="0"/>
-              </a:rPr>
-              <a:t>=0x20000006</a:t>
-            </a:r>
-          </a:p>
-          <a:p>
-            <a:r>
-              <a:rPr lang="en-GB" sz="1400">
-                <a:solidFill>
-                  <a:srgbClr val="C00000"/>
-                </a:solidFill>
-                <a:latin typeface="Consolas" panose="020B0609020204030204" pitchFamily="49" charset="0"/>
-              </a:rPr>
-              <a:t>LDR r0, </a:t>
-            </a:r>
-            <a:r>
-              <a:rPr lang="en-US" sz="1400">
-                <a:solidFill>
-                  <a:srgbClr val="C00000"/>
-                </a:solidFill>
-                <a:latin typeface="Consolas" panose="020B0609020204030204" pitchFamily="49" charset="0"/>
-              </a:rPr>
-              <a:t>[r0]</a:t>
-            </a:r>
-            <a:endParaRPr lang="en-SE" sz="1400">
-              <a:solidFill>
-                <a:srgbClr val="C00000"/>
-              </a:solidFill>
-              <a:latin typeface="Consolas" panose="020B0609020204030204" pitchFamily="49" charset="0"/>
-            </a:endParaRPr>
-          </a:p>
-        </p:txBody>
-      </p:sp>
-      <p:sp>
-        <p:nvSpPr>
-          <p:cNvPr id="5" name="Title 4">
-            <a:extLst>
-              <a:ext uri="{FF2B5EF4-FFF2-40B4-BE49-F238E27FC236}">
-                <a16:creationId xmlns:a16="http://schemas.microsoft.com/office/drawing/2014/main" id="{D8A6D938-6FD8-4CFA-397F-62651371FF56}"/>
-              </a:ext>
-            </a:extLst>
-          </p:cNvPr>
-          <p:cNvSpPr>
-            <a:spLocks noGrp="1"/>
-          </p:cNvSpPr>
-          <p:nvPr>
-            <p:ph type="title"/>
-          </p:nvPr>
-        </p:nvSpPr>
-        <p:spPr/>
-        <p:txBody>
-          <a:bodyPr/>
-          <a:lstStyle/>
-          <a:p>
-            <a:r>
-              <a:rPr lang="sv-SE"/>
-              <a:t>Alignment (repetition)</a:t>
-            </a:r>
-            <a:endParaRPr lang="LID4096"/>
-          </a:p>
-        </p:txBody>
-      </p:sp>
     </p:spTree>
     <p:extLst>
       <p:ext uri="{BB962C8B-B14F-4D97-AF65-F5344CB8AC3E}">
-        <p14:creationId xmlns:p14="http://schemas.microsoft.com/office/powerpoint/2010/main" val="3798673514"/>
+        <p14:creationId xmlns:p14="http://schemas.microsoft.com/office/powerpoint/2010/main" val="677052489"/>
       </p:ext>
     </p:extLst>
   </p:cSld>
@@ -26124,33 +26514,15 @@
                                   </p:childTnLst>
                                 </p:cTn>
                               </p:par>
-                            </p:childTnLst>
-                          </p:cTn>
-                        </p:par>
-                      </p:childTnLst>
-                    </p:cTn>
-                  </p:par>
-                  <p:par>
-                    <p:cTn id="13" fill="hold">
-                      <p:stCondLst>
-                        <p:cond delay="indefinite"/>
-                      </p:stCondLst>
-                      <p:childTnLst>
-                        <p:par>
-                          <p:cTn id="14" fill="hold">
-                            <p:stCondLst>
-                              <p:cond delay="0"/>
-                            </p:stCondLst>
-                            <p:childTnLst>
                               <p:par>
-                                <p:cTn id="15" presetID="10" presetClass="entr" presetSubtype="0" fill="hold" nodeType="clickEffect">
+                                <p:cTn id="13" presetID="10" presetClass="entr" presetSubtype="0" fill="hold" nodeType="withEffect">
                                   <p:stCondLst>
                                     <p:cond delay="0"/>
                                   </p:stCondLst>
                                   <p:childTnLst>
                                     <p:set>
                                       <p:cBhvr>
-                                        <p:cTn id="16" dur="1" fill="hold">
+                                        <p:cTn id="14" dur="1" fill="hold">
                                           <p:stCondLst>
                                             <p:cond delay="0"/>
                                           </p:stCondLst>
@@ -26168,7 +26540,7 @@
                                     </p:set>
                                     <p:animEffect transition="in" filter="fade">
                                       <p:cBhvr>
-                                        <p:cTn id="17" dur="500"/>
+                                        <p:cTn id="15" dur="500"/>
                                         <p:tgtEl>
                                           <p:spTgt spid="34"/>
                                         </p:tgtEl>
@@ -26178,14 +26550,14 @@
                                 </p:cTn>
                               </p:par>
                               <p:par>
-                                <p:cTn id="18" presetID="10" presetClass="entr" presetSubtype="0" fill="hold" grpId="0" nodeType="withEffect">
+                                <p:cTn id="16" presetID="10" presetClass="entr" presetSubtype="0" fill="hold" grpId="0" nodeType="withEffect">
                                   <p:stCondLst>
                                     <p:cond delay="0"/>
                                   </p:stCondLst>
                                   <p:childTnLst>
                                     <p:set>
                                       <p:cBhvr>
-                                        <p:cTn id="19" dur="1" fill="hold">
+                                        <p:cTn id="17" dur="1" fill="hold">
                                           <p:stCondLst>
                                             <p:cond delay="0"/>
                                           </p:stCondLst>
@@ -26203,7 +26575,7 @@
                                     </p:set>
                                     <p:animEffect transition="in" filter="fade">
                                       <p:cBhvr>
-                                        <p:cTn id="20" dur="500"/>
+                                        <p:cTn id="18" dur="500"/>
                                         <p:tgtEl>
                                           <p:spTgt spid="30"/>
                                         </p:tgtEl>
@@ -27100,42 +27472,6 @@
           </a:p>
         </p:txBody>
       </p:sp>
-      <p:sp>
-        <p:nvSpPr>
-          <p:cNvPr id="18" name="TextBox 17">
-            <a:extLst>
-              <a:ext uri="{FF2B5EF4-FFF2-40B4-BE49-F238E27FC236}">
-                <a16:creationId xmlns:a16="http://schemas.microsoft.com/office/drawing/2014/main" id="{C6133A4A-B997-8B86-0371-1E12B054AA17}"/>
-              </a:ext>
-            </a:extLst>
-          </p:cNvPr>
-          <p:cNvSpPr txBox="1"/>
-          <p:nvPr/>
-        </p:nvSpPr>
-        <p:spPr>
-          <a:xfrm>
-            <a:off x="7184200" y="4332781"/>
-            <a:ext cx="878767" cy="261610"/>
-          </a:xfrm>
-          <a:prstGeom prst="rect">
-            <a:avLst/>
-          </a:prstGeom>
-          <a:noFill/>
-        </p:spPr>
-        <p:txBody>
-          <a:bodyPr wrap="none" rtlCol="0">
-            <a:spAutoFit/>
-          </a:bodyPr>
-          <a:lstStyle/>
-          <a:p>
-            <a:r>
-              <a:rPr lang="sv-SE" sz="1100"/>
-              <a:t>0x200000FF</a:t>
-            </a:r>
-            <a:endParaRPr lang="LID4096" sz="1100"/>
-          </a:p>
-        </p:txBody>
-      </p:sp>
       <p:cxnSp>
         <p:nvCxnSpPr>
           <p:cNvPr id="20" name="Straight Arrow Connector 19">
@@ -27266,199 +27602,6 @@
       </p:sp>
       <p:sp>
         <p:nvSpPr>
-          <p:cNvPr id="23" name="Rectangle 22">
-            <a:extLst>
-              <a:ext uri="{FF2B5EF4-FFF2-40B4-BE49-F238E27FC236}">
-                <a16:creationId xmlns:a16="http://schemas.microsoft.com/office/drawing/2014/main" id="{65774A35-7FBC-908C-827C-DB792D8FDF07}"/>
-              </a:ext>
-            </a:extLst>
-          </p:cNvPr>
-          <p:cNvSpPr/>
-          <p:nvPr/>
-        </p:nvSpPr>
-        <p:spPr>
-          <a:xfrm>
-            <a:off x="8014480" y="4127166"/>
-            <a:ext cx="1669576" cy="261610"/>
-          </a:xfrm>
-          <a:prstGeom prst="rect">
-            <a:avLst/>
-          </a:prstGeom>
-          <a:noFill/>
-          <a:ln>
-            <a:prstDash val="solid"/>
-          </a:ln>
-        </p:spPr>
-        <p:style>
-          <a:lnRef idx="2">
-            <a:schemeClr val="accent1">
-              <a:shade val="15000"/>
-            </a:schemeClr>
-          </a:lnRef>
-          <a:fillRef idx="1">
-            <a:schemeClr val="accent1"/>
-          </a:fillRef>
-          <a:effectRef idx="0">
-            <a:schemeClr val="accent1"/>
-          </a:effectRef>
-          <a:fontRef idx="minor">
-            <a:schemeClr val="lt1"/>
-          </a:fontRef>
-        </p:style>
-        <p:txBody>
-          <a:bodyPr rtlCol="0" anchor="ctr"/>
-          <a:lstStyle/>
-          <a:p>
-            <a:pPr algn="ctr"/>
-            <a:endParaRPr lang="LID4096"/>
-          </a:p>
-        </p:txBody>
-      </p:sp>
-      <p:sp>
-        <p:nvSpPr>
-          <p:cNvPr id="25" name="TextBox 24">
-            <a:extLst>
-              <a:ext uri="{FF2B5EF4-FFF2-40B4-BE49-F238E27FC236}">
-                <a16:creationId xmlns:a16="http://schemas.microsoft.com/office/drawing/2014/main" id="{082C0A0B-FD96-E4C8-A84B-A9A01DF933F6}"/>
-              </a:ext>
-            </a:extLst>
-          </p:cNvPr>
-          <p:cNvSpPr txBox="1"/>
-          <p:nvPr/>
-        </p:nvSpPr>
-        <p:spPr>
-          <a:xfrm>
-            <a:off x="9285229" y="4126008"/>
-            <a:ext cx="393056" cy="276999"/>
-          </a:xfrm>
-          <a:prstGeom prst="rect">
-            <a:avLst/>
-          </a:prstGeom>
-          <a:noFill/>
-          <a:ln>
-            <a:solidFill>
-              <a:schemeClr val="tx1"/>
-            </a:solidFill>
-          </a:ln>
-        </p:spPr>
-        <p:txBody>
-          <a:bodyPr wrap="none" rtlCol="0">
-            <a:spAutoFit/>
-          </a:bodyPr>
-          <a:lstStyle/>
-          <a:p>
-            <a:r>
-              <a:rPr lang="sv-SE" sz="600">
-                <a:latin typeface="Consolas" panose="020B0609020204030204" pitchFamily="49" charset="0"/>
-              </a:rPr>
-              <a:t>score</a:t>
-            </a:r>
-          </a:p>
-          <a:p>
-            <a:r>
-              <a:rPr lang="sv-SE" sz="600">
-                <a:latin typeface="Consolas" panose="020B0609020204030204" pitchFamily="49" charset="0"/>
-              </a:rPr>
-              <a:t>= 0</a:t>
-            </a:r>
-            <a:endParaRPr lang="LID4096" sz="600">
-              <a:latin typeface="Consolas" panose="020B0609020204030204" pitchFamily="49" charset="0"/>
-            </a:endParaRPr>
-          </a:p>
-        </p:txBody>
-      </p:sp>
-      <p:sp>
-        <p:nvSpPr>
-          <p:cNvPr id="2" name="Rectangle 1">
-            <a:extLst>
-              <a:ext uri="{FF2B5EF4-FFF2-40B4-BE49-F238E27FC236}">
-                <a16:creationId xmlns:a16="http://schemas.microsoft.com/office/drawing/2014/main" id="{80F1B489-EF83-FE0F-CC95-1A48898BDFCD}"/>
-              </a:ext>
-            </a:extLst>
-          </p:cNvPr>
-          <p:cNvSpPr/>
-          <p:nvPr/>
-        </p:nvSpPr>
-        <p:spPr>
-          <a:xfrm>
-            <a:off x="8013442" y="3864648"/>
-            <a:ext cx="1670613" cy="261610"/>
-          </a:xfrm>
-          <a:prstGeom prst="rect">
-            <a:avLst/>
-          </a:prstGeom>
-          <a:noFill/>
-          <a:ln>
-            <a:prstDash val="solid"/>
-          </a:ln>
-        </p:spPr>
-        <p:style>
-          <a:lnRef idx="2">
-            <a:schemeClr val="accent1">
-              <a:shade val="15000"/>
-            </a:schemeClr>
-          </a:lnRef>
-          <a:fillRef idx="1">
-            <a:schemeClr val="accent1"/>
-          </a:fillRef>
-          <a:effectRef idx="0">
-            <a:schemeClr val="accent1"/>
-          </a:effectRef>
-          <a:fontRef idx="minor">
-            <a:schemeClr val="lt1"/>
-          </a:fontRef>
-        </p:style>
-        <p:txBody>
-          <a:bodyPr rtlCol="0" anchor="ctr"/>
-          <a:lstStyle/>
-          <a:p>
-            <a:pPr algn="ctr"/>
-            <a:endParaRPr lang="LID4096"/>
-          </a:p>
-        </p:txBody>
-      </p:sp>
-      <p:sp>
-        <p:nvSpPr>
-          <p:cNvPr id="6" name="TextBox 5">
-            <a:extLst>
-              <a:ext uri="{FF2B5EF4-FFF2-40B4-BE49-F238E27FC236}">
-                <a16:creationId xmlns:a16="http://schemas.microsoft.com/office/drawing/2014/main" id="{CA3A5FA1-8EC2-5DFC-AF9A-9A86A41CA857}"/>
-              </a:ext>
-            </a:extLst>
-          </p:cNvPr>
-          <p:cNvSpPr txBox="1"/>
-          <p:nvPr/>
-        </p:nvSpPr>
-        <p:spPr>
-          <a:xfrm>
-            <a:off x="8458790" y="3874634"/>
-            <a:ext cx="954107" cy="230832"/>
-          </a:xfrm>
-          <a:prstGeom prst="rect">
-            <a:avLst/>
-          </a:prstGeom>
-          <a:noFill/>
-        </p:spPr>
-        <p:txBody>
-          <a:bodyPr wrap="none" rtlCol="0">
-            <a:spAutoFit/>
-          </a:bodyPr>
-          <a:lstStyle/>
-          <a:p>
-            <a:r>
-              <a:rPr lang="sv-SE" sz="900">
-                <a:latin typeface="Consolas" panose="020B0609020204030204" pitchFamily="49" charset="0"/>
-              </a:rPr>
-              <a:t>health = 100</a:t>
-            </a:r>
-            <a:endParaRPr lang="LID4096" sz="900">
-              <a:latin typeface="Consolas" panose="020B0609020204030204" pitchFamily="49" charset="0"/>
-            </a:endParaRPr>
-          </a:p>
-        </p:txBody>
-      </p:sp>
-      <p:sp>
-        <p:nvSpPr>
           <p:cNvPr id="8" name="TextBox 7">
             <a:extLst>
               <a:ext uri="{FF2B5EF4-FFF2-40B4-BE49-F238E27FC236}">
@@ -27719,63 +27862,313 @@
           </a:p>
         </p:txBody>
       </p:sp>
-      <p:sp>
-        <p:nvSpPr>
-          <p:cNvPr id="30" name="Rectangle 29">
-            <a:extLst>
-              <a:ext uri="{FF2B5EF4-FFF2-40B4-BE49-F238E27FC236}">
-                <a16:creationId xmlns:a16="http://schemas.microsoft.com/office/drawing/2014/main" id="{3115C7B3-D727-3AE2-D09A-F144DA54FA08}"/>
-              </a:ext>
-            </a:extLst>
-          </p:cNvPr>
-          <p:cNvSpPr/>
+      <p:grpSp>
+        <p:nvGrpSpPr>
+          <p:cNvPr id="7" name="Group 6">
+            <a:extLst>
+              <a:ext uri="{FF2B5EF4-FFF2-40B4-BE49-F238E27FC236}">
+                <a16:creationId xmlns:a16="http://schemas.microsoft.com/office/drawing/2014/main" id="{2037CF22-3068-6148-85DF-750B2A85C1DE}"/>
+              </a:ext>
+            </a:extLst>
+          </p:cNvPr>
+          <p:cNvGrpSpPr/>
           <p:nvPr/>
-        </p:nvSpPr>
-        <p:spPr>
+        </p:nvGrpSpPr>
+        <p:grpSpPr>
           <a:xfrm>
-            <a:off x="8019628" y="4119285"/>
-            <a:ext cx="1252636" cy="276999"/>
+            <a:off x="7184200" y="3864648"/>
+            <a:ext cx="2499856" cy="729743"/>
+            <a:chOff x="7184200" y="3864648"/>
+            <a:chExt cx="2499856" cy="729743"/>
           </a:xfrm>
-          <a:prstGeom prst="rect">
-            <a:avLst/>
-          </a:prstGeom>
-          <a:solidFill>
-            <a:schemeClr val="bg1">
-              <a:lumMod val="75000"/>
-            </a:schemeClr>
-          </a:solidFill>
-          <a:ln>
+        </p:grpSpPr>
+        <p:sp>
+          <p:nvSpPr>
+            <p:cNvPr id="18" name="TextBox 17">
+              <a:extLst>
+                <a:ext uri="{FF2B5EF4-FFF2-40B4-BE49-F238E27FC236}">
+                  <a16:creationId xmlns:a16="http://schemas.microsoft.com/office/drawing/2014/main" id="{C6133A4A-B997-8B86-0371-1E12B054AA17}"/>
+                </a:ext>
+              </a:extLst>
+            </p:cNvPr>
+            <p:cNvSpPr txBox="1"/>
+            <p:nvPr/>
+          </p:nvSpPr>
+          <p:spPr>
+            <a:xfrm>
+              <a:off x="7184200" y="4332781"/>
+              <a:ext cx="878767" cy="261610"/>
+            </a:xfrm>
+            <a:prstGeom prst="rect">
+              <a:avLst/>
+            </a:prstGeom>
+            <a:noFill/>
+          </p:spPr>
+          <p:txBody>
+            <a:bodyPr wrap="none" rtlCol="0">
+              <a:spAutoFit/>
+            </a:bodyPr>
+            <a:lstStyle/>
+            <a:p>
+              <a:r>
+                <a:rPr lang="sv-SE" sz="1100"/>
+                <a:t>0x200000FF</a:t>
+              </a:r>
+              <a:endParaRPr lang="LID4096" sz="1100"/>
+            </a:p>
+          </p:txBody>
+        </p:sp>
+        <p:sp>
+          <p:nvSpPr>
+            <p:cNvPr id="23" name="Rectangle 22">
+              <a:extLst>
+                <a:ext uri="{FF2B5EF4-FFF2-40B4-BE49-F238E27FC236}">
+                  <a16:creationId xmlns:a16="http://schemas.microsoft.com/office/drawing/2014/main" id="{65774A35-7FBC-908C-827C-DB792D8FDF07}"/>
+                </a:ext>
+              </a:extLst>
+            </p:cNvPr>
+            <p:cNvSpPr/>
+            <p:nvPr/>
+          </p:nvSpPr>
+          <p:spPr>
+            <a:xfrm>
+              <a:off x="8014480" y="4127166"/>
+              <a:ext cx="1669576" cy="261610"/>
+            </a:xfrm>
+            <a:prstGeom prst="rect">
+              <a:avLst/>
+            </a:prstGeom>
+            <a:noFill/>
+            <a:ln>
+              <a:prstDash val="solid"/>
+            </a:ln>
+          </p:spPr>
+          <p:style>
+            <a:lnRef idx="2">
+              <a:schemeClr val="accent1">
+                <a:shade val="15000"/>
+              </a:schemeClr>
+            </a:lnRef>
+            <a:fillRef idx="1">
+              <a:schemeClr val="accent1"/>
+            </a:fillRef>
+            <a:effectRef idx="0">
+              <a:schemeClr val="accent1"/>
+            </a:effectRef>
+            <a:fontRef idx="minor">
+              <a:schemeClr val="lt1"/>
+            </a:fontRef>
+          </p:style>
+          <p:txBody>
+            <a:bodyPr rtlCol="0" anchor="ctr"/>
+            <a:lstStyle/>
+            <a:p>
+              <a:pPr algn="ctr"/>
+              <a:endParaRPr lang="LID4096"/>
+            </a:p>
+          </p:txBody>
+        </p:sp>
+        <p:sp>
+          <p:nvSpPr>
+            <p:cNvPr id="25" name="TextBox 24">
+              <a:extLst>
+                <a:ext uri="{FF2B5EF4-FFF2-40B4-BE49-F238E27FC236}">
+                  <a16:creationId xmlns:a16="http://schemas.microsoft.com/office/drawing/2014/main" id="{082C0A0B-FD96-E4C8-A84B-A9A01DF933F6}"/>
+                </a:ext>
+              </a:extLst>
+            </p:cNvPr>
+            <p:cNvSpPr txBox="1"/>
+            <p:nvPr/>
+          </p:nvSpPr>
+          <p:spPr>
+            <a:xfrm>
+              <a:off x="9285229" y="4126008"/>
+              <a:ext cx="393056" cy="276999"/>
+            </a:xfrm>
+            <a:prstGeom prst="rect">
+              <a:avLst/>
+            </a:prstGeom>
+            <a:noFill/>
+            <a:ln>
+              <a:solidFill>
+                <a:schemeClr val="tx1"/>
+              </a:solidFill>
+            </a:ln>
+          </p:spPr>
+          <p:txBody>
+            <a:bodyPr wrap="none" rtlCol="0">
+              <a:spAutoFit/>
+            </a:bodyPr>
+            <a:lstStyle/>
+            <a:p>
+              <a:r>
+                <a:rPr lang="sv-SE" sz="600">
+                  <a:latin typeface="Consolas" panose="020B0609020204030204" pitchFamily="49" charset="0"/>
+                </a:rPr>
+                <a:t>score</a:t>
+              </a:r>
+            </a:p>
+            <a:p>
+              <a:r>
+                <a:rPr lang="sv-SE" sz="600">
+                  <a:latin typeface="Consolas" panose="020B0609020204030204" pitchFamily="49" charset="0"/>
+                </a:rPr>
+                <a:t>= 0</a:t>
+              </a:r>
+              <a:endParaRPr lang="LID4096" sz="600">
+                <a:latin typeface="Consolas" panose="020B0609020204030204" pitchFamily="49" charset="0"/>
+              </a:endParaRPr>
+            </a:p>
+          </p:txBody>
+        </p:sp>
+        <p:sp>
+          <p:nvSpPr>
+            <p:cNvPr id="2" name="Rectangle 1">
+              <a:extLst>
+                <a:ext uri="{FF2B5EF4-FFF2-40B4-BE49-F238E27FC236}">
+                  <a16:creationId xmlns:a16="http://schemas.microsoft.com/office/drawing/2014/main" id="{80F1B489-EF83-FE0F-CC95-1A48898BDFCD}"/>
+                </a:ext>
+              </a:extLst>
+            </p:cNvPr>
+            <p:cNvSpPr/>
+            <p:nvPr/>
+          </p:nvSpPr>
+          <p:spPr>
+            <a:xfrm>
+              <a:off x="8013442" y="3864648"/>
+              <a:ext cx="1670613" cy="261610"/>
+            </a:xfrm>
+            <a:prstGeom prst="rect">
+              <a:avLst/>
+            </a:prstGeom>
+            <a:noFill/>
+            <a:ln>
+              <a:prstDash val="solid"/>
+            </a:ln>
+          </p:spPr>
+          <p:style>
+            <a:lnRef idx="2">
+              <a:schemeClr val="accent1">
+                <a:shade val="15000"/>
+              </a:schemeClr>
+            </a:lnRef>
+            <a:fillRef idx="1">
+              <a:schemeClr val="accent1"/>
+            </a:fillRef>
+            <a:effectRef idx="0">
+              <a:schemeClr val="accent1"/>
+            </a:effectRef>
+            <a:fontRef idx="minor">
+              <a:schemeClr val="lt1"/>
+            </a:fontRef>
+          </p:style>
+          <p:txBody>
+            <a:bodyPr rtlCol="0" anchor="ctr"/>
+            <a:lstStyle/>
+            <a:p>
+              <a:pPr algn="ctr"/>
+              <a:endParaRPr lang="LID4096"/>
+            </a:p>
+          </p:txBody>
+        </p:sp>
+        <p:sp>
+          <p:nvSpPr>
+            <p:cNvPr id="6" name="TextBox 5">
+              <a:extLst>
+                <a:ext uri="{FF2B5EF4-FFF2-40B4-BE49-F238E27FC236}">
+                  <a16:creationId xmlns:a16="http://schemas.microsoft.com/office/drawing/2014/main" id="{CA3A5FA1-8EC2-5DFC-AF9A-9A86A41CA857}"/>
+                </a:ext>
+              </a:extLst>
+            </p:cNvPr>
+            <p:cNvSpPr txBox="1"/>
+            <p:nvPr/>
+          </p:nvSpPr>
+          <p:spPr>
+            <a:xfrm>
+              <a:off x="8458790" y="3874634"/>
+              <a:ext cx="954107" cy="230832"/>
+            </a:xfrm>
+            <a:prstGeom prst="rect">
+              <a:avLst/>
+            </a:prstGeom>
+            <a:noFill/>
+          </p:spPr>
+          <p:txBody>
+            <a:bodyPr wrap="none" rtlCol="0">
+              <a:spAutoFit/>
+            </a:bodyPr>
+            <a:lstStyle/>
+            <a:p>
+              <a:r>
+                <a:rPr lang="sv-SE" sz="900">
+                  <a:latin typeface="Consolas" panose="020B0609020204030204" pitchFamily="49" charset="0"/>
+                </a:rPr>
+                <a:t>health = 100</a:t>
+              </a:r>
+              <a:endParaRPr lang="LID4096" sz="900">
+                <a:latin typeface="Consolas" panose="020B0609020204030204" pitchFamily="49" charset="0"/>
+              </a:endParaRPr>
+            </a:p>
+          </p:txBody>
+        </p:sp>
+        <p:sp>
+          <p:nvSpPr>
+            <p:cNvPr id="30" name="Rectangle 29">
+              <a:extLst>
+                <a:ext uri="{FF2B5EF4-FFF2-40B4-BE49-F238E27FC236}">
+                  <a16:creationId xmlns:a16="http://schemas.microsoft.com/office/drawing/2014/main" id="{3115C7B3-D727-3AE2-D09A-F144DA54FA08}"/>
+                </a:ext>
+              </a:extLst>
+            </p:cNvPr>
+            <p:cNvSpPr/>
+            <p:nvPr/>
+          </p:nvSpPr>
+          <p:spPr>
+            <a:xfrm>
+              <a:off x="8019628" y="4119285"/>
+              <a:ext cx="1252636" cy="276999"/>
+            </a:xfrm>
+            <a:prstGeom prst="rect">
+              <a:avLst/>
+            </a:prstGeom>
             <a:solidFill>
-              <a:schemeClr val="tx1"/>
+              <a:schemeClr val="bg1">
+                <a:lumMod val="75000"/>
+              </a:schemeClr>
             </a:solidFill>
-            <a:prstDash val="solid"/>
-          </a:ln>
-        </p:spPr>
-        <p:style>
-          <a:lnRef idx="2">
-            <a:schemeClr val="accent1">
-              <a:shade val="15000"/>
-            </a:schemeClr>
-          </a:lnRef>
-          <a:fillRef idx="1">
-            <a:schemeClr val="accent1"/>
-          </a:fillRef>
-          <a:effectRef idx="0">
-            <a:schemeClr val="accent1"/>
-          </a:effectRef>
-          <a:fontRef idx="minor">
-            <a:schemeClr val="lt1"/>
-          </a:fontRef>
-        </p:style>
-        <p:txBody>
-          <a:bodyPr rtlCol="0" anchor="ctr"/>
-          <a:lstStyle/>
-          <a:p>
-            <a:pPr algn="ctr"/>
-            <a:endParaRPr lang="LID4096"/>
-          </a:p>
-        </p:txBody>
-      </p:sp>
+            <a:ln>
+              <a:solidFill>
+                <a:schemeClr val="tx1"/>
+              </a:solidFill>
+              <a:prstDash val="solid"/>
+            </a:ln>
+          </p:spPr>
+          <p:style>
+            <a:lnRef idx="2">
+              <a:schemeClr val="accent1">
+                <a:shade val="15000"/>
+              </a:schemeClr>
+            </a:lnRef>
+            <a:fillRef idx="1">
+              <a:schemeClr val="accent1"/>
+            </a:fillRef>
+            <a:effectRef idx="0">
+              <a:schemeClr val="accent1"/>
+            </a:effectRef>
+            <a:fontRef idx="minor">
+              <a:schemeClr val="lt1"/>
+            </a:fontRef>
+          </p:style>
+          <p:txBody>
+            <a:bodyPr rtlCol="0" anchor="ctr"/>
+            <a:lstStyle/>
+            <a:p>
+              <a:pPr algn="ctr"/>
+              <a:endParaRPr lang="LID4096"/>
+            </a:p>
+          </p:txBody>
+        </p:sp>
+      </p:grpSp>
     </p:spTree>
     <p:extLst>
       <p:ext uri="{BB962C8B-B14F-4D97-AF65-F5344CB8AC3E}">
@@ -27835,6 +28228,41 @@
                                         <p:cTn id="7" dur="500"/>
                                         <p:tgtEl>
                                           <p:spTgt spid="29"/>
+                                        </p:tgtEl>
+                                      </p:cBhvr>
+                                    </p:animEffect>
+                                  </p:childTnLst>
+                                </p:cTn>
+                              </p:par>
+                              <p:par>
+                                <p:cTn id="8" presetID="10" presetClass="entr" presetSubtype="0" fill="hold" nodeType="withEffect">
+                                  <p:stCondLst>
+                                    <p:cond delay="0"/>
+                                  </p:stCondLst>
+                                  <p:childTnLst>
+                                    <p:set>
+                                      <p:cBhvr>
+                                        <p:cTn id="9" dur="1" fill="hold">
+                                          <p:stCondLst>
+                                            <p:cond delay="0"/>
+                                          </p:stCondLst>
+                                        </p:cTn>
+                                        <p:tgtEl>
+                                          <p:spTgt spid="7"/>
+                                        </p:tgtEl>
+                                        <p:attrNameLst>
+                                          <p:attrName>style.visibility</p:attrName>
+                                        </p:attrNameLst>
+                                      </p:cBhvr>
+                                      <p:to>
+                                        <p:strVal val="visible"/>
+                                      </p:to>
+                                    </p:set>
+                                    <p:animEffect transition="in" filter="fade">
+                                      <p:cBhvr>
+                                        <p:cTn id="10" dur="500"/>
+                                        <p:tgtEl>
+                                          <p:spTgt spid="7"/>
                                         </p:tgtEl>
                                       </p:cBhvr>
                                     </p:animEffect>
